--- a/docs/presentation_rag.pptx
+++ b/docs/presentation_rag.pptx
@@ -2923,7 +2923,7 @@
                 <a:ea typeface="Calibri" pitchFamily="34" charset="-122"/>
                 <a:cs typeface="Calibri" pitchFamily="34" charset="-120"/>
               </a:rPr>
-              <a:t>CI rapide : requirements-ci.txt séparé</a:t>
+              <a:t>Adaptation de la CI aux sous-modules git (submodules: recursive)</a:t>
             </a:r>
             <a:endParaRPr lang="en-US" sz="1250" dirty="0"/>
           </a:p>
@@ -4901,8 +4901,8 @@
         </p:nvSpPr>
         <p:spPr>
           <a:xfrm>
-            <a:off x="548640" y="320040"/>
-            <a:ext cx="9144000" cy="548640"/>
+            <a:off x="548640" y="274320"/>
+            <a:ext cx="9144000" cy="457200"/>
           </a:xfrm>
           <a:prstGeom prst="rect">
             <a:avLst/>
@@ -4918,7 +4918,7 @@
               <a:buNone/>
             </a:pPr>
             <a:r>
-              <a:rPr lang="en-US" sz="3200" b="1" dirty="0">
+              <a:rPr lang="en-US" sz="2800" b="1" dirty="0">
                 <a:solidFill>
                   <a:srgbClr val="21295C"/>
                 </a:solidFill>
@@ -4928,7 +4928,7 @@
               </a:rPr>
               <a:t>Architecture système</a:t>
             </a:r>
-            <a:endParaRPr lang="en-US" sz="3200" dirty="0"/>
+            <a:endParaRPr lang="en-US" sz="2800" dirty="0"/>
           </a:p>
         </p:txBody>
       </p:sp>
@@ -4940,12 +4940,12 @@
         </p:nvSpPr>
         <p:spPr>
           <a:xfrm>
-            <a:off x="4892040" y="1051560"/>
-            <a:ext cx="2377440" cy="548640"/>
+            <a:off x="4892040" y="868680"/>
+            <a:ext cx="2377440" cy="457200"/>
           </a:xfrm>
           <a:prstGeom prst="roundRect">
             <a:avLst>
-              <a:gd name="adj" fmla="val 10000"/>
+              <a:gd name="adj" fmla="val 12000"/>
             </a:avLst>
           </a:prstGeom>
           <a:solidFill>
@@ -4962,8 +4962,8 @@
         </p:nvSpPr>
         <p:spPr>
           <a:xfrm>
-            <a:off x="4892040" y="1051560"/>
-            <a:ext cx="2377440" cy="548640"/>
+            <a:off x="4892040" y="868680"/>
+            <a:ext cx="2377440" cy="457200"/>
           </a:xfrm>
           <a:prstGeom prst="rect">
             <a:avLst/>
@@ -4979,7 +4979,7 @@
               <a:buNone/>
             </a:pPr>
             <a:r>
-              <a:rPr lang="en-US" sz="1200" b="1" dirty="0">
+              <a:rPr lang="en-US" sz="1100" b="1" dirty="0">
                 <a:solidFill>
                   <a:srgbClr val="FFFFFF"/>
                 </a:solidFill>
@@ -4989,7 +4989,7 @@
               </a:rPr>
               <a:t>Navigateur (utilisateur)</a:t>
             </a:r>
-            <a:endParaRPr lang="en-US" sz="1200" dirty="0"/>
+            <a:endParaRPr lang="en-US" sz="1100" dirty="0"/>
           </a:p>
         </p:txBody>
       </p:sp>
@@ -5001,8 +5001,8 @@
         </p:nvSpPr>
         <p:spPr>
           <a:xfrm>
-            <a:off x="5943600" y="1627632"/>
-            <a:ext cx="274320" cy="256032"/>
+            <a:off x="5943600" y="1344168"/>
+            <a:ext cx="274320" cy="201168"/>
           </a:xfrm>
           <a:prstGeom prst="downArrow">
             <a:avLst/>
@@ -5021,12 +5021,12 @@
         </p:nvSpPr>
         <p:spPr>
           <a:xfrm>
-            <a:off x="4709160" y="1920240"/>
-            <a:ext cx="2743200" cy="685800"/>
+            <a:off x="4709160" y="1572768"/>
+            <a:ext cx="2743200" cy="566928"/>
           </a:xfrm>
           <a:prstGeom prst="roundRect">
             <a:avLst>
-              <a:gd name="adj" fmla="val 8000"/>
+              <a:gd name="adj" fmla="val 9677"/>
             </a:avLst>
           </a:prstGeom>
           <a:solidFill>
@@ -5043,8 +5043,8 @@
         </p:nvSpPr>
         <p:spPr>
           <a:xfrm>
-            <a:off x="4709160" y="1920240"/>
-            <a:ext cx="2743200" cy="685800"/>
+            <a:off x="4709160" y="1572768"/>
+            <a:ext cx="2743200" cy="566928"/>
           </a:xfrm>
           <a:prstGeom prst="rect">
             <a:avLst/>
@@ -5060,7 +5060,7 @@
               <a:buNone/>
             </a:pPr>
             <a:r>
-              <a:rPr lang="en-US" sz="1200" b="1" dirty="0">
+              <a:rPr lang="en-US" sz="1100" b="1" dirty="0">
                 <a:solidFill>
                   <a:srgbClr val="FFFFFF"/>
                 </a:solidFill>
@@ -5068,26 +5068,9 @@
                 <a:ea typeface="Calibri" pitchFamily="34" charset="-122"/>
                 <a:cs typeface="Calibri" pitchFamily="34" charset="-120"/>
               </a:rPr>
-              <a:t>Streamlit UI</a:t>
-            </a:r>
-            <a:endParaRPr lang="en-US" sz="1200" dirty="0"/>
-          </a:p>
-          <a:p>
-            <a:pPr algn="ctr" indent="0" marL="0">
-              <a:buNone/>
-            </a:pPr>
-            <a:r>
-              <a:rPr lang="en-US" sz="1200" b="1" dirty="0">
-                <a:solidFill>
-                  <a:srgbClr val="FFFFFF"/>
-                </a:solidFill>
-                <a:latin typeface="Calibri" pitchFamily="34" charset="0"/>
-                <a:ea typeface="Calibri" pitchFamily="34" charset="-122"/>
-                <a:cs typeface="Calibri" pitchFamily="34" charset="-120"/>
-              </a:rPr>
-              <a:t>port 8501</a:t>
-            </a:r>
-            <a:endParaRPr lang="en-US" sz="1200" dirty="0"/>
+              <a:t>Streamlit UI — port 8501</a:t>
+            </a:r>
+            <a:endParaRPr lang="en-US" sz="1100" dirty="0"/>
           </a:p>
         </p:txBody>
       </p:sp>
@@ -5099,8 +5082,8 @@
         </p:nvSpPr>
         <p:spPr>
           <a:xfrm>
-            <a:off x="5943600" y="2651760"/>
-            <a:ext cx="274320" cy="256032"/>
+            <a:off x="5943600" y="2167128"/>
+            <a:ext cx="274320" cy="201168"/>
           </a:xfrm>
           <a:prstGeom prst="downArrow">
             <a:avLst/>
@@ -5119,12 +5102,12 @@
         </p:nvSpPr>
         <p:spPr>
           <a:xfrm>
-            <a:off x="4709160" y="2944368"/>
-            <a:ext cx="2743200" cy="685800"/>
+            <a:off x="4709160" y="2395728"/>
+            <a:ext cx="2743200" cy="566928"/>
           </a:xfrm>
           <a:prstGeom prst="roundRect">
             <a:avLst>
-              <a:gd name="adj" fmla="val 8000"/>
+              <a:gd name="adj" fmla="val 9677"/>
             </a:avLst>
           </a:prstGeom>
           <a:solidFill>
@@ -5141,8 +5124,8 @@
         </p:nvSpPr>
         <p:spPr>
           <a:xfrm>
-            <a:off x="4709160" y="2944368"/>
-            <a:ext cx="2743200" cy="685800"/>
+            <a:off x="4709160" y="2395728"/>
+            <a:ext cx="2743200" cy="566928"/>
           </a:xfrm>
           <a:prstGeom prst="rect">
             <a:avLst/>
@@ -5158,7 +5141,7 @@
               <a:buNone/>
             </a:pPr>
             <a:r>
-              <a:rPr lang="en-US" sz="1200" b="1" dirty="0">
+              <a:rPr lang="en-US" sz="1100" b="1" dirty="0">
                 <a:solidFill>
                   <a:srgbClr val="FFFFFF"/>
                 </a:solidFill>
@@ -5166,26 +5149,9 @@
                 <a:ea typeface="Calibri" pitchFamily="34" charset="-122"/>
                 <a:cs typeface="Calibri" pitchFamily="34" charset="-120"/>
               </a:rPr>
-              <a:t>FastAPI Backend</a:t>
-            </a:r>
-            <a:endParaRPr lang="en-US" sz="1200" dirty="0"/>
-          </a:p>
-          <a:p>
-            <a:pPr algn="ctr" indent="0" marL="0">
-              <a:buNone/>
-            </a:pPr>
-            <a:r>
-              <a:rPr lang="en-US" sz="1200" b="1" dirty="0">
-                <a:solidFill>
-                  <a:srgbClr val="FFFFFF"/>
-                </a:solidFill>
-                <a:latin typeface="Calibri" pitchFamily="34" charset="0"/>
-                <a:ea typeface="Calibri" pitchFamily="34" charset="-122"/>
-                <a:cs typeface="Calibri" pitchFamily="34" charset="-120"/>
-              </a:rPr>
-              <a:t>port 8000</a:t>
-            </a:r>
-            <a:endParaRPr lang="en-US" sz="1200" dirty="0"/>
+              <a:t>FastAPI Backend — port 8000</a:t>
+            </a:r>
+            <a:endParaRPr lang="en-US" sz="1100" dirty="0"/>
           </a:p>
         </p:txBody>
       </p:sp>
@@ -5197,13 +5163,11 @@
         </p:nvSpPr>
         <p:spPr>
           <a:xfrm>
-            <a:off x="822960" y="4343400"/>
-            <a:ext cx="2926080" cy="960120"/>
-          </a:xfrm>
-          <a:prstGeom prst="roundRect">
-            <a:avLst>
-              <a:gd name="adj" fmla="val 5714"/>
-            </a:avLst>
+            <a:off x="822960" y="3429000"/>
+            <a:ext cx="2743200" cy="914400"/>
+          </a:xfrm>
+          <a:prstGeom prst="can">
+            <a:avLst/>
           </a:prstGeom>
           <a:solidFill>
             <a:srgbClr val="21295C"/>
@@ -5219,24 +5183,24 @@
         </p:nvSpPr>
         <p:spPr>
           <a:xfrm>
-            <a:off x="822960" y="4343400"/>
-            <a:ext cx="2926080" cy="960120"/>
-          </a:xfrm>
-          <a:prstGeom prst="rect">
-            <a:avLst/>
-          </a:prstGeom>
-          <a:noFill/>
-          <a:ln/>
-        </p:spPr>
-        <p:txBody>
-          <a:bodyPr wrap="square" lIns="635" tIns="635" rIns="635" bIns="635" rtlCol="0" anchor="ctr"/>
+            <a:off x="822960" y="3520440"/>
+            <a:ext cx="2743200" cy="777240"/>
+          </a:xfrm>
+          <a:prstGeom prst="rect">
+            <a:avLst/>
+          </a:prstGeom>
+          <a:noFill/>
+          <a:ln/>
+        </p:spPr>
+        <p:txBody>
+          <a:bodyPr wrap="square" lIns="381" tIns="381" rIns="381" bIns="381" rtlCol="0" anchor="ctr"/>
           <a:lstStyle/>
           <a:p>
             <a:pPr algn="ctr" indent="0" marL="0">
               <a:buNone/>
             </a:pPr>
             <a:r>
-              <a:rPr lang="en-US" sz="1200" b="1" dirty="0">
+              <a:rPr lang="en-US" sz="1050" b="1" dirty="0">
                 <a:solidFill>
                   <a:srgbClr val="FFFFFF"/>
                 </a:solidFill>
@@ -5246,14 +5210,14 @@
               </a:rPr>
               <a:t>MinIO</a:t>
             </a:r>
-            <a:endParaRPr lang="en-US" sz="1200" dirty="0"/>
+            <a:endParaRPr lang="en-US" sz="1050" dirty="0"/>
           </a:p>
           <a:p>
             <a:pPr algn="ctr" indent="0" marL="0">
               <a:buNone/>
             </a:pPr>
             <a:r>
-              <a:rPr lang="en-US" sz="1200" b="1" dirty="0">
+              <a:rPr lang="en-US" sz="1050" b="1" dirty="0">
                 <a:solidFill>
                   <a:srgbClr val="FFFFFF"/>
                 </a:solidFill>
@@ -5263,14 +5227,14 @@
               </a:rPr>
               <a:t>Stockage objet</a:t>
             </a:r>
-            <a:endParaRPr lang="en-US" sz="1200" dirty="0"/>
+            <a:endParaRPr lang="en-US" sz="1050" dirty="0"/>
           </a:p>
           <a:p>
             <a:pPr algn="ctr" indent="0" marL="0">
               <a:buNone/>
             </a:pPr>
             <a:r>
-              <a:rPr lang="en-US" sz="1200" b="1" dirty="0">
+              <a:rPr lang="en-US" sz="1050" b="1" dirty="0">
                 <a:solidFill>
                   <a:srgbClr val="FFFFFF"/>
                 </a:solidFill>
@@ -5280,7 +5244,7 @@
               </a:rPr>
               <a:t>(document brut)</a:t>
             </a:r>
-            <a:endParaRPr lang="en-US" sz="1200" dirty="0"/>
+            <a:endParaRPr lang="en-US" sz="1050" dirty="0"/>
           </a:p>
         </p:txBody>
       </p:sp>
@@ -5292,13 +5256,11 @@
         </p:nvSpPr>
         <p:spPr>
           <a:xfrm>
-            <a:off x="4617720" y="4343400"/>
-            <a:ext cx="2926080" cy="960120"/>
-          </a:xfrm>
-          <a:prstGeom prst="roundRect">
-            <a:avLst>
-              <a:gd name="adj" fmla="val 5714"/>
-            </a:avLst>
+            <a:off x="4572000" y="3429000"/>
+            <a:ext cx="2834640" cy="914400"/>
+          </a:xfrm>
+          <a:prstGeom prst="can">
+            <a:avLst/>
           </a:prstGeom>
           <a:solidFill>
             <a:srgbClr val="21295C"/>
@@ -5314,24 +5276,24 @@
         </p:nvSpPr>
         <p:spPr>
           <a:xfrm>
-            <a:off x="4617720" y="4343400"/>
-            <a:ext cx="2926080" cy="960120"/>
-          </a:xfrm>
-          <a:prstGeom prst="rect">
-            <a:avLst/>
-          </a:prstGeom>
-          <a:noFill/>
-          <a:ln/>
-        </p:spPr>
-        <p:txBody>
-          <a:bodyPr wrap="square" lIns="635" tIns="635" rIns="635" bIns="635" rtlCol="0" anchor="ctr"/>
+            <a:off x="4572000" y="3520440"/>
+            <a:ext cx="2834640" cy="777240"/>
+          </a:xfrm>
+          <a:prstGeom prst="rect">
+            <a:avLst/>
+          </a:prstGeom>
+          <a:noFill/>
+          <a:ln/>
+        </p:spPr>
+        <p:txBody>
+          <a:bodyPr wrap="square" lIns="381" tIns="381" rIns="381" bIns="381" rtlCol="0" anchor="ctr"/>
           <a:lstStyle/>
           <a:p>
             <a:pPr algn="ctr" indent="0" marL="0">
               <a:buNone/>
             </a:pPr>
             <a:r>
-              <a:rPr lang="en-US" sz="1200" b="1" dirty="0">
+              <a:rPr lang="en-US" sz="1050" b="1" dirty="0">
                 <a:solidFill>
                   <a:srgbClr val="FFFFFF"/>
                 </a:solidFill>
@@ -5341,14 +5303,14 @@
               </a:rPr>
               <a:t>ChromaDB</a:t>
             </a:r>
-            <a:endParaRPr lang="en-US" sz="1200" dirty="0"/>
+            <a:endParaRPr lang="en-US" sz="1050" dirty="0"/>
           </a:p>
           <a:p>
             <a:pPr algn="ctr" indent="0" marL="0">
               <a:buNone/>
             </a:pPr>
             <a:r>
-              <a:rPr lang="en-US" sz="1200" b="1" dirty="0">
+              <a:rPr lang="en-US" sz="1050" b="1" dirty="0">
                 <a:solidFill>
                   <a:srgbClr val="FFFFFF"/>
                 </a:solidFill>
@@ -5358,14 +5320,14 @@
               </a:rPr>
               <a:t>Base vectorielle</a:t>
             </a:r>
-            <a:endParaRPr lang="en-US" sz="1200" dirty="0"/>
+            <a:endParaRPr lang="en-US" sz="1050" dirty="0"/>
           </a:p>
           <a:p>
             <a:pPr algn="ctr" indent="0" marL="0">
               <a:buNone/>
             </a:pPr>
             <a:r>
-              <a:rPr lang="en-US" sz="1200" b="1" dirty="0">
+              <a:rPr lang="en-US" sz="1050" b="1" dirty="0">
                 <a:solidFill>
                   <a:srgbClr val="FFFFFF"/>
                 </a:solidFill>
@@ -5375,7 +5337,7 @@
               </a:rPr>
               <a:t>(embeddings)</a:t>
             </a:r>
-            <a:endParaRPr lang="en-US" sz="1200" dirty="0"/>
+            <a:endParaRPr lang="en-US" sz="1050" dirty="0"/>
           </a:p>
         </p:txBody>
       </p:sp>
@@ -5387,12 +5349,12 @@
         </p:nvSpPr>
         <p:spPr>
           <a:xfrm>
-            <a:off x="8412480" y="4343400"/>
-            <a:ext cx="2926080" cy="960120"/>
+            <a:off x="8412480" y="3429000"/>
+            <a:ext cx="2834640" cy="914400"/>
           </a:xfrm>
           <a:prstGeom prst="roundRect">
             <a:avLst>
-              <a:gd name="adj" fmla="val 5714"/>
+              <a:gd name="adj" fmla="val 6000"/>
             </a:avLst>
           </a:prstGeom>
           <a:solidFill>
@@ -5409,8 +5371,8 @@
         </p:nvSpPr>
         <p:spPr>
           <a:xfrm>
-            <a:off x="8412480" y="4343400"/>
-            <a:ext cx="2926080" cy="960120"/>
+            <a:off x="8412480" y="3429000"/>
+            <a:ext cx="2834640" cy="914400"/>
           </a:xfrm>
           <a:prstGeom prst="rect">
             <a:avLst/>
@@ -5426,7 +5388,7 @@
               <a:buNone/>
             </a:pPr>
             <a:r>
-              <a:rPr lang="en-US" sz="1200" b="1" dirty="0">
+              <a:rPr lang="en-US" sz="1050" b="1" dirty="0">
                 <a:solidFill>
                   <a:srgbClr val="FFFFFF"/>
                 </a:solidFill>
@@ -5436,14 +5398,14 @@
               </a:rPr>
               <a:t>Ollama</a:t>
             </a:r>
-            <a:endParaRPr lang="en-US" sz="1200" dirty="0"/>
+            <a:endParaRPr lang="en-US" sz="1050" dirty="0"/>
           </a:p>
           <a:p>
             <a:pPr algn="ctr" indent="0" marL="0">
               <a:buNone/>
             </a:pPr>
             <a:r>
-              <a:rPr lang="en-US" sz="1200" b="1" dirty="0">
+              <a:rPr lang="en-US" sz="1050" b="1" dirty="0">
                 <a:solidFill>
                   <a:srgbClr val="FFFFFF"/>
                 </a:solidFill>
@@ -5453,14 +5415,14 @@
               </a:rPr>
               <a:t>qwen2.5:0.5b</a:t>
             </a:r>
-            <a:endParaRPr lang="en-US" sz="1200" dirty="0"/>
+            <a:endParaRPr lang="en-US" sz="1050" dirty="0"/>
           </a:p>
           <a:p>
             <a:pPr algn="ctr" indent="0" marL="0">
               <a:buNone/>
             </a:pPr>
             <a:r>
-              <a:rPr lang="en-US" sz="1200" b="1" dirty="0">
+              <a:rPr lang="en-US" sz="1050" b="1" dirty="0">
                 <a:solidFill>
                   <a:srgbClr val="FFFFFF"/>
                 </a:solidFill>
@@ -5470,7 +5432,7 @@
               </a:rPr>
               <a:t>(LLM local)</a:t>
             </a:r>
-            <a:endParaRPr lang="en-US" sz="1200" dirty="0"/>
+            <a:endParaRPr lang="en-US" sz="1050" dirty="0"/>
           </a:p>
         </p:txBody>
       </p:sp>
@@ -5482,8 +5444,8 @@
         </p:nvSpPr>
         <p:spPr>
           <a:xfrm>
-            <a:off x="6080760" y="3630168"/>
-            <a:ext cx="0" cy="393192"/>
+            <a:off x="6080760" y="2962656"/>
+            <a:ext cx="0" cy="283464"/>
           </a:xfrm>
           <a:prstGeom prst="line">
             <a:avLst/>
@@ -5505,8 +5467,8 @@
         </p:nvSpPr>
         <p:spPr>
           <a:xfrm>
-            <a:off x="2286000" y="4023360"/>
-            <a:ext cx="3794760" cy="0"/>
+            <a:off x="2194560" y="3246120"/>
+            <a:ext cx="3886200" cy="0"/>
           </a:xfrm>
           <a:prstGeom prst="line">
             <a:avLst/>
@@ -5528,8 +5490,8 @@
         </p:nvSpPr>
         <p:spPr>
           <a:xfrm>
-            <a:off x="6080760" y="4023360"/>
-            <a:ext cx="3794760" cy="0"/>
+            <a:off x="6080760" y="3246120"/>
+            <a:ext cx="3749040" cy="0"/>
           </a:xfrm>
           <a:prstGeom prst="line">
             <a:avLst/>
@@ -5551,8 +5513,8 @@
         </p:nvSpPr>
         <p:spPr>
           <a:xfrm>
-            <a:off x="2286000" y="4023360"/>
-            <a:ext cx="0" cy="320040"/>
+            <a:off x="2194560" y="3246120"/>
+            <a:ext cx="0" cy="182880"/>
           </a:xfrm>
           <a:prstGeom prst="line">
             <a:avLst/>
@@ -5574,8 +5536,8 @@
         </p:nvSpPr>
         <p:spPr>
           <a:xfrm>
-            <a:off x="6080760" y="4023360"/>
-            <a:ext cx="0" cy="320040"/>
+            <a:off x="6080760" y="3246120"/>
+            <a:ext cx="0" cy="182880"/>
           </a:xfrm>
           <a:prstGeom prst="line">
             <a:avLst/>
@@ -5597,8 +5559,8 @@
         </p:nvSpPr>
         <p:spPr>
           <a:xfrm>
-            <a:off x="9875520" y="4023360"/>
-            <a:ext cx="0" cy="320040"/>
+            <a:off x="9829800" y="3246120"/>
+            <a:ext cx="0" cy="182880"/>
           </a:xfrm>
           <a:prstGeom prst="line">
             <a:avLst/>
@@ -5620,8 +5582,8 @@
         </p:nvSpPr>
         <p:spPr>
           <a:xfrm>
-            <a:off x="548640" y="5532120"/>
-            <a:ext cx="10972800" cy="365760"/>
+            <a:off x="3108960" y="4526280"/>
+            <a:ext cx="5943600" cy="320040"/>
           </a:xfrm>
           <a:prstGeom prst="rect">
             <a:avLst/>
@@ -5637,7 +5599,384 @@
               <a:buNone/>
             </a:pPr>
             <a:r>
-              <a:rPr lang="en-US" sz="1100" i="1" dirty="0">
+              <a:rPr lang="en-US" sz="1400" b="1" dirty="0">
+                <a:solidFill>
+                  <a:srgbClr val="21295C"/>
+                </a:solidFill>
+                <a:latin typeface="Cambria" pitchFamily="34" charset="0"/>
+                <a:ea typeface="Cambria" pitchFamily="34" charset="-122"/>
+                <a:cs typeface="Cambria" pitchFamily="34" charset="-120"/>
+              </a:rPr>
+              <a:t>Versioning &amp; CI/CD</a:t>
+            </a:r>
+            <a:endParaRPr lang="en-US" sz="1400" dirty="0"/>
+          </a:p>
+        </p:txBody>
+      </p:sp>
+      <p:sp>
+        <p:nvSpPr>
+          <p:cNvPr id="24" name="Shape 22"/>
+          <p:cNvSpPr/>
+          <p:nvPr/>
+        </p:nvSpPr>
+        <p:spPr>
+          <a:xfrm>
+            <a:off x="2103120" y="4937760"/>
+            <a:ext cx="2286000" cy="868680"/>
+          </a:xfrm>
+          <a:prstGeom prst="can">
+            <a:avLst/>
+          </a:prstGeom>
+          <a:solidFill>
+            <a:srgbClr val="5B5B5B"/>
+          </a:solidFill>
+          <a:ln/>
+        </p:spPr>
+      </p:sp>
+      <p:sp>
+        <p:nvSpPr>
+          <p:cNvPr id="25" name="Text 23"/>
+          <p:cNvSpPr/>
+          <p:nvPr/>
+        </p:nvSpPr>
+        <p:spPr>
+          <a:xfrm>
+            <a:off x="2103120" y="5029200"/>
+            <a:ext cx="2286000" cy="731520"/>
+          </a:xfrm>
+          <a:prstGeom prst="rect">
+            <a:avLst/>
+          </a:prstGeom>
+          <a:noFill/>
+          <a:ln/>
+        </p:spPr>
+        <p:txBody>
+          <a:bodyPr wrap="square" lIns="381" tIns="381" rIns="381" bIns="381" rtlCol="0" anchor="ctr"/>
+          <a:lstStyle/>
+          <a:p>
+            <a:pPr algn="ctr" indent="0" marL="0">
+              <a:buNone/>
+            </a:pPr>
+            <a:r>
+              <a:rPr lang="en-US" sz="1000" b="1" dirty="0">
+                <a:solidFill>
+                  <a:srgbClr val="FFFFFF"/>
+                </a:solidFill>
+                <a:latin typeface="Calibri" pitchFamily="34" charset="0"/>
+                <a:ea typeface="Calibri" pitchFamily="34" charset="-122"/>
+                <a:cs typeface="Calibri" pitchFamily="34" charset="-120"/>
+              </a:rPr>
+              <a:t>Git</a:t>
+            </a:r>
+            <a:endParaRPr lang="en-US" sz="1000" dirty="0"/>
+          </a:p>
+          <a:p>
+            <a:pPr algn="ctr" indent="0" marL="0">
+              <a:buNone/>
+            </a:pPr>
+            <a:r>
+              <a:rPr lang="en-US" sz="1000" b="1" dirty="0">
+                <a:solidFill>
+                  <a:srgbClr val="FFFFFF"/>
+                </a:solidFill>
+                <a:latin typeface="Calibri" pitchFamily="34" charset="0"/>
+                <a:ea typeface="Calibri" pitchFamily="34" charset="-122"/>
+                <a:cs typeface="Calibri" pitchFamily="34" charset="-120"/>
+              </a:rPr>
+              <a:t>Dépôt eval_cloud</a:t>
+            </a:r>
+            <a:endParaRPr lang="en-US" sz="1000" dirty="0"/>
+          </a:p>
+          <a:p>
+            <a:pPr algn="ctr" indent="0" marL="0">
+              <a:buNone/>
+            </a:pPr>
+            <a:r>
+              <a:rPr lang="en-US" sz="1000" b="1" dirty="0">
+                <a:solidFill>
+                  <a:srgbClr val="FFFFFF"/>
+                </a:solidFill>
+                <a:latin typeface="Calibri" pitchFamily="34" charset="0"/>
+                <a:ea typeface="Calibri" pitchFamily="34" charset="-122"/>
+                <a:cs typeface="Calibri" pitchFamily="34" charset="-120"/>
+              </a:rPr>
+              <a:t>(GitHub)</a:t>
+            </a:r>
+            <a:endParaRPr lang="en-US" sz="1000" dirty="0"/>
+          </a:p>
+        </p:txBody>
+      </p:sp>
+      <p:sp>
+        <p:nvSpPr>
+          <p:cNvPr id="26" name="Shape 24"/>
+          <p:cNvSpPr/>
+          <p:nvPr/>
+        </p:nvSpPr>
+        <p:spPr>
+          <a:xfrm>
+            <a:off x="5120640" y="4956048"/>
+            <a:ext cx="2926080" cy="822960"/>
+          </a:xfrm>
+          <a:prstGeom prst="roundRect">
+            <a:avLst>
+              <a:gd name="adj" fmla="val 6667"/>
+            </a:avLst>
+          </a:prstGeom>
+          <a:solidFill>
+            <a:srgbClr val="B85042"/>
+          </a:solidFill>
+          <a:ln/>
+        </p:spPr>
+      </p:sp>
+      <p:sp>
+        <p:nvSpPr>
+          <p:cNvPr id="27" name="Text 25"/>
+          <p:cNvSpPr/>
+          <p:nvPr/>
+        </p:nvSpPr>
+        <p:spPr>
+          <a:xfrm>
+            <a:off x="5120640" y="4956048"/>
+            <a:ext cx="2926080" cy="822960"/>
+          </a:xfrm>
+          <a:prstGeom prst="rect">
+            <a:avLst/>
+          </a:prstGeom>
+          <a:noFill/>
+          <a:ln/>
+        </p:spPr>
+        <p:txBody>
+          <a:bodyPr wrap="square" lIns="635" tIns="635" rIns="635" bIns="635" rtlCol="0" anchor="ctr"/>
+          <a:lstStyle/>
+          <a:p>
+            <a:pPr algn="ctr" indent="0" marL="0">
+              <a:buNone/>
+            </a:pPr>
+            <a:r>
+              <a:rPr lang="en-US" sz="1050" b="1" dirty="0">
+                <a:solidFill>
+                  <a:srgbClr val="FFFFFF"/>
+                </a:solidFill>
+                <a:latin typeface="Calibri" pitchFamily="34" charset="0"/>
+                <a:ea typeface="Calibri" pitchFamily="34" charset="-122"/>
+                <a:cs typeface="Calibri" pitchFamily="34" charset="-120"/>
+              </a:rPr>
+              <a:t>CI/CD</a:t>
+            </a:r>
+            <a:endParaRPr lang="en-US" sz="1050" dirty="0"/>
+          </a:p>
+          <a:p>
+            <a:pPr algn="ctr" indent="0" marL="0">
+              <a:buNone/>
+            </a:pPr>
+            <a:r>
+              <a:rPr lang="en-US" sz="1050" b="1" dirty="0">
+                <a:solidFill>
+                  <a:srgbClr val="FFFFFF"/>
+                </a:solidFill>
+                <a:latin typeface="Calibri" pitchFamily="34" charset="0"/>
+                <a:ea typeface="Calibri" pitchFamily="34" charset="-122"/>
+                <a:cs typeface="Calibri" pitchFamily="34" charset="-120"/>
+              </a:rPr>
+              <a:t>GitHub Actions (ci.yml)</a:t>
+            </a:r>
+            <a:endParaRPr lang="en-US" sz="1050" dirty="0"/>
+          </a:p>
+        </p:txBody>
+      </p:sp>
+      <p:sp>
+        <p:nvSpPr>
+          <p:cNvPr id="28" name="Shape 26"/>
+          <p:cNvSpPr/>
+          <p:nvPr/>
+        </p:nvSpPr>
+        <p:spPr>
+          <a:xfrm>
+            <a:off x="4434840" y="5285232"/>
+            <a:ext cx="640080" cy="164592"/>
+          </a:xfrm>
+          <a:prstGeom prst="rightArrow">
+            <a:avLst/>
+          </a:prstGeom>
+          <a:solidFill>
+            <a:srgbClr val="191919"/>
+          </a:solidFill>
+          <a:ln/>
+        </p:spPr>
+      </p:sp>
+      <p:sp>
+        <p:nvSpPr>
+          <p:cNvPr id="29" name="Text 27"/>
+          <p:cNvSpPr/>
+          <p:nvPr/>
+        </p:nvSpPr>
+        <p:spPr>
+          <a:xfrm>
+            <a:off x="4343400" y="5468112"/>
+            <a:ext cx="868680" cy="274320"/>
+          </a:xfrm>
+          <a:prstGeom prst="rect">
+            <a:avLst/>
+          </a:prstGeom>
+          <a:noFill/>
+          <a:ln/>
+        </p:spPr>
+        <p:txBody>
+          <a:bodyPr wrap="square" lIns="0" tIns="0" rIns="0" bIns="0" rtlCol="0" anchor="ctr"/>
+          <a:lstStyle/>
+          <a:p>
+            <a:pPr algn="ctr" indent="0" marL="0">
+              <a:buNone/>
+            </a:pPr>
+            <a:r>
+              <a:rPr lang="en-US" sz="750" dirty="0">
+                <a:solidFill>
+                  <a:srgbClr val="191919"/>
+                </a:solidFill>
+                <a:latin typeface="Calibri" pitchFamily="34" charset="0"/>
+                <a:ea typeface="Calibri" pitchFamily="34" charset="-122"/>
+                <a:cs typeface="Calibri" pitchFamily="34" charset="-120"/>
+              </a:rPr>
+              <a:t>push / pull_request</a:t>
+            </a:r>
+            <a:endParaRPr lang="en-US" sz="750" dirty="0"/>
+          </a:p>
+        </p:txBody>
+      </p:sp>
+      <p:sp>
+        <p:nvSpPr>
+          <p:cNvPr id="30" name="Shape 28"/>
+          <p:cNvSpPr/>
+          <p:nvPr/>
+        </p:nvSpPr>
+        <p:spPr>
+          <a:xfrm>
+            <a:off x="8321040" y="5367528"/>
+            <a:ext cx="1234440" cy="0"/>
+          </a:xfrm>
+          <a:prstGeom prst="line">
+            <a:avLst/>
+          </a:prstGeom>
+          <a:noFill/>
+          <a:ln w="15875">
+            <a:solidFill>
+              <a:srgbClr val="B85042"/>
+            </a:solidFill>
+            <a:prstDash val="dash"/>
+          </a:ln>
+        </p:spPr>
+      </p:sp>
+      <p:sp>
+        <p:nvSpPr>
+          <p:cNvPr id="31" name="Shape 29"/>
+          <p:cNvSpPr/>
+          <p:nvPr/>
+        </p:nvSpPr>
+        <p:spPr>
+          <a:xfrm>
+            <a:off x="9555480" y="2679192"/>
+            <a:ext cx="0" cy="2688336"/>
+          </a:xfrm>
+          <a:prstGeom prst="line">
+            <a:avLst/>
+          </a:prstGeom>
+          <a:noFill/>
+          <a:ln w="15875">
+            <a:solidFill>
+              <a:srgbClr val="B85042"/>
+            </a:solidFill>
+            <a:prstDash val="dash"/>
+          </a:ln>
+        </p:spPr>
+      </p:sp>
+      <p:sp>
+        <p:nvSpPr>
+          <p:cNvPr id="32" name="Shape 30"/>
+          <p:cNvSpPr/>
+          <p:nvPr/>
+        </p:nvSpPr>
+        <p:spPr>
+          <a:xfrm>
+            <a:off x="7452360" y="2679192"/>
+            <a:ext cx="2103120" cy="0"/>
+          </a:xfrm>
+          <a:prstGeom prst="line">
+            <a:avLst/>
+          </a:prstGeom>
+          <a:noFill/>
+          <a:ln w="15875">
+            <a:solidFill>
+              <a:srgbClr val="B85042"/>
+            </a:solidFill>
+            <a:prstDash val="dash"/>
+          </a:ln>
+        </p:spPr>
+      </p:sp>
+      <p:sp>
+        <p:nvSpPr>
+          <p:cNvPr id="33" name="Text 31"/>
+          <p:cNvSpPr/>
+          <p:nvPr/>
+        </p:nvSpPr>
+        <p:spPr>
+          <a:xfrm>
+            <a:off x="8732520" y="3749040"/>
+            <a:ext cx="1463040" cy="274320"/>
+          </a:xfrm>
+          <a:prstGeom prst="rect">
+            <a:avLst/>
+          </a:prstGeom>
+          <a:noFill/>
+          <a:ln/>
+        </p:spPr>
+        <p:txBody>
+          <a:bodyPr wrap="square" lIns="0" tIns="0" rIns="0" bIns="0" rtlCol="0" anchor="ctr"/>
+          <a:lstStyle/>
+          <a:p>
+            <a:pPr algn="ctr" indent="0" marL="0">
+              <a:buNone/>
+            </a:pPr>
+            <a:r>
+              <a:rPr lang="en-US" sz="750" dirty="0">
+                <a:solidFill>
+                  <a:srgbClr val="B85042"/>
+                </a:solidFill>
+                <a:latin typeface="Calibri" pitchFamily="34" charset="0"/>
+                <a:ea typeface="Calibri" pitchFamily="34" charset="-122"/>
+                <a:cs typeface="Calibri" pitchFamily="34" charset="-120"/>
+              </a:rPr>
+              <a:t>teste et verifie</a:t>
+            </a:r>
+            <a:endParaRPr lang="en-US" sz="750" dirty="0"/>
+          </a:p>
+        </p:txBody>
+      </p:sp>
+      <p:sp>
+        <p:nvSpPr>
+          <p:cNvPr id="34" name="Text 32"/>
+          <p:cNvSpPr/>
+          <p:nvPr/>
+        </p:nvSpPr>
+        <p:spPr>
+          <a:xfrm>
+            <a:off x="914400" y="5943600"/>
+            <a:ext cx="10332720" cy="365760"/>
+          </a:xfrm>
+          <a:prstGeom prst="rect">
+            <a:avLst/>
+          </a:prstGeom>
+          <a:noFill/>
+          <a:ln/>
+        </p:spPr>
+        <p:txBody>
+          <a:bodyPr wrap="square" lIns="0" tIns="0" rIns="0" bIns="0" rtlCol="0" anchor="ctr"/>
+          <a:lstStyle/>
+          <a:p>
+            <a:pPr algn="ctr" indent="0" marL="0">
+              <a:buNone/>
+            </a:pPr>
+            <a:r>
+              <a:rPr lang="en-US" sz="950" i="1" dirty="0">
                 <a:solidFill>
                   <a:srgbClr val="5A6B7A"/>
                 </a:solidFill>
@@ -5645,9 +5984,48 @@
                 <a:ea typeface="Calibri" pitchFamily="34" charset="-122"/>
                 <a:cs typeface="Calibri" pitchFamily="34" charset="-120"/>
               </a:rPr>
+              <a:t>A chaque push/PR : checkout du code (avec sous-modules), installation des dependances, tests unitaires, verification de l'import du backend.</a:t>
+            </a:r>
+            <a:endParaRPr lang="en-US" sz="950" dirty="0"/>
+          </a:p>
+        </p:txBody>
+      </p:sp>
+      <p:sp>
+        <p:nvSpPr>
+          <p:cNvPr id="35" name="Text 33"/>
+          <p:cNvSpPr/>
+          <p:nvPr/>
+        </p:nvSpPr>
+        <p:spPr>
+          <a:xfrm>
+            <a:off x="548640" y="6355080"/>
+            <a:ext cx="10972800" cy="320040"/>
+          </a:xfrm>
+          <a:prstGeom prst="rect">
+            <a:avLst/>
+          </a:prstGeom>
+          <a:noFill/>
+          <a:ln/>
+        </p:spPr>
+        <p:txBody>
+          <a:bodyPr wrap="square" lIns="0" tIns="0" rIns="0" bIns="0" rtlCol="0" anchor="ctr"/>
+          <a:lstStyle/>
+          <a:p>
+            <a:pPr algn="ctr" indent="0" marL="0">
+              <a:buNone/>
+            </a:pPr>
+            <a:r>
+              <a:rPr lang="en-US" sz="950" i="1" dirty="0">
+                <a:solidFill>
+                  <a:srgbClr val="5A6B7A"/>
+                </a:solidFill>
+                <a:latin typeface="Calibri" pitchFamily="34" charset="0"/>
+                <a:ea typeface="Calibri" pitchFamily="34" charset="-122"/>
+                <a:cs typeface="Calibri" pitchFamily="34" charset="-120"/>
+              </a:rPr>
               <a:t>Environnement : GitHub Codespaces · MinIO via Docker Compose · Chroma persiste sur disque · Ollama tourne en local (CPU)</a:t>
             </a:r>
-            <a:endParaRPr lang="en-US" sz="1100" dirty="0"/>
+            <a:endParaRPr lang="en-US" sz="950" dirty="0"/>
           </a:p>
         </p:txBody>
       </p:sp>
@@ -7350,7 +7728,7 @@
         <p:spPr>
           <a:xfrm>
             <a:off x="548640" y="1188720"/>
-            <a:ext cx="3383280" cy="4206240"/>
+            <a:ext cx="3383280" cy="3657600"/>
           </a:xfrm>
           <a:prstGeom prst="roundRect">
             <a:avLst>
@@ -7383,8 +7761,8 @@
         </p:nvSpPr>
         <p:spPr>
           <a:xfrm>
-            <a:off x="548640" y="1463040"/>
-            <a:ext cx="3383280" cy="914400"/>
+            <a:off x="548640" y="1417320"/>
+            <a:ext cx="3383280" cy="822960"/>
           </a:xfrm>
           <a:prstGeom prst="rect">
             <a:avLst/>
@@ -7400,7 +7778,7 @@
               <a:buNone/>
             </a:pPr>
             <a:r>
-              <a:rPr lang="en-US" sz="6000" b="1" dirty="0">
+              <a:rPr lang="en-US" sz="5400" b="1" dirty="0">
                 <a:solidFill>
                   <a:srgbClr val="065A82"/>
                 </a:solidFill>
@@ -7410,7 +7788,7 @@
               </a:rPr>
               <a:t>800</a:t>
             </a:r>
-            <a:endParaRPr lang="en-US" sz="6000" dirty="0"/>
+            <a:endParaRPr lang="en-US" sz="5400" dirty="0"/>
           </a:p>
         </p:txBody>
       </p:sp>
@@ -7422,7 +7800,7 @@
         </p:nvSpPr>
         <p:spPr>
           <a:xfrm>
-            <a:off x="548640" y="2331720"/>
+            <a:off x="548640" y="2194560"/>
             <a:ext cx="3383280" cy="365760"/>
           </a:xfrm>
           <a:prstGeom prst="rect">
@@ -7461,8 +7839,8 @@
         </p:nvSpPr>
         <p:spPr>
           <a:xfrm>
-            <a:off x="868680" y="2926080"/>
-            <a:ext cx="2743200" cy="1371600"/>
+            <a:off x="868680" y="2697480"/>
+            <a:ext cx="2743200" cy="1097280"/>
           </a:xfrm>
           <a:prstGeom prst="rect">
             <a:avLst/>
@@ -7501,7 +7879,7 @@
         <p:spPr>
           <a:xfrm>
             <a:off x="4251960" y="1188720"/>
-            <a:ext cx="3383280" cy="4206240"/>
+            <a:ext cx="3383280" cy="3657600"/>
           </a:xfrm>
           <a:prstGeom prst="roundRect">
             <a:avLst>
@@ -7534,8 +7912,8 @@
         </p:nvSpPr>
         <p:spPr>
           <a:xfrm>
-            <a:off x="4251960" y="1463040"/>
-            <a:ext cx="3383280" cy="914400"/>
+            <a:off x="4251960" y="1417320"/>
+            <a:ext cx="3383280" cy="822960"/>
           </a:xfrm>
           <a:prstGeom prst="rect">
             <a:avLst/>
@@ -7551,7 +7929,7 @@
               <a:buNone/>
             </a:pPr>
             <a:r>
-              <a:rPr lang="en-US" sz="6000" b="1" dirty="0">
+              <a:rPr lang="en-US" sz="5400" b="1" dirty="0">
                 <a:solidFill>
                   <a:srgbClr val="1C7293"/>
                 </a:solidFill>
@@ -7561,7 +7939,7 @@
               </a:rPr>
               <a:t>120</a:t>
             </a:r>
-            <a:endParaRPr lang="en-US" sz="6000" dirty="0"/>
+            <a:endParaRPr lang="en-US" sz="5400" dirty="0"/>
           </a:p>
         </p:txBody>
       </p:sp>
@@ -7573,7 +7951,7 @@
         </p:nvSpPr>
         <p:spPr>
           <a:xfrm>
-            <a:off x="4251960" y="2331720"/>
+            <a:off x="4251960" y="2194560"/>
             <a:ext cx="3383280" cy="365760"/>
           </a:xfrm>
           <a:prstGeom prst="rect">
@@ -7612,8 +7990,8 @@
         </p:nvSpPr>
         <p:spPr>
           <a:xfrm>
-            <a:off x="4572000" y="2926080"/>
-            <a:ext cx="2743200" cy="1371600"/>
+            <a:off x="4572000" y="2697480"/>
+            <a:ext cx="2743200" cy="1097280"/>
           </a:xfrm>
           <a:prstGeom prst="rect">
             <a:avLst/>
@@ -7652,7 +8030,7 @@
         <p:spPr>
           <a:xfrm>
             <a:off x="7955280" y="1188720"/>
-            <a:ext cx="3383280" cy="4206240"/>
+            <a:ext cx="3383280" cy="3657600"/>
           </a:xfrm>
           <a:prstGeom prst="roundRect">
             <a:avLst>
@@ -7685,8 +8063,8 @@
         </p:nvSpPr>
         <p:spPr>
           <a:xfrm>
-            <a:off x="7955280" y="1463040"/>
-            <a:ext cx="3383280" cy="914400"/>
+            <a:off x="7955280" y="1417320"/>
+            <a:ext cx="3383280" cy="822960"/>
           </a:xfrm>
           <a:prstGeom prst="rect">
             <a:avLst/>
@@ -7702,7 +8080,7 @@
               <a:buNone/>
             </a:pPr>
             <a:r>
-              <a:rPr lang="en-US" sz="6000" b="1" dirty="0">
+              <a:rPr lang="en-US" sz="5400" b="1" dirty="0">
                 <a:solidFill>
                   <a:srgbClr val="B85042"/>
                 </a:solidFill>
@@ -7712,7 +8090,7 @@
               </a:rPr>
               <a:t>4</a:t>
             </a:r>
-            <a:endParaRPr lang="en-US" sz="6000" dirty="0"/>
+            <a:endParaRPr lang="en-US" sz="5400" dirty="0"/>
           </a:p>
         </p:txBody>
       </p:sp>
@@ -7724,7 +8102,7 @@
         </p:nvSpPr>
         <p:spPr>
           <a:xfrm>
-            <a:off x="7955280" y="2331720"/>
+            <a:off x="7955280" y="2194560"/>
             <a:ext cx="3383280" cy="365760"/>
           </a:xfrm>
           <a:prstGeom prst="rect">
@@ -7763,8 +8141,8 @@
         </p:nvSpPr>
         <p:spPr>
           <a:xfrm>
-            <a:off x="8275320" y="2926080"/>
-            <a:ext cx="2743200" cy="1371600"/>
+            <a:off x="8275320" y="2697480"/>
+            <a:ext cx="2743200" cy="1097280"/>
           </a:xfrm>
           <a:prstGeom prst="rect">
             <a:avLst/>
@@ -7796,13 +8174,164 @@
       </p:sp>
       <p:sp>
         <p:nvSpPr>
-          <p:cNvPr id="15" name="Text 13"/>
-          <p:cNvSpPr/>
-          <p:nvPr/>
-        </p:nvSpPr>
-        <p:spPr>
-          <a:xfrm>
-            <a:off x="548640" y="5623560"/>
+          <p:cNvPr id="15" name="Shape 13"/>
+          <p:cNvSpPr/>
+          <p:nvPr/>
+        </p:nvSpPr>
+        <p:spPr>
+          <a:xfrm>
+            <a:off x="548640" y="5029200"/>
+            <a:ext cx="10789920" cy="777240"/>
+          </a:xfrm>
+          <a:prstGeom prst="roundRect">
+            <a:avLst>
+              <a:gd name="adj" fmla="val 9412"/>
+            </a:avLst>
+          </a:prstGeom>
+          <a:solidFill>
+            <a:srgbClr val="F0F9FB"/>
+          </a:solidFill>
+          <a:ln w="12700">
+            <a:solidFill>
+              <a:srgbClr val="E2E8F0"/>
+            </a:solidFill>
+            <a:prstDash val="solid"/>
+          </a:ln>
+          <a:effectLst>
+            <a:outerShdw sx="100000" sy="100000" kx="0" ky="0" algn="bl" rotWithShape="0" blurRad="101600" dist="38100" dir="5400000">
+              <a:srgbClr val="000000">
+                <a:alpha val="12000"/>
+              </a:srgbClr>
+            </a:outerShdw>
+          </a:effectLst>
+        </p:spPr>
+      </p:sp>
+      <p:sp>
+        <p:nvSpPr>
+          <p:cNvPr id="16" name="Text 14"/>
+          <p:cNvSpPr/>
+          <p:nvPr/>
+        </p:nvSpPr>
+        <p:spPr>
+          <a:xfrm>
+            <a:off x="777240" y="5029200"/>
+            <a:ext cx="1920240" cy="777240"/>
+          </a:xfrm>
+          <a:prstGeom prst="rect">
+            <a:avLst/>
+          </a:prstGeom>
+          <a:noFill/>
+          <a:ln/>
+        </p:spPr>
+        <p:txBody>
+          <a:bodyPr wrap="square" lIns="0" tIns="0" rIns="0" bIns="0" rtlCol="0" anchor="ctr"/>
+          <a:lstStyle/>
+          <a:p>
+            <a:pPr indent="0" marL="0">
+              <a:buNone/>
+            </a:pPr>
+            <a:r>
+              <a:rPr lang="en-US" sz="1300" b="1" dirty="0">
+                <a:solidFill>
+                  <a:srgbClr val="065A82"/>
+                </a:solidFill>
+                <a:latin typeface="Calibri" pitchFamily="34" charset="0"/>
+                <a:ea typeface="Calibri" pitchFamily="34" charset="-122"/>
+                <a:cs typeface="Calibri" pitchFamily="34" charset="-120"/>
+              </a:rPr>
+              <a:t>Recursive splitting</a:t>
+            </a:r>
+            <a:endParaRPr lang="en-US" sz="1300" dirty="0"/>
+          </a:p>
+        </p:txBody>
+      </p:sp>
+      <p:sp>
+        <p:nvSpPr>
+          <p:cNvPr id="17" name="Text 15"/>
+          <p:cNvSpPr/>
+          <p:nvPr/>
+        </p:nvSpPr>
+        <p:spPr>
+          <a:xfrm>
+            <a:off x="2788920" y="5029200"/>
+            <a:ext cx="5486400" cy="777240"/>
+          </a:xfrm>
+          <a:prstGeom prst="rect">
+            <a:avLst/>
+          </a:prstGeom>
+          <a:noFill/>
+          <a:ln/>
+        </p:spPr>
+        <p:txBody>
+          <a:bodyPr wrap="square" lIns="0" tIns="0" rIns="0" bIns="0" rtlCol="0" anchor="ctr"/>
+          <a:lstStyle/>
+          <a:p>
+            <a:pPr indent="0" marL="0">
+              <a:buNone/>
+            </a:pPr>
+            <a:r>
+              <a:rPr lang="en-US" sz="1150" dirty="0">
+                <a:solidFill>
+                  <a:srgbClr val="334155"/>
+                </a:solidFill>
+                <a:latin typeface="Calibri" pitchFamily="34" charset="0"/>
+                <a:ea typeface="Calibri" pitchFamily="34" charset="-122"/>
+                <a:cs typeface="Calibri" pitchFamily="34" charset="-120"/>
+              </a:rPr>
+              <a:t>Couper en respectant paragraphes → phrases → mots (RecursiveCharacterTextSplitter)</a:t>
+            </a:r>
+            <a:endParaRPr lang="en-US" sz="1150" dirty="0"/>
+          </a:p>
+        </p:txBody>
+      </p:sp>
+      <p:sp>
+        <p:nvSpPr>
+          <p:cNvPr id="18" name="Text 16"/>
+          <p:cNvSpPr/>
+          <p:nvPr/>
+        </p:nvSpPr>
+        <p:spPr>
+          <a:xfrm>
+            <a:off x="8366760" y="5029200"/>
+            <a:ext cx="2834640" cy="777240"/>
+          </a:xfrm>
+          <a:prstGeom prst="rect">
+            <a:avLst/>
+          </a:prstGeom>
+          <a:noFill/>
+          <a:ln/>
+        </p:spPr>
+        <p:txBody>
+          <a:bodyPr wrap="square" lIns="0" tIns="0" rIns="0" bIns="0" rtlCol="0" anchor="ctr"/>
+          <a:lstStyle/>
+          <a:p>
+            <a:pPr indent="0" marL="0">
+              <a:buNone/>
+            </a:pPr>
+            <a:r>
+              <a:rPr lang="en-US" sz="1100" i="1" dirty="0">
+                <a:solidFill>
+                  <a:srgbClr val="2C5F2D"/>
+                </a:solidFill>
+                <a:latin typeface="Calibri" pitchFamily="34" charset="0"/>
+                <a:ea typeface="Calibri" pitchFamily="34" charset="-122"/>
+                <a:cs typeface="Calibri" pitchFamily="34" charset="-120"/>
+              </a:rPr>
+              <a:t>Évite de couper au milieu d'une phrase</a:t>
+            </a:r>
+            <a:endParaRPr lang="en-US" sz="1100" dirty="0"/>
+          </a:p>
+        </p:txBody>
+      </p:sp>
+      <p:sp>
+        <p:nvSpPr>
+          <p:cNvPr id="19" name="Text 17"/>
+          <p:cNvSpPr/>
+          <p:nvPr/>
+        </p:nvSpPr>
+        <p:spPr>
+          <a:xfrm>
+            <a:off x="548640" y="5943600"/>
             <a:ext cx="10972800" cy="365760"/>
           </a:xfrm>
           <a:prstGeom prst="rect">
@@ -7819,7 +8348,7 @@
               <a:buNone/>
             </a:pPr>
             <a:r>
-              <a:rPr lang="en-US" sz="1200" i="1" dirty="0">
+              <a:rPr lang="en-US" sz="1150" i="1" dirty="0">
                 <a:solidFill>
                   <a:srgbClr val="5A6B7A"/>
                 </a:solidFill>
@@ -7829,7 +8358,7 @@
               </a:rPr>
               <a:t>Modèle d'embeddings : sentence-transformers/paraphrase-multilingual-MiniLM-L12-v2 — léger (~470 Mo), multilingue, tourne sur CPU.</a:t>
             </a:r>
-            <a:endParaRPr lang="en-US" sz="1200" dirty="0"/>
+            <a:endParaRPr lang="en-US" sz="1150" dirty="0"/>
           </a:p>
         </p:txBody>
       </p:sp>
@@ -10009,6 +10538,23 @@
             </a:r>
             <a:endParaRPr lang="en-US" sz="1100" dirty="0"/>
           </a:p>
+          <a:p>
+            <a:pPr algn="ctr" indent="0" marL="0">
+              <a:buNone/>
+            </a:pPr>
+            <a:r>
+              <a:rPr lang="en-US" sz="1100" b="1" dirty="0">
+                <a:solidFill>
+                  <a:srgbClr val="FFFFFF"/>
+                </a:solidFill>
+                <a:latin typeface="Calibri" pitchFamily="34" charset="0"/>
+                <a:ea typeface="Calibri" pitchFamily="34" charset="-122"/>
+                <a:cs typeface="Calibri" pitchFamily="34" charset="-120"/>
+              </a:rPr>
+              <a:t>(avec sous-modules)</a:t>
+            </a:r>
+            <a:endParaRPr lang="en-US" sz="1100" dirty="0"/>
+          </a:p>
         </p:txBody>
       </p:sp>
       <p:sp>
@@ -10103,7 +10649,7 @@
                 <a:ea typeface="Calibri" pitchFamily="34" charset="-122"/>
                 <a:cs typeface="Calibri" pitchFamily="34" charset="-120"/>
               </a:rPr>
-              <a:t>(requirements-ci.txt)</a:t>
+              <a:t>(backend/requirements.txt)</a:t>
             </a:r>
             <a:endParaRPr lang="en-US" sz="1100" dirty="0"/>
           </a:p>
@@ -10184,7 +10730,7 @@
                 <a:ea typeface="Calibri" pitchFamily="34" charset="-122"/>
                 <a:cs typeface="Calibri" pitchFamily="34" charset="-120"/>
               </a:rPr>
-              <a:t>pytest tests/</a:t>
+              <a:t>pytest -v</a:t>
             </a:r>
             <a:endParaRPr lang="en-US" sz="1100" dirty="0"/>
           </a:p>
@@ -10282,7 +10828,7 @@
                 <a:ea typeface="Calibri" pitchFamily="34" charset="-122"/>
                 <a:cs typeface="Calibri" pitchFamily="34" charset="-120"/>
               </a:rPr>
-              <a:t>backend.main</a:t>
+              <a:t>du backend</a:t>
             </a:r>
             <a:endParaRPr lang="en-US" sz="1100" dirty="0"/>
           </a:p>
@@ -10355,7 +10901,7 @@
                 <a:ea typeface="Calibri" pitchFamily="34" charset="-122"/>
                 <a:cs typeface="Calibri" pitchFamily="34" charset="-120"/>
               </a:rPr>
-              <a:t>3 fichiers de tests indépendants</a:t>
+              <a:t>Tests du backend</a:t>
             </a:r>
             <a:endParaRPr lang="en-US" sz="1400" dirty="0"/>
           </a:p>
@@ -10369,63 +10915,27 @@
         </p:nvSpPr>
         <p:spPr>
           <a:xfrm>
-            <a:off x="822960" y="3520440"/>
-            <a:ext cx="1920240" cy="384048"/>
-          </a:xfrm>
-          <a:prstGeom prst="rect">
-            <a:avLst/>
-          </a:prstGeom>
-          <a:noFill/>
-          <a:ln/>
-        </p:spPr>
-        <p:txBody>
-          <a:bodyPr wrap="square" lIns="0" tIns="0" rIns="0" bIns="0" rtlCol="0" anchor="ctr"/>
+            <a:off x="822960" y="3474720"/>
+            <a:ext cx="4754880" cy="2286000"/>
+          </a:xfrm>
+          <a:prstGeom prst="rect">
+            <a:avLst/>
+          </a:prstGeom>
+          <a:noFill/>
+          <a:ln/>
+        </p:spPr>
+        <p:txBody>
+          <a:bodyPr wrap="square" lIns="0" tIns="0" rIns="0" bIns="0" rtlCol="0" anchor="t"/>
           <a:lstStyle/>
           <a:p>
             <a:pPr indent="0" marL="0">
-              <a:buNone/>
-            </a:pPr>
-            <a:r>
-              <a:rPr lang="en-US" sz="1200" b="1" dirty="0">
-                <a:solidFill>
-                  <a:srgbClr val="065A82"/>
-                </a:solidFill>
-                <a:latin typeface="Courier New" pitchFamily="34" charset="0"/>
-                <a:ea typeface="Courier New" pitchFamily="34" charset="-122"/>
-                <a:cs typeface="Courier New" pitchFamily="34" charset="-120"/>
-              </a:rPr>
-              <a:t>test_chunking.py</a:t>
-            </a:r>
-            <a:endParaRPr lang="en-US" sz="1200" dirty="0"/>
-          </a:p>
-        </p:txBody>
-      </p:sp>
-      <p:sp>
-        <p:nvSpPr>
-          <p:cNvPr id="21" name="Text 19"/>
-          <p:cNvSpPr/>
-          <p:nvPr/>
-        </p:nvSpPr>
-        <p:spPr>
-          <a:xfrm>
-            <a:off x="2788920" y="3520440"/>
-            <a:ext cx="2926080" cy="384048"/>
-          </a:xfrm>
-          <a:prstGeom prst="rect">
-            <a:avLst/>
-          </a:prstGeom>
-          <a:noFill/>
-          <a:ln/>
-        </p:spPr>
-        <p:txBody>
-          <a:bodyPr wrap="square" lIns="0" tIns="0" rIns="0" bIns="0" rtlCol="0" anchor="ctr"/>
-          <a:lstStyle/>
-          <a:p>
-            <a:pPr indent="0" marL="0">
-              <a:buNone/>
-            </a:pPr>
-            <a:r>
-              <a:rPr lang="en-US" sz="1150" dirty="0">
+              <a:lnSpc>
+                <a:spcPct val="125000"/>
+              </a:lnSpc>
+              <a:buNone/>
+            </a:pPr>
+            <a:r>
+              <a:rPr lang="en-US" sz="1250" dirty="0">
                 <a:solidFill>
                   <a:srgbClr val="334155"/>
                 </a:solidFill>
@@ -10433,171 +10943,15 @@
                 <a:ea typeface="Calibri" pitchFamily="34" charset="-122"/>
                 <a:cs typeface="Calibri" pitchFamily="34" charset="-120"/>
               </a:rPr>
-              <a:t>découpage correct d'un texte en passages</a:t>
-            </a:r>
-            <a:endParaRPr lang="en-US" sz="1150" dirty="0"/>
-          </a:p>
-        </p:txBody>
-      </p:sp>
-      <p:sp>
-        <p:nvSpPr>
-          <p:cNvPr id="22" name="Text 20"/>
-          <p:cNvSpPr/>
-          <p:nvPr/>
-        </p:nvSpPr>
-        <p:spPr>
-          <a:xfrm>
-            <a:off x="822960" y="4069080"/>
-            <a:ext cx="1920240" cy="384048"/>
-          </a:xfrm>
-          <a:prstGeom prst="rect">
-            <a:avLst/>
-          </a:prstGeom>
-          <a:noFill/>
-          <a:ln/>
-        </p:spPr>
-        <p:txBody>
-          <a:bodyPr wrap="square" lIns="0" tIns="0" rIns="0" bIns="0" rtlCol="0" anchor="ctr"/>
-          <a:lstStyle/>
-          <a:p>
-            <a:pPr indent="0" marL="0">
-              <a:buNone/>
-            </a:pPr>
-            <a:r>
-              <a:rPr lang="en-US" sz="1200" b="1" dirty="0">
-                <a:solidFill>
-                  <a:srgbClr val="065A82"/>
-                </a:solidFill>
-                <a:latin typeface="Courier New" pitchFamily="34" charset="0"/>
-                <a:ea typeface="Courier New" pitchFamily="34" charset="-122"/>
-                <a:cs typeface="Courier New" pitchFamily="34" charset="-120"/>
-              </a:rPr>
-              <a:t>test_prompt.py</a:t>
-            </a:r>
-            <a:endParaRPr lang="en-US" sz="1200" dirty="0"/>
-          </a:p>
-        </p:txBody>
-      </p:sp>
-      <p:sp>
-        <p:nvSpPr>
-          <p:cNvPr id="23" name="Text 21"/>
-          <p:cNvSpPr/>
-          <p:nvPr/>
-        </p:nvSpPr>
-        <p:spPr>
-          <a:xfrm>
-            <a:off x="2788920" y="4069080"/>
-            <a:ext cx="2926080" cy="384048"/>
-          </a:xfrm>
-          <a:prstGeom prst="rect">
-            <a:avLst/>
-          </a:prstGeom>
-          <a:noFill/>
-          <a:ln/>
-        </p:spPr>
-        <p:txBody>
-          <a:bodyPr wrap="square" lIns="0" tIns="0" rIns="0" bIns="0" rtlCol="0" anchor="ctr"/>
-          <a:lstStyle/>
-          <a:p>
-            <a:pPr indent="0" marL="0">
-              <a:buNone/>
-            </a:pPr>
-            <a:r>
-              <a:rPr lang="en-US" sz="1150" dirty="0">
-                <a:solidFill>
-                  <a:srgbClr val="334155"/>
-                </a:solidFill>
-                <a:latin typeface="Calibri" pitchFamily="34" charset="0"/>
-                <a:ea typeface="Calibri" pitchFamily="34" charset="-122"/>
-                <a:cs typeface="Calibri" pitchFamily="34" charset="-120"/>
-              </a:rPr>
-              <a:t>construction du prompt (contexte + consigne)</a:t>
-            </a:r>
-            <a:endParaRPr lang="en-US" sz="1150" dirty="0"/>
-          </a:p>
-        </p:txBody>
-      </p:sp>
-      <p:sp>
-        <p:nvSpPr>
-          <p:cNvPr id="24" name="Text 22"/>
-          <p:cNvSpPr/>
-          <p:nvPr/>
-        </p:nvSpPr>
-        <p:spPr>
-          <a:xfrm>
-            <a:off x="822960" y="4617720"/>
-            <a:ext cx="1920240" cy="384048"/>
-          </a:xfrm>
-          <a:prstGeom prst="rect">
-            <a:avLst/>
-          </a:prstGeom>
-          <a:noFill/>
-          <a:ln/>
-        </p:spPr>
-        <p:txBody>
-          <a:bodyPr wrap="square" lIns="0" tIns="0" rIns="0" bIns="0" rtlCol="0" anchor="ctr"/>
-          <a:lstStyle/>
-          <a:p>
-            <a:pPr indent="0" marL="0">
-              <a:buNone/>
-            </a:pPr>
-            <a:r>
-              <a:rPr lang="en-US" sz="1200" b="1" dirty="0">
-                <a:solidFill>
-                  <a:srgbClr val="065A82"/>
-                </a:solidFill>
-                <a:latin typeface="Courier New" pitchFamily="34" charset="0"/>
-                <a:ea typeface="Courier New" pitchFamily="34" charset="-122"/>
-                <a:cs typeface="Courier New" pitchFamily="34" charset="-120"/>
-              </a:rPr>
-              <a:t>test_health.py</a:t>
-            </a:r>
-            <a:endParaRPr lang="en-US" sz="1200" dirty="0"/>
-          </a:p>
-        </p:txBody>
-      </p:sp>
-      <p:sp>
-        <p:nvSpPr>
-          <p:cNvPr id="25" name="Text 23"/>
-          <p:cNvSpPr/>
-          <p:nvPr/>
-        </p:nvSpPr>
-        <p:spPr>
-          <a:xfrm>
-            <a:off x="2788920" y="4617720"/>
-            <a:ext cx="2926080" cy="384048"/>
-          </a:xfrm>
-          <a:prstGeom prst="rect">
-            <a:avLst/>
-          </a:prstGeom>
-          <a:noFill/>
-          <a:ln/>
-        </p:spPr>
-        <p:txBody>
-          <a:bodyPr wrap="square" lIns="0" tIns="0" rIns="0" bIns="0" rtlCol="0" anchor="ctr"/>
-          <a:lstStyle/>
-          <a:p>
-            <a:pPr indent="0" marL="0">
-              <a:buNone/>
-            </a:pPr>
-            <a:r>
-              <a:rPr lang="en-US" sz="1150" dirty="0">
-                <a:solidFill>
-                  <a:srgbClr val="334155"/>
-                </a:solidFill>
-                <a:latin typeface="Calibri" pitchFamily="34" charset="0"/>
-                <a:ea typeface="Calibri" pitchFamily="34" charset="-122"/>
-                <a:cs typeface="Calibri" pitchFamily="34" charset="-120"/>
-              </a:rPr>
-              <a:t>disponibilité de /health, validation /ask</a:t>
-            </a:r>
-            <a:endParaRPr lang="en-US" sz="1150" dirty="0"/>
-          </a:p>
-        </p:txBody>
-      </p:sp>
-      <p:sp>
-        <p:nvSpPr>
-          <p:cNvPr id="26" name="Shape 24"/>
+              <a:t>Les tests unitaires vivent directement dans le sous-module backend (pytest.ini, tests/), maintenus par le développeur backend et exécutés via working-directory: backend dans la CI.</a:t>
+            </a:r>
+            <a:endParaRPr lang="en-US" sz="1250" dirty="0"/>
+          </a:p>
+        </p:txBody>
+      </p:sp>
+      <p:sp>
+        <p:nvSpPr>
+          <p:cNvPr id="21" name="Shape 19"/>
           <p:cNvSpPr/>
           <p:nvPr/>
         </p:nvSpPr>
@@ -10631,7 +10985,7 @@
       </p:sp>
       <p:sp>
         <p:nvSpPr>
-          <p:cNvPr id="27" name="Text 25"/>
+          <p:cNvPr id="22" name="Text 20"/>
           <p:cNvSpPr/>
           <p:nvPr/>
         </p:nvSpPr>
@@ -10662,7 +11016,7 @@
                 <a:ea typeface="Calibri" pitchFamily="34" charset="-122"/>
                 <a:cs typeface="Calibri" pitchFamily="34" charset="-120"/>
               </a:rPr>
-              <a:t>Pourquoi une CI rapide ?</a:t>
+              <a:t>Sous-modules git</a:t>
             </a:r>
             <a:endParaRPr lang="en-US" sz="1400" dirty="0"/>
           </a:p>
@@ -10670,7 +11024,7 @@
       </p:sp>
       <p:sp>
         <p:nvSpPr>
-          <p:cNvPr id="28" name="Text 26"/>
+          <p:cNvPr id="23" name="Text 21"/>
           <p:cNvSpPr/>
           <p:nvPr/>
         </p:nvSpPr>
@@ -10704,65 +11058,7 @@
                 <a:ea typeface="Calibri" pitchFamily="34" charset="-122"/>
                 <a:cs typeface="Calibri" pitchFamily="34" charset="-120"/>
               </a:rPr>
-              <a:t>requirements-ci.txt n'installe ni PyTorch, ni ChromaDB, ni Ollama.</a:t>
-            </a:r>
-            <a:endParaRPr lang="en-US" sz="1250" dirty="0"/>
-          </a:p>
-          <a:p>
-            <a:pPr indent="0" marL="0">
-              <a:lnSpc>
-                <a:spcPct val="125000"/>
-              </a:lnSpc>
-              <a:buNone/>
-            </a:pPr>
-            <a:endParaRPr lang="en-US" sz="1250" dirty="0"/>
-          </a:p>
-          <a:p>
-            <a:pPr indent="0" marL="0">
-              <a:lnSpc>
-                <a:spcPct val="125000"/>
-              </a:lnSpc>
-              <a:buNone/>
-            </a:pPr>
-            <a:r>
-              <a:rPr lang="en-US" sz="1250" dirty="0">
-                <a:solidFill>
-                  <a:srgbClr val="334155"/>
-                </a:solidFill>
-                <a:latin typeface="Calibri" pitchFamily="34" charset="0"/>
-                <a:ea typeface="Calibri" pitchFamily="34" charset="-122"/>
-                <a:cs typeface="Calibri" pitchFamily="34" charset="-120"/>
-              </a:rPr>
-              <a:t>Grâce aux imports paresseux dans backend/rag/*.py, les tests n'ont jamais besoin de charger un modèle ML.</a:t>
-            </a:r>
-            <a:endParaRPr lang="en-US" sz="1250" dirty="0"/>
-          </a:p>
-          <a:p>
-            <a:pPr indent="0" marL="0">
-              <a:lnSpc>
-                <a:spcPct val="125000"/>
-              </a:lnSpc>
-              <a:buNone/>
-            </a:pPr>
-            <a:endParaRPr lang="en-US" sz="1250" dirty="0"/>
-          </a:p>
-          <a:p>
-            <a:pPr indent="0" marL="0">
-              <a:lnSpc>
-                <a:spcPct val="125000"/>
-              </a:lnSpc>
-              <a:buNone/>
-            </a:pPr>
-            <a:r>
-              <a:rPr lang="en-US" sz="1250" dirty="0">
-                <a:solidFill>
-                  <a:srgbClr val="334155"/>
-                </a:solidFill>
-                <a:latin typeface="Calibri" pitchFamily="34" charset="0"/>
-                <a:ea typeface="Calibri" pitchFamily="34" charset="-122"/>
-                <a:cs typeface="Calibri" pitchFamily="34" charset="-120"/>
-              </a:rPr>
-              <a:t>Résultat : quelques secondes en CI, au lieu de plusieurs minutes de téléchargement.</a:t>
+              <a:t>backend/ et frontend/ sont des sous-modules git (dépôts séparés). La CI utilise submodules: recursive au checkout pour en récupérer le vrai contenu, sinon ces dossiers apparaissent vides.</a:t>
             </a:r>
             <a:endParaRPr lang="en-US" sz="1250" dirty="0"/>
           </a:p>

--- a/docs/presentation_rag.pptx
+++ b/docs/presentation_rag.pptx
@@ -4,6 +4,9 @@
   <p:sldMasterIdLst>
     <p:sldMasterId id="2147483648" r:id="rId1"/>
   </p:sldMasterIdLst>
+  <p:notesMasterIdLst>
+    <p:notesMasterId r:id="rId13"/>
+  </p:notesMasterIdLst>
   <p:sldIdLst>
     <p:sldId id="256" r:id="rId2"/>
     <p:sldId id="257" r:id="rId3"/>
@@ -17,9 +20,6 @@
     <p:sldId id="265" r:id="rId11"/>
     <p:sldId id="266" r:id="rId12"/>
   </p:sldIdLst>
-  <p:notesMasterIdLst>
-    <p:notesMasterId r:id="rId13"/>
-  </p:notesMasterIdLst>
   <p:sldSz cx="12192000" cy="6858000"/>
   <p:notesSz cx="6858000" cy="12192000"/>
   <p:defaultTextStyle>
@@ -114,7 +114,296 @@
       </a:defRPr>
     </a:lvl9pPr>
   </p:defaultTextStyle>
+  <p:extLst>
+    <p:ext uri="{EFAFB233-063F-42B5-8137-9DF3F51BA10A}">
+      <p15:sldGuideLst xmlns:p15="http://schemas.microsoft.com/office/powerpoint/2012/main"/>
+    </p:ext>
+  </p:extLst>
 </p:presentation>
+</file>
+
+<file path=ppt/revisionInfo.xml><?xml version="1.0" encoding="utf-8"?>
+<p1510:revInfo xmlns:a="http://schemas.openxmlformats.org/drawingml/2006/main" xmlns:r="http://schemas.openxmlformats.org/officeDocument/2006/relationships" xmlns:p1510="http://schemas.microsoft.com/office/powerpoint/2015/10/main">
+  <p1510:revLst>
+    <p1510:client id="{587C43F4-0E0E-4EF7-9E4D-7B555534C047}" v="5" dt="2026-07-03T13:24:10.967"/>
+  </p1510:revLst>
+</p1510:revInfo>
+</file>
+
+<file path=ppt/changesInfos/changesInfo1.xml><?xml version="1.0" encoding="utf-8"?>
+<pc:chgInfo xmlns:a="http://schemas.openxmlformats.org/drawingml/2006/main" xmlns:r="http://schemas.openxmlformats.org/officeDocument/2006/relationships" xmlns:ac="http://schemas.microsoft.com/office/drawing/2013/main/command" xmlns:pc="http://schemas.microsoft.com/office/powerpoint/2013/main/command">
+  <pc:docChgLst>
+    <pc:chgData name="Nicolas MOUTON--BESSON" userId="8b5e56fff13e65f2" providerId="LiveId" clId="{81B8AACB-B7AC-480A-B9C2-B13A154DB984}"/>
+    <pc:docChg chg="undo custSel modSld">
+      <pc:chgData name="Nicolas MOUTON--BESSON" userId="8b5e56fff13e65f2" providerId="LiveId" clId="{81B8AACB-B7AC-480A-B9C2-B13A154DB984}" dt="2026-07-03T14:10:39.195" v="157" actId="20577"/>
+      <pc:docMkLst>
+        <pc:docMk/>
+      </pc:docMkLst>
+      <pc:sldChg chg="modSp mod">
+        <pc:chgData name="Nicolas MOUTON--BESSON" userId="8b5e56fff13e65f2" providerId="LiveId" clId="{81B8AACB-B7AC-480A-B9C2-B13A154DB984}" dt="2026-07-03T13:19:43.911" v="29" actId="20577"/>
+        <pc:sldMkLst>
+          <pc:docMk/>
+          <pc:sldMk cId="0" sldId="260"/>
+        </pc:sldMkLst>
+        <pc:graphicFrameChg chg="modGraphic">
+          <ac:chgData name="Nicolas MOUTON--BESSON" userId="8b5e56fff13e65f2" providerId="LiveId" clId="{81B8AACB-B7AC-480A-B9C2-B13A154DB984}" dt="2026-07-03T13:19:43.911" v="29" actId="20577"/>
+          <ac:graphicFrameMkLst>
+            <pc:docMk/>
+            <pc:sldMk cId="0" sldId="260"/>
+            <ac:graphicFrameMk id="6" creationId="{00000000-0000-0000-0000-000000000000}"/>
+          </ac:graphicFrameMkLst>
+        </pc:graphicFrameChg>
+      </pc:sldChg>
+      <pc:sldChg chg="addSp delSp modSp mod">
+        <pc:chgData name="Nicolas MOUTON--BESSON" userId="8b5e56fff13e65f2" providerId="LiveId" clId="{81B8AACB-B7AC-480A-B9C2-B13A154DB984}" dt="2026-07-03T14:10:39.195" v="157" actId="20577"/>
+        <pc:sldMkLst>
+          <pc:docMk/>
+          <pc:sldMk cId="0" sldId="265"/>
+        </pc:sldMkLst>
+        <pc:spChg chg="mod">
+          <ac:chgData name="Nicolas MOUTON--BESSON" userId="8b5e56fff13e65f2" providerId="LiveId" clId="{81B8AACB-B7AC-480A-B9C2-B13A154DB984}" dt="2026-07-03T13:20:49.411" v="44" actId="12789"/>
+          <ac:spMkLst>
+            <pc:docMk/>
+            <pc:sldMk cId="0" sldId="265"/>
+            <ac:spMk id="5" creationId="{00000000-0000-0000-0000-000000000000}"/>
+          </ac:spMkLst>
+        </pc:spChg>
+        <pc:spChg chg="mod">
+          <ac:chgData name="Nicolas MOUTON--BESSON" userId="8b5e56fff13e65f2" providerId="LiveId" clId="{81B8AACB-B7AC-480A-B9C2-B13A154DB984}" dt="2026-07-03T13:20:49.411" v="44" actId="12789"/>
+          <ac:spMkLst>
+            <pc:docMk/>
+            <pc:sldMk cId="0" sldId="265"/>
+            <ac:spMk id="6" creationId="{00000000-0000-0000-0000-000000000000}"/>
+          </ac:spMkLst>
+        </pc:spChg>
+        <pc:spChg chg="mod">
+          <ac:chgData name="Nicolas MOUTON--BESSON" userId="8b5e56fff13e65f2" providerId="LiveId" clId="{81B8AACB-B7AC-480A-B9C2-B13A154DB984}" dt="2026-07-03T13:20:54.762" v="45" actId="12789"/>
+          <ac:spMkLst>
+            <pc:docMk/>
+            <pc:sldMk cId="0" sldId="265"/>
+            <ac:spMk id="7" creationId="{00000000-0000-0000-0000-000000000000}"/>
+          </ac:spMkLst>
+        </pc:spChg>
+        <pc:spChg chg="mod">
+          <ac:chgData name="Nicolas MOUTON--BESSON" userId="8b5e56fff13e65f2" providerId="LiveId" clId="{81B8AACB-B7AC-480A-B9C2-B13A154DB984}" dt="2026-07-03T13:20:54.762" v="45" actId="12789"/>
+          <ac:spMkLst>
+            <pc:docMk/>
+            <pc:sldMk cId="0" sldId="265"/>
+            <ac:spMk id="8" creationId="{00000000-0000-0000-0000-000000000000}"/>
+          </ac:spMkLst>
+        </pc:spChg>
+        <pc:spChg chg="mod">
+          <ac:chgData name="Nicolas MOUTON--BESSON" userId="8b5e56fff13e65f2" providerId="LiveId" clId="{81B8AACB-B7AC-480A-B9C2-B13A154DB984}" dt="2026-07-03T13:20:59.288" v="46" actId="12789"/>
+          <ac:spMkLst>
+            <pc:docMk/>
+            <pc:sldMk cId="0" sldId="265"/>
+            <ac:spMk id="9" creationId="{00000000-0000-0000-0000-000000000000}"/>
+          </ac:spMkLst>
+        </pc:spChg>
+        <pc:spChg chg="mod">
+          <ac:chgData name="Nicolas MOUTON--BESSON" userId="8b5e56fff13e65f2" providerId="LiveId" clId="{81B8AACB-B7AC-480A-B9C2-B13A154DB984}" dt="2026-07-03T14:10:39.195" v="157" actId="20577"/>
+          <ac:spMkLst>
+            <pc:docMk/>
+            <pc:sldMk cId="0" sldId="265"/>
+            <ac:spMk id="10" creationId="{00000000-0000-0000-0000-000000000000}"/>
+          </ac:spMkLst>
+        </pc:spChg>
+        <pc:spChg chg="mod">
+          <ac:chgData name="Nicolas MOUTON--BESSON" userId="8b5e56fff13e65f2" providerId="LiveId" clId="{81B8AACB-B7AC-480A-B9C2-B13A154DB984}" dt="2026-07-03T13:21:02.744" v="47" actId="12789"/>
+          <ac:spMkLst>
+            <pc:docMk/>
+            <pc:sldMk cId="0" sldId="265"/>
+            <ac:spMk id="11" creationId="{00000000-0000-0000-0000-000000000000}"/>
+          </ac:spMkLst>
+        </pc:spChg>
+        <pc:spChg chg="mod">
+          <ac:chgData name="Nicolas MOUTON--BESSON" userId="8b5e56fff13e65f2" providerId="LiveId" clId="{81B8AACB-B7AC-480A-B9C2-B13A154DB984}" dt="2026-07-03T13:21:02.744" v="47" actId="12789"/>
+          <ac:spMkLst>
+            <pc:docMk/>
+            <pc:sldMk cId="0" sldId="265"/>
+            <ac:spMk id="12" creationId="{00000000-0000-0000-0000-000000000000}"/>
+          </ac:spMkLst>
+        </pc:spChg>
+        <pc:spChg chg="mod">
+          <ac:chgData name="Nicolas MOUTON--BESSON" userId="8b5e56fff13e65f2" providerId="LiveId" clId="{81B8AACB-B7AC-480A-B9C2-B13A154DB984}" dt="2026-07-03T13:21:07.783" v="48" actId="12789"/>
+          <ac:spMkLst>
+            <pc:docMk/>
+            <pc:sldMk cId="0" sldId="265"/>
+            <ac:spMk id="13" creationId="{00000000-0000-0000-0000-000000000000}"/>
+          </ac:spMkLst>
+        </pc:spChg>
+        <pc:spChg chg="mod">
+          <ac:chgData name="Nicolas MOUTON--BESSON" userId="8b5e56fff13e65f2" providerId="LiveId" clId="{81B8AACB-B7AC-480A-B9C2-B13A154DB984}" dt="2026-07-03T13:21:07.783" v="48" actId="12789"/>
+          <ac:spMkLst>
+            <pc:docMk/>
+            <pc:sldMk cId="0" sldId="265"/>
+            <ac:spMk id="14" creationId="{00000000-0000-0000-0000-000000000000}"/>
+          </ac:spMkLst>
+        </pc:spChg>
+        <pc:spChg chg="mod">
+          <ac:chgData name="Nicolas MOUTON--BESSON" userId="8b5e56fff13e65f2" providerId="LiveId" clId="{81B8AACB-B7AC-480A-B9C2-B13A154DB984}" dt="2026-07-03T13:24:40.088" v="154" actId="1076"/>
+          <ac:spMkLst>
+            <pc:docMk/>
+            <pc:sldMk cId="0" sldId="265"/>
+            <ac:spMk id="15" creationId="{00000000-0000-0000-0000-000000000000}"/>
+          </ac:spMkLst>
+        </pc:spChg>
+        <pc:spChg chg="del">
+          <ac:chgData name="Nicolas MOUTON--BESSON" userId="8b5e56fff13e65f2" providerId="LiveId" clId="{81B8AACB-B7AC-480A-B9C2-B13A154DB984}" dt="2026-07-03T13:21:23.705" v="50" actId="478"/>
+          <ac:spMkLst>
+            <pc:docMk/>
+            <pc:sldMk cId="0" sldId="265"/>
+            <ac:spMk id="17" creationId="{00000000-0000-0000-0000-000000000000}"/>
+          </ac:spMkLst>
+        </pc:spChg>
+        <pc:spChg chg="del">
+          <ac:chgData name="Nicolas MOUTON--BESSON" userId="8b5e56fff13e65f2" providerId="LiveId" clId="{81B8AACB-B7AC-480A-B9C2-B13A154DB984}" dt="2026-07-03T13:21:21.301" v="49" actId="478"/>
+          <ac:spMkLst>
+            <pc:docMk/>
+            <pc:sldMk cId="0" sldId="265"/>
+            <ac:spMk id="18" creationId="{00000000-0000-0000-0000-000000000000}"/>
+          </ac:spMkLst>
+        </pc:spChg>
+        <pc:spChg chg="mod">
+          <ac:chgData name="Nicolas MOUTON--BESSON" userId="8b5e56fff13e65f2" providerId="LiveId" clId="{81B8AACB-B7AC-480A-B9C2-B13A154DB984}" dt="2026-07-03T13:23:16.617" v="75" actId="164"/>
+          <ac:spMkLst>
+            <pc:docMk/>
+            <pc:sldMk cId="0" sldId="265"/>
+            <ac:spMk id="19" creationId="{00000000-0000-0000-0000-000000000000}"/>
+          </ac:spMkLst>
+        </pc:spChg>
+        <pc:spChg chg="mod">
+          <ac:chgData name="Nicolas MOUTON--BESSON" userId="8b5e56fff13e65f2" providerId="LiveId" clId="{81B8AACB-B7AC-480A-B9C2-B13A154DB984}" dt="2026-07-03T13:23:16.617" v="75" actId="164"/>
+          <ac:spMkLst>
+            <pc:docMk/>
+            <pc:sldMk cId="0" sldId="265"/>
+            <ac:spMk id="20" creationId="{00000000-0000-0000-0000-000000000000}"/>
+          </ac:spMkLst>
+        </pc:spChg>
+        <pc:spChg chg="del">
+          <ac:chgData name="Nicolas MOUTON--BESSON" userId="8b5e56fff13e65f2" providerId="LiveId" clId="{81B8AACB-B7AC-480A-B9C2-B13A154DB984}" dt="2026-07-03T13:21:34.690" v="54" actId="478"/>
+          <ac:spMkLst>
+            <pc:docMk/>
+            <pc:sldMk cId="0" sldId="265"/>
+            <ac:spMk id="21" creationId="{00000000-0000-0000-0000-000000000000}"/>
+          </ac:spMkLst>
+        </pc:spChg>
+        <pc:spChg chg="del">
+          <ac:chgData name="Nicolas MOUTON--BESSON" userId="8b5e56fff13e65f2" providerId="LiveId" clId="{81B8AACB-B7AC-480A-B9C2-B13A154DB984}" dt="2026-07-03T13:21:33.850" v="53" actId="478"/>
+          <ac:spMkLst>
+            <pc:docMk/>
+            <pc:sldMk cId="0" sldId="265"/>
+            <ac:spMk id="22" creationId="{00000000-0000-0000-0000-000000000000}"/>
+          </ac:spMkLst>
+        </pc:spChg>
+        <pc:spChg chg="mod">
+          <ac:chgData name="Nicolas MOUTON--BESSON" userId="8b5e56fff13e65f2" providerId="LiveId" clId="{81B8AACB-B7AC-480A-B9C2-B13A154DB984}" dt="2026-07-03T13:23:20.539" v="76" actId="164"/>
+          <ac:spMkLst>
+            <pc:docMk/>
+            <pc:sldMk cId="0" sldId="265"/>
+            <ac:spMk id="23" creationId="{00000000-0000-0000-0000-000000000000}"/>
+          </ac:spMkLst>
+        </pc:spChg>
+        <pc:spChg chg="mod ord">
+          <ac:chgData name="Nicolas MOUTON--BESSON" userId="8b5e56fff13e65f2" providerId="LiveId" clId="{81B8AACB-B7AC-480A-B9C2-B13A154DB984}" dt="2026-07-03T13:23:20.539" v="76" actId="164"/>
+          <ac:spMkLst>
+            <pc:docMk/>
+            <pc:sldMk cId="0" sldId="265"/>
+            <ac:spMk id="24" creationId="{00000000-0000-0000-0000-000000000000}"/>
+          </ac:spMkLst>
+        </pc:spChg>
+        <pc:spChg chg="mod">
+          <ac:chgData name="Nicolas MOUTON--BESSON" userId="8b5e56fff13e65f2" providerId="LiveId" clId="{81B8AACB-B7AC-480A-B9C2-B13A154DB984}" dt="2026-07-03T13:23:25.432" v="77" actId="164"/>
+          <ac:spMkLst>
+            <pc:docMk/>
+            <pc:sldMk cId="0" sldId="265"/>
+            <ac:spMk id="25" creationId="{00000000-0000-0000-0000-000000000000}"/>
+          </ac:spMkLst>
+        </pc:spChg>
+        <pc:spChg chg="mod">
+          <ac:chgData name="Nicolas MOUTON--BESSON" userId="8b5e56fff13e65f2" providerId="LiveId" clId="{81B8AACB-B7AC-480A-B9C2-B13A154DB984}" dt="2026-07-03T13:23:25.432" v="77" actId="164"/>
+          <ac:spMkLst>
+            <pc:docMk/>
+            <pc:sldMk cId="0" sldId="265"/>
+            <ac:spMk id="26" creationId="{00000000-0000-0000-0000-000000000000}"/>
+          </ac:spMkLst>
+        </pc:spChg>
+        <pc:spChg chg="mod">
+          <ac:chgData name="Nicolas MOUTON--BESSON" userId="8b5e56fff13e65f2" providerId="LiveId" clId="{81B8AACB-B7AC-480A-B9C2-B13A154DB984}" dt="2026-07-03T13:23:29.932" v="78"/>
+          <ac:spMkLst>
+            <pc:docMk/>
+            <pc:sldMk cId="0" sldId="265"/>
+            <ac:spMk id="31" creationId="{1438436C-42ED-1FC2-FA57-5DDF669052F2}"/>
+          </ac:spMkLst>
+        </pc:spChg>
+        <pc:spChg chg="mod">
+          <ac:chgData name="Nicolas MOUTON--BESSON" userId="8b5e56fff13e65f2" providerId="LiveId" clId="{81B8AACB-B7AC-480A-B9C2-B13A154DB984}" dt="2026-07-03T13:23:59.890" v="112" actId="20577"/>
+          <ac:spMkLst>
+            <pc:docMk/>
+            <pc:sldMk cId="0" sldId="265"/>
+            <ac:spMk id="32" creationId="{E4E47C96-C00C-1C6B-5B45-B4A49F72946F}"/>
+          </ac:spMkLst>
+        </pc:spChg>
+        <pc:spChg chg="mod">
+          <ac:chgData name="Nicolas MOUTON--BESSON" userId="8b5e56fff13e65f2" providerId="LiveId" clId="{81B8AACB-B7AC-480A-B9C2-B13A154DB984}" dt="2026-07-03T13:24:10.967" v="113"/>
+          <ac:spMkLst>
+            <pc:docMk/>
+            <pc:sldMk cId="0" sldId="265"/>
+            <ac:spMk id="34" creationId="{E712F487-E986-06CB-BAA9-198A2C7DDC71}"/>
+          </ac:spMkLst>
+        </pc:spChg>
+        <pc:spChg chg="mod">
+          <ac:chgData name="Nicolas MOUTON--BESSON" userId="8b5e56fff13e65f2" providerId="LiveId" clId="{81B8AACB-B7AC-480A-B9C2-B13A154DB984}" dt="2026-07-03T13:24:35.523" v="153" actId="313"/>
+          <ac:spMkLst>
+            <pc:docMk/>
+            <pc:sldMk cId="0" sldId="265"/>
+            <ac:spMk id="35" creationId="{B822D272-2A8F-CC90-2EFF-10C67D1BBBBB}"/>
+          </ac:spMkLst>
+        </pc:spChg>
+        <pc:grpChg chg="add mod">
+          <ac:chgData name="Nicolas MOUTON--BESSON" userId="8b5e56fff13e65f2" providerId="LiveId" clId="{81B8AACB-B7AC-480A-B9C2-B13A154DB984}" dt="2026-07-03T13:23:16.617" v="75" actId="164"/>
+          <ac:grpSpMkLst>
+            <pc:docMk/>
+            <pc:sldMk cId="0" sldId="265"/>
+            <ac:grpSpMk id="27" creationId="{1C14EDC7-FA76-649A-A0B8-B0330D2F5418}"/>
+          </ac:grpSpMkLst>
+        </pc:grpChg>
+        <pc:grpChg chg="add mod">
+          <ac:chgData name="Nicolas MOUTON--BESSON" userId="8b5e56fff13e65f2" providerId="LiveId" clId="{81B8AACB-B7AC-480A-B9C2-B13A154DB984}" dt="2026-07-03T13:23:20.539" v="76" actId="164"/>
+          <ac:grpSpMkLst>
+            <pc:docMk/>
+            <pc:sldMk cId="0" sldId="265"/>
+            <ac:grpSpMk id="28" creationId="{2281984D-7EB4-3F76-9F22-E78CB6BA6BB7}"/>
+          </ac:grpSpMkLst>
+        </pc:grpChg>
+        <pc:grpChg chg="add mod">
+          <ac:chgData name="Nicolas MOUTON--BESSON" userId="8b5e56fff13e65f2" providerId="LiveId" clId="{81B8AACB-B7AC-480A-B9C2-B13A154DB984}" dt="2026-07-03T13:23:25.432" v="77" actId="164"/>
+          <ac:grpSpMkLst>
+            <pc:docMk/>
+            <pc:sldMk cId="0" sldId="265"/>
+            <ac:grpSpMk id="29" creationId="{CC9A9DA9-8278-C606-ABEC-3403FCC31DD6}"/>
+          </ac:grpSpMkLst>
+        </pc:grpChg>
+        <pc:grpChg chg="add mod">
+          <ac:chgData name="Nicolas MOUTON--BESSON" userId="8b5e56fff13e65f2" providerId="LiveId" clId="{81B8AACB-B7AC-480A-B9C2-B13A154DB984}" dt="2026-07-03T13:23:50.106" v="83" actId="1076"/>
+          <ac:grpSpMkLst>
+            <pc:docMk/>
+            <pc:sldMk cId="0" sldId="265"/>
+            <ac:grpSpMk id="30" creationId="{25D8AB05-78FB-F3F5-76ED-8DDFF558D0A3}"/>
+          </ac:grpSpMkLst>
+        </pc:grpChg>
+        <pc:grpChg chg="add mod">
+          <ac:chgData name="Nicolas MOUTON--BESSON" userId="8b5e56fff13e65f2" providerId="LiveId" clId="{81B8AACB-B7AC-480A-B9C2-B13A154DB984}" dt="2026-07-03T13:24:18.105" v="116" actId="1076"/>
+          <ac:grpSpMkLst>
+            <pc:docMk/>
+            <pc:sldMk cId="0" sldId="265"/>
+            <ac:grpSpMk id="33" creationId="{2012FA5B-0E36-EC0D-8E3F-63AFA3E2011F}"/>
+          </ac:grpSpMkLst>
+        </pc:grpChg>
+      </pc:sldChg>
+    </pc:docChg>
+  </pc:docChgLst>
+</pc:chgInfo>
 </file>
 
 <file path=ppt/notesMasters/notesMaster1.xml><?xml version="1.0" encoding="utf-8"?>
@@ -139,234 +428,10 @@
           <a:chExt cx="0" cy="0"/>
         </a:xfrm>
       </p:grpSpPr>
-      <p:sp>
-        <p:nvSpPr>
-          <p:cNvPr id="2" name="Header Placeholder 1"/>
-          <p:cNvSpPr>
-            <a:spLocks noGrp="1"/>
-          </p:cNvSpPr>
-          <p:nvPr>
-            <p:ph type="hdr" sz="quarter"/>
-          </p:nvPr>
-        </p:nvSpPr>
-        <p:spPr>
-          <a:xfrm>
-            <a:off x="0" y="0"/>
-            <a:ext cx="2971800" cy="458788"/>
-          </a:xfrm>
-          <a:prstGeom prst="rect">
-            <a:avLst/>
-          </a:prstGeom>
-        </p:spPr>
-        <p:txBody>
-          <a:bodyPr vert="horz" lIns="91440" tIns="45720" rIns="91440" bIns="45720" rtlCol="0"/>
-          <a:lstStyle>
-            <a:lvl1pPr algn="l">
-              <a:defRPr sz="1200"/>
-            </a:lvl1pPr>
-          </a:lstStyle>
-          <a:p>
-            <a:endParaRPr lang="en-US"/>
-          </a:p>
-        </p:txBody>
-      </p:sp>
-      <p:sp>
-        <p:nvSpPr>
-          <p:cNvPr id="3" name="Date Placeholder 2"/>
-          <p:cNvSpPr>
-            <a:spLocks noGrp="1"/>
-          </p:cNvSpPr>
-          <p:nvPr>
-            <p:ph type="dt" idx="1"/>
-          </p:nvPr>
-        </p:nvSpPr>
-        <p:spPr>
-          <a:xfrm>
-            <a:off x="3884613" y="0"/>
-            <a:ext cx="2971800" cy="458788"/>
-          </a:xfrm>
-          <a:prstGeom prst="rect">
-            <a:avLst/>
-          </a:prstGeom>
-        </p:spPr>
-        <p:txBody>
-          <a:bodyPr vert="horz" lIns="91440" tIns="45720" rIns="91440" bIns="45720" rtlCol="0"/>
-          <a:lstStyle>
-            <a:lvl1pPr algn="r">
-              <a:defRPr sz="1200"/>
-            </a:lvl1pPr>
-          </a:lstStyle>
-          <a:p>
-            <a:fld id="{5282F153-3F37-0F45-9E97-73ACFA13230C}" type="datetimeFigureOut">
-              <a:rPr lang="en-US"/>
-              <a:t>7/23/19</a:t>
-            </a:fld>
-            <a:endParaRPr lang="en-US"/>
-          </a:p>
-        </p:txBody>
-      </p:sp>
-      <p:sp>
-        <p:nvSpPr>
-          <p:cNvPr id="4" name="Slide Image Placeholder 3"/>
-          <p:cNvSpPr>
-            <a:spLocks noGrp="1" noRot="1" noChangeAspect="1"/>
-          </p:cNvSpPr>
-          <p:nvPr>
-            <p:ph type="sldImg" idx="2"/>
-          </p:nvPr>
-        </p:nvSpPr>
-        <p:spPr>
-          <a:xfrm>
-            <a:off x="685800" y="1143000"/>
-            <a:ext cx="5486400" cy="3086100"/>
-          </a:xfrm>
-          <a:prstGeom prst="rect">
-            <a:avLst/>
-          </a:prstGeom>
-          <a:noFill/>
-          <a:ln w="12700">
-            <a:solidFill>
-              <a:prstClr val="black"/>
-            </a:solidFill>
-          </a:ln>
-        </p:spPr>
-        <p:txBody>
-          <a:bodyPr vert="horz" lIns="91440" tIns="45720" rIns="91440" bIns="45720" rtlCol="0" anchor="ctr"/>
-          <a:lstStyle/>
-          <a:p>
-            <a:endParaRPr lang="en-US"/>
-          </a:p>
-        </p:txBody>
-      </p:sp>
-      <p:sp>
-        <p:nvSpPr>
-          <p:cNvPr id="5" name="Notes Placeholder 4"/>
-          <p:cNvSpPr>
-            <a:spLocks noGrp="1"/>
-          </p:cNvSpPr>
-          <p:nvPr>
-            <p:ph type="body" sz="quarter" idx="3"/>
-          </p:nvPr>
-        </p:nvSpPr>
-        <p:spPr>
-          <a:xfrm>
-            <a:off x="685800" y="4400550"/>
-            <a:ext cx="5486400" cy="3600450"/>
-          </a:xfrm>
-          <a:prstGeom prst="rect">
-            <a:avLst/>
-          </a:prstGeom>
-        </p:spPr>
-        <p:txBody>
-          <a:bodyPr vert="horz" lIns="91440" tIns="45720" rIns="91440" bIns="45720" rtlCol="0"/>
-          <a:lstStyle/>
-          <a:p>
-            <a:pPr lvl="0"/>
-            <a:r>
-              <a:rPr lang="en-US"/>
-              <a:t>Click to edit Master text styles</a:t>
-            </a:r>
-          </a:p>
-          <a:p>
-            <a:pPr lvl="1"/>
-            <a:r>
-              <a:rPr lang="en-US"/>
-              <a:t>Second level</a:t>
-            </a:r>
-          </a:p>
-          <a:p>
-            <a:pPr lvl="2"/>
-            <a:r>
-              <a:rPr lang="en-US"/>
-              <a:t>Third level</a:t>
-            </a:r>
-          </a:p>
-          <a:p>
-            <a:pPr lvl="3"/>
-            <a:r>
-              <a:rPr lang="en-US"/>
-              <a:t>Fourth level</a:t>
-            </a:r>
-          </a:p>
-          <a:p>
-            <a:pPr lvl="4"/>
-            <a:r>
-              <a:rPr lang="en-US"/>
-              <a:t>Fifth level</a:t>
-            </a:r>
-          </a:p>
-        </p:txBody>
-      </p:sp>
-      <p:sp>
-        <p:nvSpPr>
-          <p:cNvPr id="6" name="Footer Placeholder 5"/>
-          <p:cNvSpPr>
-            <a:spLocks noGrp="1"/>
-          </p:cNvSpPr>
-          <p:nvPr>
-            <p:ph type="ftr" sz="quarter" idx="4"/>
-          </p:nvPr>
-        </p:nvSpPr>
-        <p:spPr>
-          <a:xfrm>
-            <a:off x="0" y="8685213"/>
-            <a:ext cx="2971800" cy="458787"/>
-          </a:xfrm>
-          <a:prstGeom prst="rect">
-            <a:avLst/>
-          </a:prstGeom>
-        </p:spPr>
-        <p:txBody>
-          <a:bodyPr vert="horz" lIns="91440" tIns="45720" rIns="91440" bIns="45720" rtlCol="0" anchor="b"/>
-          <a:lstStyle>
-            <a:lvl1pPr algn="l">
-              <a:defRPr sz="1200"/>
-            </a:lvl1pPr>
-          </a:lstStyle>
-          <a:p>
-            <a:endParaRPr lang="en-US"/>
-          </a:p>
-        </p:txBody>
-      </p:sp>
-      <p:sp>
-        <p:nvSpPr>
-          <p:cNvPr id="7" name="Slide Number Placeholder 6"/>
-          <p:cNvSpPr>
-            <a:spLocks noGrp="1"/>
-          </p:cNvSpPr>
-          <p:nvPr>
-            <p:ph type="sldNum" sz="quarter" idx="5"/>
-          </p:nvPr>
-        </p:nvSpPr>
-        <p:spPr>
-          <a:xfrm>
-            <a:off x="3884613" y="8685213"/>
-            <a:ext cx="2971800" cy="458787"/>
-          </a:xfrm>
-          <a:prstGeom prst="rect">
-            <a:avLst/>
-          </a:prstGeom>
-        </p:spPr>
-        <p:txBody>
-          <a:bodyPr vert="horz" lIns="91440" tIns="45720" rIns="91440" bIns="45720" rtlCol="0" anchor="b"/>
-          <a:lstStyle>
-            <a:lvl1pPr algn="r">
-              <a:defRPr sz="1200"/>
-            </a:lvl1pPr>
-          </a:lstStyle>
-          <a:p>
-            <a:fld id="{CE5E9CC1-C706-0F49-92D6-E571CC5EEA8F}" type="slidenum">
-              <a:rPr lang="en-US"/>
-              <a:t>‹#›</a:t>
-            </a:fld>
-            <a:endParaRPr lang="en-US"/>
-          </a:p>
-        </p:txBody>
-      </p:sp>
     </p:spTree>
     <p:extLst>
       <p:ext uri="{BB962C8B-B14F-4D97-AF65-F5344CB8AC3E}">
-        <p14:creationId xmlns:p14="http://schemas.microsoft.com/office/powerpoint/2010/main" val="1024086991"/>
+        <p14:creationId xmlns:p14="http://schemas.microsoft.com/office/powerpoint/2010/main" val="895868151"/>
       </p:ext>
     </p:extLst>
   </p:cSld>
@@ -510,10 +575,6 @@
           <a:bodyPr/>
           <a:lstStyle/>
           <a:p>
-            <a:r>
-              <a:rPr lang="en-US" dirty="0"/>
-              <a:t/>
-            </a:r>
             <a:endParaRPr lang="en-US" dirty="0"/>
           </a:p>
         </p:txBody>
@@ -598,10 +659,6 @@
           <a:bodyPr/>
           <a:lstStyle/>
           <a:p>
-            <a:r>
-              <a:rPr lang="en-US" dirty="0"/>
-              <a:t/>
-            </a:r>
             <a:endParaRPr lang="en-US" dirty="0"/>
           </a:p>
         </p:txBody>
@@ -686,10 +743,6 @@
           <a:bodyPr/>
           <a:lstStyle/>
           <a:p>
-            <a:r>
-              <a:rPr lang="en-US" dirty="0"/>
-              <a:t/>
-            </a:r>
             <a:endParaRPr lang="en-US" dirty="0"/>
           </a:p>
         </p:txBody>
@@ -774,10 +827,6 @@
           <a:bodyPr/>
           <a:lstStyle/>
           <a:p>
-            <a:r>
-              <a:rPr lang="en-US" dirty="0"/>
-              <a:t/>
-            </a:r>
             <a:endParaRPr lang="en-US" dirty="0"/>
           </a:p>
         </p:txBody>
@@ -862,10 +911,6 @@
           <a:bodyPr/>
           <a:lstStyle/>
           <a:p>
-            <a:r>
-              <a:rPr lang="en-US" dirty="0"/>
-              <a:t/>
-            </a:r>
             <a:endParaRPr lang="en-US" dirty="0"/>
           </a:p>
         </p:txBody>
@@ -950,10 +995,6 @@
           <a:bodyPr/>
           <a:lstStyle/>
           <a:p>
-            <a:r>
-              <a:rPr lang="en-US" dirty="0"/>
-              <a:t/>
-            </a:r>
             <a:endParaRPr lang="en-US" dirty="0"/>
           </a:p>
         </p:txBody>
@@ -1038,10 +1079,6 @@
           <a:bodyPr/>
           <a:lstStyle/>
           <a:p>
-            <a:r>
-              <a:rPr lang="en-US" dirty="0"/>
-              <a:t/>
-            </a:r>
             <a:endParaRPr lang="en-US" dirty="0"/>
           </a:p>
         </p:txBody>
@@ -1126,10 +1163,6 @@
           <a:bodyPr/>
           <a:lstStyle/>
           <a:p>
-            <a:r>
-              <a:rPr lang="en-US" dirty="0"/>
-              <a:t/>
-            </a:r>
             <a:endParaRPr lang="en-US" dirty="0"/>
           </a:p>
         </p:txBody>
@@ -1214,10 +1247,6 @@
           <a:bodyPr/>
           <a:lstStyle/>
           <a:p>
-            <a:r>
-              <a:rPr lang="en-US" dirty="0"/>
-              <a:t/>
-            </a:r>
             <a:endParaRPr lang="en-US" dirty="0"/>
           </a:p>
         </p:txBody>
@@ -1302,10 +1331,6 @@
           <a:bodyPr/>
           <a:lstStyle/>
           <a:p>
-            <a:r>
-              <a:rPr lang="en-US" dirty="0"/>
-              <a:t/>
-            </a:r>
             <a:endParaRPr lang="en-US" dirty="0"/>
           </a:p>
         </p:txBody>
@@ -1390,10 +1415,6 @@
           <a:bodyPr/>
           <a:lstStyle/>
           <a:p>
-            <a:r>
-              <a:rPr lang="en-US" dirty="0"/>
-              <a:t/>
-            </a:r>
             <a:endParaRPr lang="en-US" dirty="0"/>
           </a:p>
         </p:txBody>
@@ -1467,6 +1488,11 @@
 <file path=ppt/slideMasters/slideMaster1.xml><?xml version="1.0" encoding="utf-8"?>
 <p:sldMaster xmlns:a="http://schemas.openxmlformats.org/drawingml/2006/main" xmlns:r="http://schemas.openxmlformats.org/officeDocument/2006/relationships" xmlns:p="http://schemas.openxmlformats.org/presentationml/2006/main">
   <p:cSld>
+    <p:bg>
+      <p:bgRef idx="1001">
+        <a:schemeClr val="bg1"/>
+      </p:bgRef>
+    </p:bg>
     <p:spTree>
       <p:nvGrpSpPr>
         <p:cNvPr id="1" name=""/>
@@ -1749,6 +1775,7 @@
         <a:solidFill>
           <a:srgbClr val="21295C"/>
         </a:solidFill>
+        <a:effectLst/>
       </p:bgPr>
     </p:bg>
     <p:spTree>
@@ -1786,6 +1813,13 @@
           </a:solidFill>
           <a:ln/>
         </p:spPr>
+        <p:txBody>
+          <a:bodyPr/>
+          <a:lstStyle/>
+          <a:p>
+            <a:endParaRPr lang="fr-FR"/>
+          </a:p>
+        </p:txBody>
       </p:sp>
       <p:sp>
         <p:nvSpPr>
@@ -1808,6 +1842,13 @@
           </a:solidFill>
           <a:ln/>
         </p:spPr>
+        <p:txBody>
+          <a:bodyPr/>
+          <a:lstStyle/>
+          <a:p>
+            <a:endParaRPr lang="fr-FR"/>
+          </a:p>
+        </p:txBody>
       </p:sp>
       <p:sp>
         <p:nvSpPr>
@@ -1830,11 +1871,11 @@
           <a:bodyPr wrap="square" lIns="0" tIns="0" rIns="0" bIns="0" rtlCol="0" anchor="ctr"/>
           <a:lstStyle/>
           <a:p>
-            <a:pPr indent="0" marL="0">
-              <a:buNone/>
-            </a:pPr>
-            <a:r>
-              <a:rPr lang="en-US" sz="1400" b="1" spc="300" kern="0" dirty="0">
+            <a:pPr marL="0" indent="0">
+              <a:buNone/>
+            </a:pPr>
+            <a:r>
+              <a:rPr lang="en-US" sz="1400" b="1" kern="0" spc="300" dirty="0">
                 <a:solidFill>
                   <a:srgbClr val="9FD4E8"/>
                 </a:solidFill>
@@ -1869,7 +1910,7 @@
           <a:bodyPr wrap="square" lIns="0" tIns="0" rIns="0" bIns="0" rtlCol="0" anchor="ctr"/>
           <a:lstStyle/>
           <a:p>
-            <a:pPr indent="0" marL="0">
+            <a:pPr marL="0" indent="0">
               <a:buNone/>
             </a:pPr>
             <a:r>
@@ -1908,7 +1949,7 @@
           <a:bodyPr wrap="square" lIns="0" tIns="0" rIns="0" bIns="0" rtlCol="0" anchor="ctr"/>
           <a:lstStyle/>
           <a:p>
-            <a:pPr indent="0" marL="0">
+            <a:pPr marL="0" indent="0">
               <a:buNone/>
             </a:pPr>
             <a:r>
@@ -1922,9 +1963,6 @@
               </a:rPr>
               <a:t>Lite </a:t>
             </a:r>
-            <a:pPr indent="0" marL="0">
-              <a:buNone/>
-            </a:pPr>
             <a:r>
               <a:rPr lang="en-US" sz="4400" b="1" dirty="0">
                 <a:solidFill>
@@ -1961,7 +1999,7 @@
           <a:bodyPr wrap="square" lIns="0" tIns="0" rIns="0" bIns="0" rtlCol="0" anchor="ctr"/>
           <a:lstStyle/>
           <a:p>
-            <a:pPr indent="0" marL="0">
+            <a:pPr marL="0" indent="0">
               <a:buNone/>
             </a:pPr>
             <a:r>
@@ -2005,13 +2043,20 @@
             <a:prstDash val="solid"/>
           </a:ln>
           <a:effectLst>
-            <a:outerShdw sx="100000" sy="100000" kx="0" ky="0" algn="bl" rotWithShape="0" blurRad="101600" dist="38100" dir="5400000">
+            <a:outerShdw blurRad="101600" dist="38100" dir="5400000" algn="bl" rotWithShape="0">
               <a:srgbClr val="000000">
                 <a:alpha val="12000"/>
               </a:srgbClr>
             </a:outerShdw>
           </a:effectLst>
         </p:spPr>
+        <p:txBody>
+          <a:bodyPr/>
+          <a:lstStyle/>
+          <a:p>
+            <a:endParaRPr lang="fr-FR"/>
+          </a:p>
+        </p:txBody>
       </p:sp>
       <p:sp>
         <p:nvSpPr>
@@ -2034,7 +2079,7 @@
           <a:bodyPr wrap="square" lIns="0" tIns="0" rIns="0" bIns="0" rtlCol="0" anchor="ctr"/>
           <a:lstStyle/>
           <a:p>
-            <a:pPr indent="0" marL="0">
+            <a:pPr marL="0" indent="0">
               <a:buNone/>
             </a:pPr>
             <a:r>
@@ -2048,9 +2093,6 @@
               </a:rPr>
               <a:t>Backend  </a:t>
             </a:r>
-            <a:pPr indent="0" marL="0">
-              <a:buNone/>
-            </a:pPr>
             <a:r>
               <a:rPr lang="en-US" sz="1300" dirty="0">
                 <a:solidFill>
@@ -2062,9 +2104,6 @@
               </a:rPr>
               <a:t>Personne 1     </a:t>
             </a:r>
-            <a:pPr indent="0" marL="0">
-              <a:buNone/>
-            </a:pPr>
             <a:r>
               <a:rPr lang="en-US" sz="1300" b="1" dirty="0">
                 <a:solidFill>
@@ -2076,9 +2115,6 @@
               </a:rPr>
               <a:t>Frontend / RAG  </a:t>
             </a:r>
-            <a:pPr indent="0" marL="0">
-              <a:buNone/>
-            </a:pPr>
             <a:r>
               <a:rPr lang="en-US" sz="1300" dirty="0">
                 <a:solidFill>
@@ -2090,9 +2126,6 @@
               </a:rPr>
               <a:t>Personne 2     </a:t>
             </a:r>
-            <a:pPr indent="0" marL="0">
-              <a:buNone/>
-            </a:pPr>
             <a:r>
               <a:rPr lang="en-US" sz="1300" b="1" dirty="0">
                 <a:solidFill>
@@ -2104,9 +2137,6 @@
               </a:rPr>
               <a:t>CI/CD &amp; Docs  </a:t>
             </a:r>
-            <a:pPr indent="0" marL="0">
-              <a:buNone/>
-            </a:pPr>
             <a:r>
               <a:rPr lang="en-US" sz="1300" dirty="0">
                 <a:solidFill>
@@ -2138,6 +2168,7 @@
         <a:solidFill>
           <a:srgbClr val="F7F9FA"/>
         </a:solidFill>
+        <a:effectLst/>
       </p:bgPr>
     </p:bg>
     <p:spTree>
@@ -2175,7 +2206,7 @@
           <a:bodyPr wrap="square" lIns="0" tIns="0" rIns="0" bIns="0" rtlCol="0" anchor="ctr"/>
           <a:lstStyle/>
           <a:p>
-            <a:pPr indent="0" marL="0">
+            <a:pPr marL="0" indent="0">
               <a:buNone/>
             </a:pPr>
             <a:r>
@@ -2219,13 +2250,20 @@
             <a:prstDash val="solid"/>
           </a:ln>
           <a:effectLst>
-            <a:outerShdw sx="100000" sy="100000" kx="0" ky="0" algn="bl" rotWithShape="0" blurRad="101600" dist="38100" dir="5400000">
+            <a:outerShdw blurRad="101600" dist="38100" dir="5400000" algn="bl" rotWithShape="0">
               <a:srgbClr val="000000">
                 <a:alpha val="12000"/>
               </a:srgbClr>
             </a:outerShdw>
           </a:effectLst>
         </p:spPr>
+        <p:txBody>
+          <a:bodyPr/>
+          <a:lstStyle/>
+          <a:p>
+            <a:endParaRPr lang="fr-FR"/>
+          </a:p>
+        </p:txBody>
       </p:sp>
       <p:sp>
         <p:nvSpPr>
@@ -2248,7 +2286,7 @@
           <a:bodyPr wrap="square" lIns="0" tIns="0" rIns="0" bIns="0" rtlCol="0" anchor="ctr"/>
           <a:lstStyle/>
           <a:p>
-            <a:pPr indent="0" marL="0">
+            <a:pPr marL="0" indent="0">
               <a:buNone/>
             </a:pPr>
             <a:r>
@@ -2274,7 +2312,7 @@
         </p:nvSpPr>
         <p:spPr>
           <a:xfrm>
-            <a:off x="868680" y="2029968"/>
+            <a:off x="868680" y="2171700"/>
             <a:ext cx="91440" cy="91440"/>
           </a:xfrm>
           <a:prstGeom prst="ellipse">
@@ -2285,6 +2323,13 @@
           </a:solidFill>
           <a:ln/>
         </p:spPr>
+        <p:txBody>
+          <a:bodyPr/>
+          <a:lstStyle/>
+          <a:p>
+            <a:endParaRPr lang="fr-FR"/>
+          </a:p>
+        </p:txBody>
       </p:sp>
       <p:sp>
         <p:nvSpPr>
@@ -2307,7 +2352,7 @@
           <a:bodyPr wrap="square" lIns="0" tIns="0" rIns="0" bIns="0" rtlCol="0" anchor="ctr"/>
           <a:lstStyle/>
           <a:p>
-            <a:pPr indent="0" marL="0">
+            <a:pPr marL="0" indent="0">
               <a:buNone/>
             </a:pPr>
             <a:r>
@@ -2333,7 +2378,7 @@
         </p:nvSpPr>
         <p:spPr>
           <a:xfrm>
-            <a:off x="868680" y="2651760"/>
+            <a:off x="868680" y="2793492"/>
             <a:ext cx="91440" cy="91440"/>
           </a:xfrm>
           <a:prstGeom prst="ellipse">
@@ -2344,6 +2389,13 @@
           </a:solidFill>
           <a:ln/>
         </p:spPr>
+        <p:txBody>
+          <a:bodyPr/>
+          <a:lstStyle/>
+          <a:p>
+            <a:endParaRPr lang="fr-FR"/>
+          </a:p>
+        </p:txBody>
       </p:sp>
       <p:sp>
         <p:nvSpPr>
@@ -2366,7 +2418,7 @@
           <a:bodyPr wrap="square" lIns="0" tIns="0" rIns="0" bIns="0" rtlCol="0" anchor="ctr"/>
           <a:lstStyle/>
           <a:p>
-            <a:pPr indent="0" marL="0">
+            <a:pPr marL="0" indent="0">
               <a:buNone/>
             </a:pPr>
             <a:r>
@@ -2392,7 +2444,7 @@
         </p:nvSpPr>
         <p:spPr>
           <a:xfrm>
-            <a:off x="868680" y="3273552"/>
+            <a:off x="868680" y="3415284"/>
             <a:ext cx="91440" cy="91440"/>
           </a:xfrm>
           <a:prstGeom prst="ellipse">
@@ -2403,6 +2455,13 @@
           </a:solidFill>
           <a:ln/>
         </p:spPr>
+        <p:txBody>
+          <a:bodyPr/>
+          <a:lstStyle/>
+          <a:p>
+            <a:endParaRPr lang="fr-FR"/>
+          </a:p>
+        </p:txBody>
       </p:sp>
       <p:sp>
         <p:nvSpPr>
@@ -2425,7 +2484,7 @@
           <a:bodyPr wrap="square" lIns="0" tIns="0" rIns="0" bIns="0" rtlCol="0" anchor="ctr"/>
           <a:lstStyle/>
           <a:p>
-            <a:pPr indent="0" marL="0">
+            <a:pPr marL="0" indent="0">
               <a:buNone/>
             </a:pPr>
             <a:r>
@@ -2451,7 +2510,7 @@
         </p:nvSpPr>
         <p:spPr>
           <a:xfrm>
-            <a:off x="868680" y="3895344"/>
+            <a:off x="868680" y="4037076"/>
             <a:ext cx="91440" cy="91440"/>
           </a:xfrm>
           <a:prstGeom prst="ellipse">
@@ -2462,6 +2521,13 @@
           </a:solidFill>
           <a:ln/>
         </p:spPr>
+        <p:txBody>
+          <a:bodyPr/>
+          <a:lstStyle/>
+          <a:p>
+            <a:endParaRPr lang="fr-FR"/>
+          </a:p>
+        </p:txBody>
       </p:sp>
       <p:sp>
         <p:nvSpPr>
@@ -2484,7 +2550,7 @@
           <a:bodyPr wrap="square" lIns="0" tIns="0" rIns="0" bIns="0" rtlCol="0" anchor="ctr"/>
           <a:lstStyle/>
           <a:p>
-            <a:pPr indent="0" marL="0">
+            <a:pPr marL="0" indent="0">
               <a:buNone/>
             </a:pPr>
             <a:r>
@@ -2510,7 +2576,7 @@
         </p:nvSpPr>
         <p:spPr>
           <a:xfrm>
-            <a:off x="868680" y="4517136"/>
+            <a:off x="868680" y="4658868"/>
             <a:ext cx="91440" cy="91440"/>
           </a:xfrm>
           <a:prstGeom prst="ellipse">
@@ -2521,6 +2587,13 @@
           </a:solidFill>
           <a:ln/>
         </p:spPr>
+        <p:txBody>
+          <a:bodyPr/>
+          <a:lstStyle/>
+          <a:p>
+            <a:endParaRPr lang="fr-FR"/>
+          </a:p>
+        </p:txBody>
       </p:sp>
       <p:sp>
         <p:nvSpPr>
@@ -2543,7 +2616,7 @@
           <a:bodyPr wrap="square" lIns="0" tIns="0" rIns="0" bIns="0" rtlCol="0" anchor="ctr"/>
           <a:lstStyle/>
           <a:p>
-            <a:pPr indent="0" marL="0">
+            <a:pPr marL="0" indent="0">
               <a:buNone/>
             </a:pPr>
             <a:r>
@@ -2569,7 +2642,7 @@
         </p:nvSpPr>
         <p:spPr>
           <a:xfrm>
-            <a:off x="6217920" y="1188720"/>
+            <a:off x="6263640" y="1243584"/>
             <a:ext cx="5394960" cy="4937760"/>
           </a:xfrm>
           <a:prstGeom prst="roundRect">
@@ -2587,13 +2660,20 @@
             <a:prstDash val="solid"/>
           </a:ln>
           <a:effectLst>
-            <a:outerShdw sx="100000" sy="100000" kx="0" ky="0" algn="bl" rotWithShape="0" blurRad="101600" dist="38100" dir="5400000">
+            <a:outerShdw blurRad="101600" dist="38100" dir="5400000" algn="bl" rotWithShape="0">
               <a:srgbClr val="000000">
                 <a:alpha val="12000"/>
               </a:srgbClr>
             </a:outerShdw>
           </a:effectLst>
         </p:spPr>
+        <p:txBody>
+          <a:bodyPr/>
+          <a:lstStyle/>
+          <a:p>
+            <a:endParaRPr lang="fr-FR"/>
+          </a:p>
+        </p:txBody>
       </p:sp>
       <p:sp>
         <p:nvSpPr>
@@ -2616,7 +2696,7 @@
           <a:bodyPr wrap="square" lIns="0" tIns="0" rIns="0" bIns="0" rtlCol="0" anchor="ctr"/>
           <a:lstStyle/>
           <a:p>
-            <a:pPr indent="0" marL="0">
+            <a:pPr marL="0" indent="0">
               <a:buNone/>
             </a:pPr>
             <a:r>
@@ -2634,301 +2714,531 @@
           </a:p>
         </p:txBody>
       </p:sp>
-      <p:sp>
-        <p:nvSpPr>
-          <p:cNvPr id="17" name="Shape 15"/>
-          <p:cNvSpPr/>
-          <p:nvPr/>
-        </p:nvSpPr>
-        <p:spPr>
-          <a:xfrm>
-            <a:off x="6537960" y="2029968"/>
-            <a:ext cx="91440" cy="91440"/>
-          </a:xfrm>
-          <a:prstGeom prst="ellipse">
-            <a:avLst/>
-          </a:prstGeom>
-          <a:solidFill>
-            <a:srgbClr val="2C5F2D"/>
-          </a:solidFill>
-          <a:ln/>
-        </p:spPr>
-      </p:sp>
-      <p:sp>
-        <p:nvSpPr>
-          <p:cNvPr id="18" name="Text 16"/>
-          <p:cNvSpPr/>
-          <p:nvPr/>
-        </p:nvSpPr>
-        <p:spPr>
-          <a:xfrm>
-            <a:off x="6766560" y="1965960"/>
-            <a:ext cx="4663440" cy="502920"/>
-          </a:xfrm>
-          <a:prstGeom prst="rect">
-            <a:avLst/>
-          </a:prstGeom>
-          <a:noFill/>
-          <a:ln/>
-        </p:spPr>
-        <p:txBody>
-          <a:bodyPr wrap="square" lIns="0" tIns="0" rIns="0" bIns="0" rtlCol="0" anchor="ctr"/>
-          <a:lstStyle/>
-          <a:p>
-            <a:pPr indent="0" marL="0">
-              <a:buNone/>
-            </a:pPr>
-            <a:r>
-              <a:rPr lang="en-US" sz="1250" dirty="0">
-                <a:solidFill>
-                  <a:srgbClr val="334155"/>
-                </a:solidFill>
-                <a:latin typeface="Calibri" pitchFamily="34" charset="0"/>
-                <a:ea typeface="Calibri" pitchFamily="34" charset="-122"/>
-                <a:cs typeface="Calibri" pitchFamily="34" charset="-120"/>
-              </a:rPr>
-              <a:t>Repli automatique sur stockage local si MinIO indisponible</a:t>
-            </a:r>
-            <a:endParaRPr lang="en-US" sz="1250" dirty="0"/>
-          </a:p>
-        </p:txBody>
-      </p:sp>
-      <p:sp>
-        <p:nvSpPr>
-          <p:cNvPr id="19" name="Shape 17"/>
-          <p:cNvSpPr/>
-          <p:nvPr/>
-        </p:nvSpPr>
-        <p:spPr>
-          <a:xfrm>
-            <a:off x="6537960" y="2651760"/>
-            <a:ext cx="91440" cy="91440"/>
-          </a:xfrm>
-          <a:prstGeom prst="ellipse">
-            <a:avLst/>
-          </a:prstGeom>
-          <a:solidFill>
-            <a:srgbClr val="2C5F2D"/>
-          </a:solidFill>
-          <a:ln/>
-        </p:spPr>
-      </p:sp>
-      <p:sp>
-        <p:nvSpPr>
-          <p:cNvPr id="20" name="Text 18"/>
-          <p:cNvSpPr/>
-          <p:nvPr/>
-        </p:nvSpPr>
-        <p:spPr>
-          <a:xfrm>
-            <a:off x="6766560" y="2587752"/>
-            <a:ext cx="4663440" cy="502920"/>
-          </a:xfrm>
-          <a:prstGeom prst="rect">
-            <a:avLst/>
-          </a:prstGeom>
-          <a:noFill/>
-          <a:ln/>
-        </p:spPr>
-        <p:txBody>
-          <a:bodyPr wrap="square" lIns="0" tIns="0" rIns="0" bIns="0" rtlCol="0" anchor="ctr"/>
-          <a:lstStyle/>
-          <a:p>
-            <a:pPr indent="0" marL="0">
-              <a:buNone/>
-            </a:pPr>
-            <a:r>
-              <a:rPr lang="en-US" sz="1250" dirty="0">
-                <a:solidFill>
-                  <a:srgbClr val="334155"/>
-                </a:solidFill>
-                <a:latin typeface="Calibri" pitchFamily="34" charset="0"/>
-                <a:ea typeface="Calibri" pitchFamily="34" charset="-122"/>
-                <a:cs typeface="Calibri" pitchFamily="34" charset="-120"/>
-              </a:rPr>
-              <a:t>Bouton de réinitialisation de l'index vectoriel</a:t>
-            </a:r>
-            <a:endParaRPr lang="en-US" sz="1250" dirty="0"/>
-          </a:p>
-        </p:txBody>
-      </p:sp>
-      <p:sp>
-        <p:nvSpPr>
-          <p:cNvPr id="21" name="Shape 19"/>
-          <p:cNvSpPr/>
-          <p:nvPr/>
-        </p:nvSpPr>
-        <p:spPr>
-          <a:xfrm>
-            <a:off x="6537960" y="3273552"/>
-            <a:ext cx="91440" cy="91440"/>
-          </a:xfrm>
-          <a:prstGeom prst="ellipse">
-            <a:avLst/>
-          </a:prstGeom>
-          <a:solidFill>
-            <a:srgbClr val="2C5F2D"/>
-          </a:solidFill>
-          <a:ln/>
-        </p:spPr>
-      </p:sp>
-      <p:sp>
-        <p:nvSpPr>
-          <p:cNvPr id="22" name="Text 20"/>
-          <p:cNvSpPr/>
-          <p:nvPr/>
-        </p:nvSpPr>
-        <p:spPr>
-          <a:xfrm>
-            <a:off x="6766560" y="3209544"/>
-            <a:ext cx="4663440" cy="502920"/>
-          </a:xfrm>
-          <a:prstGeom prst="rect">
-            <a:avLst/>
-          </a:prstGeom>
-          <a:noFill/>
-          <a:ln/>
-        </p:spPr>
-        <p:txBody>
-          <a:bodyPr wrap="square" lIns="0" tIns="0" rIns="0" bIns="0" rtlCol="0" anchor="ctr"/>
-          <a:lstStyle/>
-          <a:p>
-            <a:pPr indent="0" marL="0">
-              <a:buNone/>
-            </a:pPr>
-            <a:r>
-              <a:rPr lang="en-US" sz="1250" dirty="0">
-                <a:solidFill>
-                  <a:srgbClr val="334155"/>
-                </a:solidFill>
-                <a:latin typeface="Calibri" pitchFamily="34" charset="0"/>
-                <a:ea typeface="Calibri" pitchFamily="34" charset="-122"/>
-                <a:cs typeface="Calibri" pitchFamily="34" charset="-120"/>
-              </a:rPr>
-              <a:t>top_k réglable directement via l'API (/ask)</a:t>
-            </a:r>
-            <a:endParaRPr lang="en-US" sz="1250" dirty="0"/>
-          </a:p>
-        </p:txBody>
-      </p:sp>
-      <p:sp>
-        <p:nvSpPr>
-          <p:cNvPr id="23" name="Shape 21"/>
-          <p:cNvSpPr/>
-          <p:nvPr/>
-        </p:nvSpPr>
-        <p:spPr>
-          <a:xfrm>
-            <a:off x="6537960" y="3895344"/>
-            <a:ext cx="91440" cy="91440"/>
-          </a:xfrm>
-          <a:prstGeom prst="ellipse">
-            <a:avLst/>
-          </a:prstGeom>
-          <a:solidFill>
-            <a:srgbClr val="2C5F2D"/>
-          </a:solidFill>
-          <a:ln/>
-        </p:spPr>
-      </p:sp>
-      <p:sp>
-        <p:nvSpPr>
-          <p:cNvPr id="24" name="Text 22"/>
-          <p:cNvSpPr/>
-          <p:nvPr/>
-        </p:nvSpPr>
-        <p:spPr>
-          <a:xfrm>
-            <a:off x="6766560" y="3831336"/>
-            <a:ext cx="4663440" cy="502920"/>
-          </a:xfrm>
-          <a:prstGeom prst="rect">
-            <a:avLst/>
-          </a:prstGeom>
-          <a:noFill/>
-          <a:ln/>
-        </p:spPr>
-        <p:txBody>
-          <a:bodyPr wrap="square" lIns="0" tIns="0" rIns="0" bIns="0" rtlCol="0" anchor="ctr"/>
-          <a:lstStyle/>
-          <a:p>
-            <a:pPr indent="0" marL="0">
-              <a:buNone/>
-            </a:pPr>
-            <a:r>
-              <a:rPr lang="en-US" sz="1250" dirty="0">
-                <a:solidFill>
-                  <a:srgbClr val="334155"/>
-                </a:solidFill>
-                <a:latin typeface="Calibri" pitchFamily="34" charset="0"/>
-                <a:ea typeface="Calibri" pitchFamily="34" charset="-122"/>
-                <a:cs typeface="Calibri" pitchFamily="34" charset="-120"/>
-              </a:rPr>
-              <a:t>Score de similarité affiché pour chaque source</a:t>
-            </a:r>
-            <a:endParaRPr lang="en-US" sz="1250" dirty="0"/>
-          </a:p>
-        </p:txBody>
-      </p:sp>
-      <p:sp>
-        <p:nvSpPr>
-          <p:cNvPr id="25" name="Shape 23"/>
-          <p:cNvSpPr/>
-          <p:nvPr/>
-        </p:nvSpPr>
-        <p:spPr>
-          <a:xfrm>
-            <a:off x="6537960" y="4517136"/>
-            <a:ext cx="91440" cy="91440"/>
-          </a:xfrm>
-          <a:prstGeom prst="ellipse">
-            <a:avLst/>
-          </a:prstGeom>
-          <a:solidFill>
-            <a:srgbClr val="2C5F2D"/>
-          </a:solidFill>
-          <a:ln/>
-        </p:spPr>
-      </p:sp>
-      <p:sp>
-        <p:nvSpPr>
-          <p:cNvPr id="26" name="Text 24"/>
-          <p:cNvSpPr/>
-          <p:nvPr/>
-        </p:nvSpPr>
-        <p:spPr>
-          <a:xfrm>
-            <a:off x="6766560" y="4453128"/>
-            <a:ext cx="4663440" cy="502920"/>
-          </a:xfrm>
-          <a:prstGeom prst="rect">
-            <a:avLst/>
-          </a:prstGeom>
-          <a:noFill/>
-          <a:ln/>
-        </p:spPr>
-        <p:txBody>
-          <a:bodyPr wrap="square" lIns="0" tIns="0" rIns="0" bIns="0" rtlCol="0" anchor="ctr"/>
-          <a:lstStyle/>
-          <a:p>
-            <a:pPr indent="0" marL="0">
-              <a:buNone/>
-            </a:pPr>
-            <a:r>
-              <a:rPr lang="en-US" sz="1250" dirty="0">
-                <a:solidFill>
-                  <a:srgbClr val="334155"/>
-                </a:solidFill>
-                <a:latin typeface="Calibri" pitchFamily="34" charset="0"/>
-                <a:ea typeface="Calibri" pitchFamily="34" charset="-122"/>
-                <a:cs typeface="Calibri" pitchFamily="34" charset="-120"/>
-              </a:rPr>
-              <a:t>Adaptation de la CI aux sous-modules git (submodules: recursive)</a:t>
-            </a:r>
-            <a:endParaRPr lang="en-US" sz="1250" dirty="0"/>
-          </a:p>
-        </p:txBody>
-      </p:sp>
+      <p:grpSp>
+        <p:nvGrpSpPr>
+          <p:cNvPr id="27" name="Groupe 26">
+            <a:extLst>
+              <a:ext uri="{FF2B5EF4-FFF2-40B4-BE49-F238E27FC236}">
+                <a16:creationId xmlns:a16="http://schemas.microsoft.com/office/drawing/2014/main" id="{1C14EDC7-FA76-649A-A0B8-B0330D2F5418}"/>
+              </a:ext>
+            </a:extLst>
+          </p:cNvPr>
+          <p:cNvGrpSpPr/>
+          <p:nvPr/>
+        </p:nvGrpSpPr>
+        <p:grpSpPr>
+          <a:xfrm>
+            <a:off x="6629400" y="1832317"/>
+            <a:ext cx="4892040" cy="502920"/>
+            <a:chOff x="6629400" y="1832317"/>
+            <a:chExt cx="4892040" cy="502920"/>
+          </a:xfrm>
+        </p:grpSpPr>
+        <p:sp>
+          <p:nvSpPr>
+            <p:cNvPr id="19" name="Shape 17"/>
+            <p:cNvSpPr/>
+            <p:nvPr/>
+          </p:nvSpPr>
+          <p:spPr>
+            <a:xfrm>
+              <a:off x="6629400" y="2038057"/>
+              <a:ext cx="91440" cy="91440"/>
+            </a:xfrm>
+            <a:prstGeom prst="ellipse">
+              <a:avLst/>
+            </a:prstGeom>
+            <a:solidFill>
+              <a:srgbClr val="2C5F2D"/>
+            </a:solidFill>
+            <a:ln/>
+          </p:spPr>
+          <p:txBody>
+            <a:bodyPr/>
+            <a:lstStyle/>
+            <a:p>
+              <a:endParaRPr lang="fr-FR"/>
+            </a:p>
+          </p:txBody>
+        </p:sp>
+        <p:sp>
+          <p:nvSpPr>
+            <p:cNvPr id="20" name="Text 18"/>
+            <p:cNvSpPr/>
+            <p:nvPr/>
+          </p:nvSpPr>
+          <p:spPr>
+            <a:xfrm>
+              <a:off x="6858000" y="1832317"/>
+              <a:ext cx="4663440" cy="502920"/>
+            </a:xfrm>
+            <a:prstGeom prst="rect">
+              <a:avLst/>
+            </a:prstGeom>
+            <a:noFill/>
+            <a:ln/>
+          </p:spPr>
+          <p:txBody>
+            <a:bodyPr wrap="square" lIns="0" tIns="0" rIns="0" bIns="0" rtlCol="0" anchor="ctr"/>
+            <a:lstStyle/>
+            <a:p>
+              <a:pPr marL="0" indent="0">
+                <a:buNone/>
+              </a:pPr>
+              <a:r>
+                <a:rPr lang="en-US" sz="1250" dirty="0">
+                  <a:solidFill>
+                    <a:srgbClr val="334155"/>
+                  </a:solidFill>
+                  <a:latin typeface="Calibri" pitchFamily="34" charset="0"/>
+                  <a:ea typeface="Calibri" pitchFamily="34" charset="-122"/>
+                  <a:cs typeface="Calibri" pitchFamily="34" charset="-120"/>
+                </a:rPr>
+                <a:t>Bouton de réinitialisation de l'index vectoriel</a:t>
+              </a:r>
+              <a:endParaRPr lang="en-US" sz="1250" dirty="0"/>
+            </a:p>
+          </p:txBody>
+        </p:sp>
+      </p:grpSp>
+      <p:grpSp>
+        <p:nvGrpSpPr>
+          <p:cNvPr id="29" name="Groupe 28">
+            <a:extLst>
+              <a:ext uri="{FF2B5EF4-FFF2-40B4-BE49-F238E27FC236}">
+                <a16:creationId xmlns:a16="http://schemas.microsoft.com/office/drawing/2014/main" id="{CC9A9DA9-8278-C606-ABEC-3403FCC31DD6}"/>
+              </a:ext>
+            </a:extLst>
+          </p:cNvPr>
+          <p:cNvGrpSpPr/>
+          <p:nvPr/>
+        </p:nvGrpSpPr>
+        <p:grpSpPr>
+          <a:xfrm>
+            <a:off x="6583680" y="2861719"/>
+            <a:ext cx="4892040" cy="502920"/>
+            <a:chOff x="6583680" y="2861719"/>
+            <a:chExt cx="4892040" cy="502920"/>
+          </a:xfrm>
+        </p:grpSpPr>
+        <p:sp>
+          <p:nvSpPr>
+            <p:cNvPr id="25" name="Shape 23"/>
+            <p:cNvSpPr/>
+            <p:nvPr/>
+          </p:nvSpPr>
+          <p:spPr>
+            <a:xfrm>
+              <a:off x="6583680" y="3067459"/>
+              <a:ext cx="91440" cy="91440"/>
+            </a:xfrm>
+            <a:prstGeom prst="ellipse">
+              <a:avLst/>
+            </a:prstGeom>
+            <a:solidFill>
+              <a:srgbClr val="2C5F2D"/>
+            </a:solidFill>
+            <a:ln/>
+          </p:spPr>
+          <p:txBody>
+            <a:bodyPr/>
+            <a:lstStyle/>
+            <a:p>
+              <a:endParaRPr lang="fr-FR"/>
+            </a:p>
+          </p:txBody>
+        </p:sp>
+        <p:sp>
+          <p:nvSpPr>
+            <p:cNvPr id="26" name="Text 24"/>
+            <p:cNvSpPr/>
+            <p:nvPr/>
+          </p:nvSpPr>
+          <p:spPr>
+            <a:xfrm>
+              <a:off x="6812280" y="2861719"/>
+              <a:ext cx="4663440" cy="502920"/>
+            </a:xfrm>
+            <a:prstGeom prst="rect">
+              <a:avLst/>
+            </a:prstGeom>
+            <a:noFill/>
+            <a:ln/>
+          </p:spPr>
+          <p:txBody>
+            <a:bodyPr wrap="square" lIns="0" tIns="0" rIns="0" bIns="0" rtlCol="0" anchor="ctr"/>
+            <a:lstStyle/>
+            <a:p>
+              <a:pPr marL="0" indent="0">
+                <a:buNone/>
+              </a:pPr>
+              <a:r>
+                <a:rPr lang="en-US" sz="1250" dirty="0">
+                  <a:solidFill>
+                    <a:srgbClr val="334155"/>
+                  </a:solidFill>
+                  <a:latin typeface="Calibri" pitchFamily="34" charset="0"/>
+                  <a:ea typeface="Calibri" pitchFamily="34" charset="-122"/>
+                  <a:cs typeface="Calibri" pitchFamily="34" charset="-120"/>
+                </a:rPr>
+                <a:t>Adaptation de la CI aux sous-modules git (submodules: recursive)</a:t>
+              </a:r>
+              <a:endParaRPr lang="en-US" sz="1250" dirty="0"/>
+            </a:p>
+          </p:txBody>
+        </p:sp>
+      </p:grpSp>
+      <p:grpSp>
+        <p:nvGrpSpPr>
+          <p:cNvPr id="28" name="Groupe 27">
+            <a:extLst>
+              <a:ext uri="{FF2B5EF4-FFF2-40B4-BE49-F238E27FC236}">
+                <a16:creationId xmlns:a16="http://schemas.microsoft.com/office/drawing/2014/main" id="{2281984D-7EB4-3F76-9F22-E78CB6BA6BB7}"/>
+              </a:ext>
+            </a:extLst>
+          </p:cNvPr>
+          <p:cNvGrpSpPr/>
+          <p:nvPr/>
+        </p:nvGrpSpPr>
+        <p:grpSpPr>
+          <a:xfrm>
+            <a:off x="6583680" y="2344908"/>
+            <a:ext cx="4846320" cy="502920"/>
+            <a:chOff x="6583680" y="2344908"/>
+            <a:chExt cx="4846320" cy="502920"/>
+          </a:xfrm>
+        </p:grpSpPr>
+        <p:sp>
+          <p:nvSpPr>
+            <p:cNvPr id="23" name="Shape 21"/>
+            <p:cNvSpPr/>
+            <p:nvPr/>
+          </p:nvSpPr>
+          <p:spPr>
+            <a:xfrm>
+              <a:off x="6583680" y="2550648"/>
+              <a:ext cx="91440" cy="91440"/>
+            </a:xfrm>
+            <a:prstGeom prst="ellipse">
+              <a:avLst/>
+            </a:prstGeom>
+            <a:solidFill>
+              <a:srgbClr val="2C5F2D"/>
+            </a:solidFill>
+            <a:ln/>
+          </p:spPr>
+          <p:txBody>
+            <a:bodyPr/>
+            <a:lstStyle/>
+            <a:p>
+              <a:endParaRPr lang="fr-FR"/>
+            </a:p>
+          </p:txBody>
+        </p:sp>
+        <p:sp>
+          <p:nvSpPr>
+            <p:cNvPr id="24" name="Text 22"/>
+            <p:cNvSpPr/>
+            <p:nvPr/>
+          </p:nvSpPr>
+          <p:spPr>
+            <a:xfrm>
+              <a:off x="6766560" y="2344908"/>
+              <a:ext cx="4663440" cy="502920"/>
+            </a:xfrm>
+            <a:prstGeom prst="rect">
+              <a:avLst/>
+            </a:prstGeom>
+            <a:noFill/>
+            <a:ln/>
+          </p:spPr>
+          <p:txBody>
+            <a:bodyPr wrap="square" lIns="0" tIns="0" rIns="0" bIns="0" rtlCol="0" anchor="ctr"/>
+            <a:lstStyle/>
+            <a:p>
+              <a:pPr marL="0" indent="0">
+                <a:buNone/>
+              </a:pPr>
+              <a:r>
+                <a:rPr lang="en-US" sz="1250" dirty="0">
+                  <a:solidFill>
+                    <a:srgbClr val="334155"/>
+                  </a:solidFill>
+                  <a:latin typeface="Calibri" pitchFamily="34" charset="0"/>
+                  <a:ea typeface="Calibri" pitchFamily="34" charset="-122"/>
+                  <a:cs typeface="Calibri" pitchFamily="34" charset="-120"/>
+                </a:rPr>
+                <a:t>Score de similarité affiché pour chaque source</a:t>
+              </a:r>
+              <a:endParaRPr lang="en-US" sz="1250" dirty="0"/>
+            </a:p>
+          </p:txBody>
+        </p:sp>
+      </p:grpSp>
+      <p:grpSp>
+        <p:nvGrpSpPr>
+          <p:cNvPr id="30" name="Groupe 29">
+            <a:extLst>
+              <a:ext uri="{FF2B5EF4-FFF2-40B4-BE49-F238E27FC236}">
+                <a16:creationId xmlns:a16="http://schemas.microsoft.com/office/drawing/2014/main" id="{25D8AB05-78FB-F3F5-76ED-8DDFF558D0A3}"/>
+              </a:ext>
+            </a:extLst>
+          </p:cNvPr>
+          <p:cNvGrpSpPr/>
+          <p:nvPr/>
+        </p:nvGrpSpPr>
+        <p:grpSpPr>
+          <a:xfrm>
+            <a:off x="6583680" y="3276717"/>
+            <a:ext cx="4892040" cy="502920"/>
+            <a:chOff x="6583680" y="2861719"/>
+            <a:chExt cx="4892040" cy="502920"/>
+          </a:xfrm>
+        </p:grpSpPr>
+        <p:sp>
+          <p:nvSpPr>
+            <p:cNvPr id="31" name="Shape 23">
+              <a:extLst>
+                <a:ext uri="{FF2B5EF4-FFF2-40B4-BE49-F238E27FC236}">
+                  <a16:creationId xmlns:a16="http://schemas.microsoft.com/office/drawing/2014/main" id="{1438436C-42ED-1FC2-FA57-5DDF669052F2}"/>
+                </a:ext>
+              </a:extLst>
+            </p:cNvPr>
+            <p:cNvSpPr/>
+            <p:nvPr/>
+          </p:nvSpPr>
+          <p:spPr>
+            <a:xfrm>
+              <a:off x="6583680" y="3067459"/>
+              <a:ext cx="91440" cy="91440"/>
+            </a:xfrm>
+            <a:prstGeom prst="ellipse">
+              <a:avLst/>
+            </a:prstGeom>
+            <a:solidFill>
+              <a:srgbClr val="2C5F2D"/>
+            </a:solidFill>
+            <a:ln/>
+          </p:spPr>
+          <p:txBody>
+            <a:bodyPr/>
+            <a:lstStyle/>
+            <a:p>
+              <a:endParaRPr lang="fr-FR"/>
+            </a:p>
+          </p:txBody>
+        </p:sp>
+        <p:sp>
+          <p:nvSpPr>
+            <p:cNvPr id="32" name="Text 24">
+              <a:extLst>
+                <a:ext uri="{FF2B5EF4-FFF2-40B4-BE49-F238E27FC236}">
+                  <a16:creationId xmlns:a16="http://schemas.microsoft.com/office/drawing/2014/main" id="{E4E47C96-C00C-1C6B-5B45-B4A49F72946F}"/>
+                </a:ext>
+              </a:extLst>
+            </p:cNvPr>
+            <p:cNvSpPr/>
+            <p:nvPr/>
+          </p:nvSpPr>
+          <p:spPr>
+            <a:xfrm>
+              <a:off x="6812280" y="2861719"/>
+              <a:ext cx="4663440" cy="502920"/>
+            </a:xfrm>
+            <a:prstGeom prst="rect">
+              <a:avLst/>
+            </a:prstGeom>
+            <a:noFill/>
+            <a:ln/>
+          </p:spPr>
+          <p:txBody>
+            <a:bodyPr wrap="square" lIns="0" tIns="0" rIns="0" bIns="0" rtlCol="0" anchor="ctr"/>
+            <a:lstStyle/>
+            <a:p>
+              <a:pPr marL="0" indent="0">
+                <a:buNone/>
+              </a:pPr>
+              <a:r>
+                <a:rPr lang="en-US" sz="1250" dirty="0">
+                  <a:solidFill>
+                    <a:srgbClr val="334155"/>
+                  </a:solidFill>
+                  <a:latin typeface="Calibri" pitchFamily="34" charset="0"/>
+                  <a:ea typeface="Calibri" pitchFamily="34" charset="-122"/>
+                  <a:cs typeface="Calibri" pitchFamily="34" charset="-120"/>
+                </a:rPr>
+                <a:t>Choix de </a:t>
+              </a:r>
+              <a:r>
+                <a:rPr lang="en-US" sz="1250" dirty="0" err="1">
+                  <a:solidFill>
+                    <a:srgbClr val="334155"/>
+                  </a:solidFill>
+                  <a:latin typeface="Calibri" pitchFamily="34" charset="0"/>
+                  <a:ea typeface="Calibri" pitchFamily="34" charset="-122"/>
+                  <a:cs typeface="Calibri" pitchFamily="34" charset="-120"/>
+                </a:rPr>
+                <a:t>différents</a:t>
+              </a:r>
+              <a:r>
+                <a:rPr lang="en-US" sz="1250" dirty="0">
+                  <a:solidFill>
+                    <a:srgbClr val="334155"/>
+                  </a:solidFill>
+                  <a:latin typeface="Calibri" pitchFamily="34" charset="0"/>
+                  <a:ea typeface="Calibri" pitchFamily="34" charset="-122"/>
+                  <a:cs typeface="Calibri" pitchFamily="34" charset="-120"/>
+                </a:rPr>
+                <a:t> </a:t>
+              </a:r>
+              <a:r>
+                <a:rPr lang="en-US" sz="1250" dirty="0" err="1">
+                  <a:solidFill>
+                    <a:srgbClr val="334155"/>
+                  </a:solidFill>
+                  <a:latin typeface="Calibri" pitchFamily="34" charset="0"/>
+                  <a:ea typeface="Calibri" pitchFamily="34" charset="-122"/>
+                  <a:cs typeface="Calibri" pitchFamily="34" charset="-120"/>
+                </a:rPr>
+                <a:t>modeles</a:t>
+              </a:r>
+              <a:endParaRPr lang="en-US" sz="1250" dirty="0"/>
+            </a:p>
+          </p:txBody>
+        </p:sp>
+      </p:grpSp>
+      <p:grpSp>
+        <p:nvGrpSpPr>
+          <p:cNvPr id="33" name="Groupe 32">
+            <a:extLst>
+              <a:ext uri="{FF2B5EF4-FFF2-40B4-BE49-F238E27FC236}">
+                <a16:creationId xmlns:a16="http://schemas.microsoft.com/office/drawing/2014/main" id="{2012FA5B-0E36-EC0D-8E3F-63AFA3E2011F}"/>
+              </a:ext>
+            </a:extLst>
+          </p:cNvPr>
+          <p:cNvGrpSpPr/>
+          <p:nvPr/>
+        </p:nvGrpSpPr>
+        <p:grpSpPr>
+          <a:xfrm>
+            <a:off x="6583680" y="3699102"/>
+            <a:ext cx="4892040" cy="502920"/>
+            <a:chOff x="6583680" y="2861719"/>
+            <a:chExt cx="4892040" cy="502920"/>
+          </a:xfrm>
+        </p:grpSpPr>
+        <p:sp>
+          <p:nvSpPr>
+            <p:cNvPr id="34" name="Shape 23">
+              <a:extLst>
+                <a:ext uri="{FF2B5EF4-FFF2-40B4-BE49-F238E27FC236}">
+                  <a16:creationId xmlns:a16="http://schemas.microsoft.com/office/drawing/2014/main" id="{E712F487-E986-06CB-BAA9-198A2C7DDC71}"/>
+                </a:ext>
+              </a:extLst>
+            </p:cNvPr>
+            <p:cNvSpPr/>
+            <p:nvPr/>
+          </p:nvSpPr>
+          <p:spPr>
+            <a:xfrm>
+              <a:off x="6583680" y="3067459"/>
+              <a:ext cx="91440" cy="91440"/>
+            </a:xfrm>
+            <a:prstGeom prst="ellipse">
+              <a:avLst/>
+            </a:prstGeom>
+            <a:solidFill>
+              <a:srgbClr val="2C5F2D"/>
+            </a:solidFill>
+            <a:ln/>
+          </p:spPr>
+          <p:txBody>
+            <a:bodyPr/>
+            <a:lstStyle/>
+            <a:p>
+              <a:endParaRPr lang="fr-FR"/>
+            </a:p>
+          </p:txBody>
+        </p:sp>
+        <p:sp>
+          <p:nvSpPr>
+            <p:cNvPr id="35" name="Text 24">
+              <a:extLst>
+                <a:ext uri="{FF2B5EF4-FFF2-40B4-BE49-F238E27FC236}">
+                  <a16:creationId xmlns:a16="http://schemas.microsoft.com/office/drawing/2014/main" id="{B822D272-2A8F-CC90-2EFF-10C67D1BBBBB}"/>
+                </a:ext>
+              </a:extLst>
+            </p:cNvPr>
+            <p:cNvSpPr/>
+            <p:nvPr/>
+          </p:nvSpPr>
+          <p:spPr>
+            <a:xfrm>
+              <a:off x="6812280" y="2861719"/>
+              <a:ext cx="4663440" cy="502920"/>
+            </a:xfrm>
+            <a:prstGeom prst="rect">
+              <a:avLst/>
+            </a:prstGeom>
+            <a:noFill/>
+            <a:ln/>
+          </p:spPr>
+          <p:txBody>
+            <a:bodyPr wrap="square" lIns="0" tIns="0" rIns="0" bIns="0" rtlCol="0" anchor="ctr"/>
+            <a:lstStyle/>
+            <a:p>
+              <a:pPr marL="0" indent="0">
+                <a:buNone/>
+              </a:pPr>
+              <a:r>
+                <a:rPr lang="en-US" sz="1250" dirty="0" err="1">
+                  <a:solidFill>
+                    <a:srgbClr val="334155"/>
+                  </a:solidFill>
+                  <a:latin typeface="Calibri" pitchFamily="34" charset="0"/>
+                  <a:ea typeface="Calibri" pitchFamily="34" charset="-122"/>
+                  <a:cs typeface="Calibri" pitchFamily="34" charset="-120"/>
+                </a:rPr>
+                <a:t>Différents</a:t>
+              </a:r>
+              <a:r>
+                <a:rPr lang="en-US" sz="1250" dirty="0">
+                  <a:solidFill>
+                    <a:srgbClr val="334155"/>
+                  </a:solidFill>
+                  <a:latin typeface="Calibri" pitchFamily="34" charset="0"/>
+                  <a:ea typeface="Calibri" pitchFamily="34" charset="-122"/>
+                  <a:cs typeface="Calibri" pitchFamily="34" charset="-120"/>
+                </a:rPr>
+                <a:t> </a:t>
+              </a:r>
+              <a:r>
+                <a:rPr lang="en-US" sz="1250" dirty="0" err="1">
+                  <a:solidFill>
+                    <a:srgbClr val="334155"/>
+                  </a:solidFill>
+                  <a:latin typeface="Calibri" pitchFamily="34" charset="0"/>
+                  <a:ea typeface="Calibri" pitchFamily="34" charset="-122"/>
+                  <a:cs typeface="Calibri" pitchFamily="34" charset="-120"/>
+                </a:rPr>
+                <a:t>méthodes</a:t>
+              </a:r>
+              <a:r>
+                <a:rPr lang="en-US" sz="1250" dirty="0">
+                  <a:solidFill>
+                    <a:srgbClr val="334155"/>
+                  </a:solidFill>
+                  <a:latin typeface="Calibri" pitchFamily="34" charset="0"/>
+                  <a:ea typeface="Calibri" pitchFamily="34" charset="-122"/>
+                  <a:cs typeface="Calibri" pitchFamily="34" charset="-120"/>
+                </a:rPr>
+                <a:t> de “chunking”</a:t>
+              </a:r>
+              <a:endParaRPr lang="en-US" sz="1250" dirty="0"/>
+            </a:p>
+          </p:txBody>
+        </p:sp>
+      </p:grpSp>
     </p:spTree>
   </p:cSld>
   <p:clrMapOvr>
@@ -2945,6 +3255,7 @@
         <a:solidFill>
           <a:srgbClr val="21295C"/>
         </a:solidFill>
+        <a:effectLst/>
       </p:bgPr>
     </p:bg>
     <p:spTree>
@@ -2982,6 +3293,13 @@
           </a:solidFill>
           <a:ln/>
         </p:spPr>
+        <p:txBody>
+          <a:bodyPr/>
+          <a:lstStyle/>
+          <a:p>
+            <a:endParaRPr lang="fr-FR"/>
+          </a:p>
+        </p:txBody>
       </p:sp>
       <p:sp>
         <p:nvSpPr>
@@ -3004,6 +3322,13 @@
           </a:solidFill>
           <a:ln/>
         </p:spPr>
+        <p:txBody>
+          <a:bodyPr/>
+          <a:lstStyle/>
+          <a:p>
+            <a:endParaRPr lang="fr-FR"/>
+          </a:p>
+        </p:txBody>
       </p:sp>
       <p:sp>
         <p:nvSpPr>
@@ -3026,7 +3351,7 @@
           <a:bodyPr wrap="square" lIns="0" tIns="0" rIns="0" bIns="0" rtlCol="0" anchor="ctr"/>
           <a:lstStyle/>
           <a:p>
-            <a:pPr indent="0" marL="0">
+            <a:pPr marL="0" indent="0">
               <a:buNone/>
             </a:pPr>
             <a:r>
@@ -3065,7 +3390,7 @@
           <a:bodyPr wrap="square" lIns="0" tIns="0" rIns="0" bIns="0" rtlCol="0" anchor="t"/>
           <a:lstStyle/>
           <a:p>
-            <a:pPr indent="0" marL="0">
+            <a:pPr marL="0" indent="0">
               <a:buNone/>
             </a:pPr>
             <a:r>
@@ -3104,7 +3429,7 @@
           <a:bodyPr wrap="square" lIns="0" tIns="0" rIns="0" bIns="0" rtlCol="0" anchor="ctr"/>
           <a:lstStyle/>
           <a:p>
-            <a:pPr indent="0" marL="0">
+            <a:pPr marL="0" indent="0">
               <a:buNone/>
             </a:pPr>
             <a:r>
@@ -3138,6 +3463,7 @@
         <a:solidFill>
           <a:srgbClr val="F7F9FA"/>
         </a:solidFill>
+        <a:effectLst/>
       </p:bgPr>
     </p:bg>
     <p:spTree>
@@ -3175,7 +3501,7 @@
           <a:bodyPr wrap="square" lIns="0" tIns="0" rIns="0" bIns="0" rtlCol="0" anchor="ctr"/>
           <a:lstStyle/>
           <a:p>
-            <a:pPr indent="0" marL="0">
+            <a:pPr marL="0" indent="0">
               <a:buNone/>
             </a:pPr>
             <a:r>
@@ -3214,7 +3540,7 @@
           <a:bodyPr wrap="square" lIns="0" tIns="0" rIns="0" bIns="0" rtlCol="0" anchor="t"/>
           <a:lstStyle/>
           <a:p>
-            <a:pPr indent="0" marL="0">
+            <a:pPr marL="0" indent="0">
               <a:buNone/>
             </a:pPr>
             <a:r>
@@ -3251,6 +3577,13 @@
           </a:solidFill>
           <a:ln/>
         </p:spPr>
+        <p:txBody>
+          <a:bodyPr/>
+          <a:lstStyle/>
+          <a:p>
+            <a:endParaRPr lang="fr-FR"/>
+          </a:p>
+        </p:txBody>
       </p:sp>
       <p:sp>
         <p:nvSpPr>
@@ -3273,7 +3606,7 @@
           <a:bodyPr wrap="square" lIns="0" tIns="0" rIns="0" bIns="0" rtlCol="0" anchor="ctr"/>
           <a:lstStyle/>
           <a:p>
-            <a:pPr algn="ctr" indent="0" marL="0">
+            <a:pPr marL="0" indent="0" algn="ctr">
               <a:buNone/>
             </a:pPr>
             <a:r>
@@ -3312,7 +3645,7 @@
           <a:bodyPr wrap="square" lIns="0" tIns="0" rIns="0" bIns="0" rtlCol="0" anchor="ctr"/>
           <a:lstStyle/>
           <a:p>
-            <a:pPr indent="0" marL="0">
+            <a:pPr marL="0" indent="0">
               <a:buNone/>
             </a:pPr>
             <a:r>
@@ -3349,6 +3682,13 @@
           </a:solidFill>
           <a:ln/>
         </p:spPr>
+        <p:txBody>
+          <a:bodyPr/>
+          <a:lstStyle/>
+          <a:p>
+            <a:endParaRPr lang="fr-FR"/>
+          </a:p>
+        </p:txBody>
       </p:sp>
       <p:sp>
         <p:nvSpPr>
@@ -3371,7 +3711,7 @@
           <a:bodyPr wrap="square" lIns="0" tIns="0" rIns="0" bIns="0" rtlCol="0" anchor="ctr"/>
           <a:lstStyle/>
           <a:p>
-            <a:pPr algn="ctr" indent="0" marL="0">
+            <a:pPr marL="0" indent="0" algn="ctr">
               <a:buNone/>
             </a:pPr>
             <a:r>
@@ -3410,7 +3750,7 @@
           <a:bodyPr wrap="square" lIns="0" tIns="0" rIns="0" bIns="0" rtlCol="0" anchor="ctr"/>
           <a:lstStyle/>
           <a:p>
-            <a:pPr indent="0" marL="0">
+            <a:pPr marL="0" indent="0">
               <a:buNone/>
             </a:pPr>
             <a:r>
@@ -3447,6 +3787,13 @@
           </a:solidFill>
           <a:ln/>
         </p:spPr>
+        <p:txBody>
+          <a:bodyPr/>
+          <a:lstStyle/>
+          <a:p>
+            <a:endParaRPr lang="fr-FR"/>
+          </a:p>
+        </p:txBody>
       </p:sp>
       <p:sp>
         <p:nvSpPr>
@@ -3469,7 +3816,7 @@
           <a:bodyPr wrap="square" lIns="0" tIns="0" rIns="0" bIns="0" rtlCol="0" anchor="ctr"/>
           <a:lstStyle/>
           <a:p>
-            <a:pPr algn="ctr" indent="0" marL="0">
+            <a:pPr marL="0" indent="0" algn="ctr">
               <a:buNone/>
             </a:pPr>
             <a:r>
@@ -3508,7 +3855,7 @@
           <a:bodyPr wrap="square" lIns="0" tIns="0" rIns="0" bIns="0" rtlCol="0" anchor="ctr"/>
           <a:lstStyle/>
           <a:p>
-            <a:pPr indent="0" marL="0">
+            <a:pPr marL="0" indent="0">
               <a:buNone/>
             </a:pPr>
             <a:r>
@@ -3545,6 +3892,13 @@
           </a:solidFill>
           <a:ln/>
         </p:spPr>
+        <p:txBody>
+          <a:bodyPr/>
+          <a:lstStyle/>
+          <a:p>
+            <a:endParaRPr lang="fr-FR"/>
+          </a:p>
+        </p:txBody>
       </p:sp>
       <p:sp>
         <p:nvSpPr>
@@ -3567,7 +3921,7 @@
           <a:bodyPr wrap="square" lIns="0" tIns="0" rIns="0" bIns="0" rtlCol="0" anchor="ctr"/>
           <a:lstStyle/>
           <a:p>
-            <a:pPr algn="ctr" indent="0" marL="0">
+            <a:pPr marL="0" indent="0" algn="ctr">
               <a:buNone/>
             </a:pPr>
             <a:r>
@@ -3606,7 +3960,7 @@
           <a:bodyPr wrap="square" lIns="0" tIns="0" rIns="0" bIns="0" rtlCol="0" anchor="ctr"/>
           <a:lstStyle/>
           <a:p>
-            <a:pPr indent="0" marL="0">
+            <a:pPr marL="0" indent="0">
               <a:buNone/>
             </a:pPr>
             <a:r>
@@ -3643,6 +3997,13 @@
           </a:solidFill>
           <a:ln/>
         </p:spPr>
+        <p:txBody>
+          <a:bodyPr/>
+          <a:lstStyle/>
+          <a:p>
+            <a:endParaRPr lang="fr-FR"/>
+          </a:p>
+        </p:txBody>
       </p:sp>
       <p:sp>
         <p:nvSpPr>
@@ -3665,7 +4026,7 @@
           <a:bodyPr wrap="square" lIns="0" tIns="0" rIns="0" bIns="0" rtlCol="0" anchor="ctr"/>
           <a:lstStyle/>
           <a:p>
-            <a:pPr algn="ctr" indent="0" marL="0">
+            <a:pPr marL="0" indent="0" algn="ctr">
               <a:buNone/>
             </a:pPr>
             <a:r>
@@ -3704,7 +4065,7 @@
           <a:bodyPr wrap="square" lIns="0" tIns="0" rIns="0" bIns="0" rtlCol="0" anchor="ctr"/>
           <a:lstStyle/>
           <a:p>
-            <a:pPr indent="0" marL="0">
+            <a:pPr marL="0" indent="0">
               <a:buNone/>
             </a:pPr>
             <a:r>
@@ -3748,13 +4109,20 @@
             <a:prstDash val="solid"/>
           </a:ln>
           <a:effectLst>
-            <a:outerShdw sx="100000" sy="100000" kx="0" ky="0" algn="bl" rotWithShape="0" blurRad="101600" dist="38100" dir="5400000">
+            <a:outerShdw blurRad="101600" dist="38100" dir="5400000" algn="bl" rotWithShape="0">
               <a:srgbClr val="000000">
                 <a:alpha val="12000"/>
               </a:srgbClr>
             </a:outerShdw>
           </a:effectLst>
         </p:spPr>
+        <p:txBody>
+          <a:bodyPr/>
+          <a:lstStyle/>
+          <a:p>
+            <a:endParaRPr lang="fr-FR"/>
+          </a:p>
+        </p:txBody>
       </p:sp>
       <p:sp>
         <p:nvSpPr>
@@ -3777,7 +4145,7 @@
           <a:bodyPr wrap="square" lIns="0" tIns="0" rIns="0" bIns="0" rtlCol="0" anchor="ctr"/>
           <a:lstStyle/>
           <a:p>
-            <a:pPr indent="0" marL="0">
+            <a:pPr marL="0" indent="0">
               <a:buNone/>
             </a:pPr>
             <a:r>
@@ -3816,7 +4184,7 @@
           <a:bodyPr wrap="square" lIns="0" tIns="0" rIns="0" bIns="0" rtlCol="0" anchor="t"/>
           <a:lstStyle/>
           <a:p>
-            <a:pPr indent="0" marL="0">
+            <a:pPr marL="0" indent="0">
               <a:lnSpc>
                 <a:spcPct val="130000"/>
               </a:lnSpc>
@@ -3836,7 +4204,7 @@
             <a:endParaRPr lang="en-US" sz="1400" dirty="0"/>
           </a:p>
           <a:p>
-            <a:pPr indent="0" marL="0">
+            <a:pPr marL="0" indent="0">
               <a:lnSpc>
                 <a:spcPct val="130000"/>
               </a:lnSpc>
@@ -3845,7 +4213,7 @@
             <a:endParaRPr lang="en-US" sz="1400" dirty="0"/>
           </a:p>
           <a:p>
-            <a:pPr indent="0" marL="0">
+            <a:pPr marL="0" indent="0">
               <a:lnSpc>
                 <a:spcPct val="130000"/>
               </a:lnSpc>
@@ -3865,7 +4233,7 @@
             <a:endParaRPr lang="en-US" sz="1400" dirty="0"/>
           </a:p>
           <a:p>
-            <a:pPr indent="0" marL="0">
+            <a:pPr marL="0" indent="0">
               <a:lnSpc>
                 <a:spcPct val="130000"/>
               </a:lnSpc>
@@ -3874,7 +4242,7 @@
             <a:endParaRPr lang="en-US" sz="1400" dirty="0"/>
           </a:p>
           <a:p>
-            <a:pPr indent="0" marL="0">
+            <a:pPr marL="0" indent="0">
               <a:lnSpc>
                 <a:spcPct val="130000"/>
               </a:lnSpc>
@@ -3911,6 +4279,7 @@
         <a:solidFill>
           <a:srgbClr val="FFFFFF"/>
         </a:solidFill>
+        <a:effectLst/>
       </p:bgPr>
     </p:bg>
     <p:spTree>
@@ -3948,7 +4317,7 @@
           <a:bodyPr wrap="square" lIns="0" tIns="0" rIns="0" bIns="0" rtlCol="0" anchor="ctr"/>
           <a:lstStyle/>
           <a:p>
-            <a:pPr indent="0" marL="0">
+            <a:pPr marL="0" indent="0">
               <a:buNone/>
             </a:pPr>
             <a:r>
@@ -3987,7 +4356,7 @@
           <a:bodyPr wrap="square" lIns="0" tIns="0" rIns="0" bIns="0" rtlCol="0" anchor="ctr"/>
           <a:lstStyle/>
           <a:p>
-            <a:pPr indent="0" marL="0">
+            <a:pPr marL="0" indent="0">
               <a:buNone/>
             </a:pPr>
             <a:r>
@@ -4026,6 +4395,13 @@
           </a:solidFill>
           <a:ln/>
         </p:spPr>
+        <p:txBody>
+          <a:bodyPr/>
+          <a:lstStyle/>
+          <a:p>
+            <a:endParaRPr lang="fr-FR"/>
+          </a:p>
+        </p:txBody>
       </p:sp>
       <p:sp>
         <p:nvSpPr>
@@ -4048,7 +4424,7 @@
           <a:bodyPr wrap="square" lIns="635" tIns="635" rIns="635" bIns="635" rtlCol="0" anchor="ctr"/>
           <a:lstStyle/>
           <a:p>
-            <a:pPr algn="ctr" indent="0" marL="0">
+            <a:pPr marL="0" indent="0" algn="ctr">
               <a:buNone/>
             </a:pPr>
             <a:r>
@@ -4065,7 +4441,7 @@
             <a:endParaRPr lang="en-US" sz="1100" dirty="0"/>
           </a:p>
           <a:p>
-            <a:pPr algn="ctr" indent="0" marL="0">
+            <a:pPr marL="0" indent="0" algn="ctr">
               <a:buNone/>
             </a:pPr>
             <a:r>
@@ -4102,6 +4478,13 @@
           </a:solidFill>
           <a:ln/>
         </p:spPr>
+        <p:txBody>
+          <a:bodyPr/>
+          <a:lstStyle/>
+          <a:p>
+            <a:endParaRPr lang="fr-FR"/>
+          </a:p>
+        </p:txBody>
       </p:sp>
       <p:sp>
         <p:nvSpPr>
@@ -4124,6 +4507,13 @@
           </a:solidFill>
           <a:ln/>
         </p:spPr>
+        <p:txBody>
+          <a:bodyPr/>
+          <a:lstStyle/>
+          <a:p>
+            <a:endParaRPr lang="fr-FR"/>
+          </a:p>
+        </p:txBody>
       </p:sp>
       <p:sp>
         <p:nvSpPr>
@@ -4146,7 +4536,7 @@
           <a:bodyPr wrap="square" lIns="635" tIns="635" rIns="635" bIns="635" rtlCol="0" anchor="ctr"/>
           <a:lstStyle/>
           <a:p>
-            <a:pPr algn="ctr" indent="0" marL="0">
+            <a:pPr marL="0" indent="0" algn="ctr">
               <a:buNone/>
             </a:pPr>
             <a:r>
@@ -4163,7 +4553,7 @@
             <a:endParaRPr lang="en-US" sz="1100" dirty="0"/>
           </a:p>
           <a:p>
-            <a:pPr algn="ctr" indent="0" marL="0">
+            <a:pPr marL="0" indent="0" algn="ctr">
               <a:buNone/>
             </a:pPr>
             <a:r>
@@ -4200,6 +4590,13 @@
           </a:solidFill>
           <a:ln/>
         </p:spPr>
+        <p:txBody>
+          <a:bodyPr/>
+          <a:lstStyle/>
+          <a:p>
+            <a:endParaRPr lang="fr-FR"/>
+          </a:p>
+        </p:txBody>
       </p:sp>
       <p:sp>
         <p:nvSpPr>
@@ -4222,6 +4619,13 @@
           </a:solidFill>
           <a:ln/>
         </p:spPr>
+        <p:txBody>
+          <a:bodyPr/>
+          <a:lstStyle/>
+          <a:p>
+            <a:endParaRPr lang="fr-FR"/>
+          </a:p>
+        </p:txBody>
       </p:sp>
       <p:sp>
         <p:nvSpPr>
@@ -4244,7 +4648,7 @@
           <a:bodyPr wrap="square" lIns="635" tIns="635" rIns="635" bIns="635" rtlCol="0" anchor="ctr"/>
           <a:lstStyle/>
           <a:p>
-            <a:pPr algn="ctr" indent="0" marL="0">
+            <a:pPr marL="0" indent="0" algn="ctr">
               <a:buNone/>
             </a:pPr>
             <a:r>
@@ -4261,7 +4665,7 @@
             <a:endParaRPr lang="en-US" sz="1100" dirty="0"/>
           </a:p>
           <a:p>
-            <a:pPr algn="ctr" indent="0" marL="0">
+            <a:pPr marL="0" indent="0" algn="ctr">
               <a:buNone/>
             </a:pPr>
             <a:r>
@@ -4298,6 +4702,13 @@
           </a:solidFill>
           <a:ln/>
         </p:spPr>
+        <p:txBody>
+          <a:bodyPr/>
+          <a:lstStyle/>
+          <a:p>
+            <a:endParaRPr lang="fr-FR"/>
+          </a:p>
+        </p:txBody>
       </p:sp>
       <p:sp>
         <p:nvSpPr>
@@ -4320,6 +4731,13 @@
           </a:solidFill>
           <a:ln/>
         </p:spPr>
+        <p:txBody>
+          <a:bodyPr/>
+          <a:lstStyle/>
+          <a:p>
+            <a:endParaRPr lang="fr-FR"/>
+          </a:p>
+        </p:txBody>
       </p:sp>
       <p:sp>
         <p:nvSpPr>
@@ -4342,7 +4760,7 @@
           <a:bodyPr wrap="square" lIns="635" tIns="635" rIns="635" bIns="635" rtlCol="0" anchor="ctr"/>
           <a:lstStyle/>
           <a:p>
-            <a:pPr algn="ctr" indent="0" marL="0">
+            <a:pPr marL="0" indent="0" algn="ctr">
               <a:buNone/>
             </a:pPr>
             <a:r>
@@ -4359,7 +4777,7 @@
             <a:endParaRPr lang="en-US" sz="1100" dirty="0"/>
           </a:p>
           <a:p>
-            <a:pPr algn="ctr" indent="0" marL="0">
+            <a:pPr marL="0" indent="0" algn="ctr">
               <a:buNone/>
             </a:pPr>
             <a:r>
@@ -4396,6 +4814,13 @@
           </a:solidFill>
           <a:ln/>
         </p:spPr>
+        <p:txBody>
+          <a:bodyPr/>
+          <a:lstStyle/>
+          <a:p>
+            <a:endParaRPr lang="fr-FR"/>
+          </a:p>
+        </p:txBody>
       </p:sp>
       <p:sp>
         <p:nvSpPr>
@@ -4418,6 +4843,13 @@
           </a:solidFill>
           <a:ln/>
         </p:spPr>
+        <p:txBody>
+          <a:bodyPr/>
+          <a:lstStyle/>
+          <a:p>
+            <a:endParaRPr lang="fr-FR"/>
+          </a:p>
+        </p:txBody>
       </p:sp>
       <p:sp>
         <p:nvSpPr>
@@ -4440,7 +4872,7 @@
           <a:bodyPr wrap="square" lIns="635" tIns="635" rIns="635" bIns="635" rtlCol="0" anchor="ctr"/>
           <a:lstStyle/>
           <a:p>
-            <a:pPr algn="ctr" indent="0" marL="0">
+            <a:pPr marL="0" indent="0" algn="ctr">
               <a:buNone/>
             </a:pPr>
             <a:r>
@@ -4457,7 +4889,7 @@
             <a:endParaRPr lang="en-US" sz="1100" dirty="0"/>
           </a:p>
           <a:p>
-            <a:pPr algn="ctr" indent="0" marL="0">
+            <a:pPr marL="0" indent="0" algn="ctr">
               <a:buNone/>
             </a:pPr>
             <a:r>
@@ -4494,6 +4926,13 @@
           </a:solidFill>
           <a:ln/>
         </p:spPr>
+        <p:txBody>
+          <a:bodyPr/>
+          <a:lstStyle/>
+          <a:p>
+            <a:endParaRPr lang="fr-FR"/>
+          </a:p>
+        </p:txBody>
       </p:sp>
       <p:sp>
         <p:nvSpPr>
@@ -4516,6 +4955,13 @@
           </a:solidFill>
           <a:ln/>
         </p:spPr>
+        <p:txBody>
+          <a:bodyPr/>
+          <a:lstStyle/>
+          <a:p>
+            <a:endParaRPr lang="fr-FR"/>
+          </a:p>
+        </p:txBody>
       </p:sp>
       <p:sp>
         <p:nvSpPr>
@@ -4538,7 +4984,7 @@
           <a:bodyPr wrap="square" lIns="635" tIns="635" rIns="635" bIns="635" rtlCol="0" anchor="ctr"/>
           <a:lstStyle/>
           <a:p>
-            <a:pPr algn="ctr" indent="0" marL="0">
+            <a:pPr marL="0" indent="0" algn="ctr">
               <a:buNone/>
             </a:pPr>
             <a:r>
@@ -4555,7 +5001,7 @@
             <a:endParaRPr lang="en-US" sz="1100" dirty="0"/>
           </a:p>
           <a:p>
-            <a:pPr algn="ctr" indent="0" marL="0">
+            <a:pPr marL="0" indent="0" algn="ctr">
               <a:buNone/>
             </a:pPr>
             <a:r>
@@ -4592,6 +5038,13 @@
           </a:solidFill>
           <a:ln/>
         </p:spPr>
+        <p:txBody>
+          <a:bodyPr/>
+          <a:lstStyle/>
+          <a:p>
+            <a:endParaRPr lang="fr-FR"/>
+          </a:p>
+        </p:txBody>
       </p:sp>
       <p:sp>
         <p:nvSpPr>
@@ -4614,6 +5067,13 @@
           </a:solidFill>
           <a:ln/>
         </p:spPr>
+        <p:txBody>
+          <a:bodyPr/>
+          <a:lstStyle/>
+          <a:p>
+            <a:endParaRPr lang="fr-FR"/>
+          </a:p>
+        </p:txBody>
       </p:sp>
       <p:sp>
         <p:nvSpPr>
@@ -4636,7 +5096,7 @@
           <a:bodyPr wrap="square" lIns="635" tIns="635" rIns="635" bIns="635" rtlCol="0" anchor="ctr"/>
           <a:lstStyle/>
           <a:p>
-            <a:pPr algn="ctr" indent="0" marL="0">
+            <a:pPr marL="0" indent="0" algn="ctr">
               <a:buNone/>
             </a:pPr>
             <a:r>
@@ -4653,7 +5113,7 @@
             <a:endParaRPr lang="en-US" sz="1100" dirty="0"/>
           </a:p>
           <a:p>
-            <a:pPr algn="ctr" indent="0" marL="0">
+            <a:pPr marL="0" indent="0" algn="ctr">
               <a:buNone/>
             </a:pPr>
             <a:r>
@@ -4697,13 +5157,20 @@
             <a:prstDash val="solid"/>
           </a:ln>
           <a:effectLst>
-            <a:outerShdw sx="100000" sy="100000" kx="0" ky="0" algn="bl" rotWithShape="0" blurRad="101600" dist="38100" dir="5400000">
+            <a:outerShdw blurRad="101600" dist="38100" dir="5400000" algn="bl" rotWithShape="0">
               <a:srgbClr val="000000">
                 <a:alpha val="12000"/>
               </a:srgbClr>
             </a:outerShdw>
           </a:effectLst>
         </p:spPr>
+        <p:txBody>
+          <a:bodyPr/>
+          <a:lstStyle/>
+          <a:p>
+            <a:endParaRPr lang="fr-FR"/>
+          </a:p>
+        </p:txBody>
       </p:sp>
       <p:sp>
         <p:nvSpPr>
@@ -4726,7 +5193,7 @@
           <a:bodyPr wrap="square" lIns="0" tIns="0" rIns="0" bIns="0" rtlCol="0" anchor="ctr"/>
           <a:lstStyle/>
           <a:p>
-            <a:pPr indent="0" marL="0">
+            <a:pPr marL="0" indent="0">
               <a:buNone/>
             </a:pPr>
             <a:r>
@@ -4765,7 +5232,7 @@
           <a:bodyPr wrap="square" lIns="0" tIns="0" rIns="0" bIns="0" rtlCol="0" anchor="t"/>
           <a:lstStyle/>
           <a:p>
-            <a:pPr indent="0" marL="0">
+            <a:pPr marL="0" indent="0">
               <a:buNone/>
             </a:pPr>
             <a:r>
@@ -4804,7 +5271,7 @@
           <a:bodyPr wrap="square" lIns="0" tIns="0" rIns="0" bIns="0" rtlCol="0" anchor="ctr"/>
           <a:lstStyle/>
           <a:p>
-            <a:pPr indent="0" marL="0">
+            <a:pPr marL="0" indent="0">
               <a:buNone/>
             </a:pPr>
             <a:r>
@@ -4843,7 +5310,7 @@
           <a:bodyPr wrap="square" lIns="0" tIns="0" rIns="0" bIns="0" rtlCol="0" anchor="t"/>
           <a:lstStyle/>
           <a:p>
-            <a:pPr indent="0" marL="0">
+            <a:pPr marL="0" indent="0">
               <a:buNone/>
             </a:pPr>
             <a:r>
@@ -4877,6 +5344,7 @@
         <a:solidFill>
           <a:srgbClr val="F7F9FA"/>
         </a:solidFill>
+        <a:effectLst/>
       </p:bgPr>
     </p:bg>
     <p:spTree>
@@ -4914,7 +5382,7 @@
           <a:bodyPr wrap="square" lIns="0" tIns="0" rIns="0" bIns="0" rtlCol="0" anchor="ctr"/>
           <a:lstStyle/>
           <a:p>
-            <a:pPr indent="0" marL="0">
+            <a:pPr marL="0" indent="0">
               <a:buNone/>
             </a:pPr>
             <a:r>
@@ -4953,6 +5421,13 @@
           </a:solidFill>
           <a:ln/>
         </p:spPr>
+        <p:txBody>
+          <a:bodyPr/>
+          <a:lstStyle/>
+          <a:p>
+            <a:endParaRPr lang="fr-FR"/>
+          </a:p>
+        </p:txBody>
       </p:sp>
       <p:sp>
         <p:nvSpPr>
@@ -4975,7 +5450,7 @@
           <a:bodyPr wrap="square" lIns="0" tIns="0" rIns="0" bIns="0" rtlCol="0" anchor="ctr"/>
           <a:lstStyle/>
           <a:p>
-            <a:pPr algn="ctr" indent="0" marL="0">
+            <a:pPr marL="0" indent="0" algn="ctr">
               <a:buNone/>
             </a:pPr>
             <a:r>
@@ -5012,6 +5487,13 @@
           </a:solidFill>
           <a:ln/>
         </p:spPr>
+        <p:txBody>
+          <a:bodyPr/>
+          <a:lstStyle/>
+          <a:p>
+            <a:endParaRPr lang="fr-FR"/>
+          </a:p>
+        </p:txBody>
       </p:sp>
       <p:sp>
         <p:nvSpPr>
@@ -5034,6 +5516,13 @@
           </a:solidFill>
           <a:ln/>
         </p:spPr>
+        <p:txBody>
+          <a:bodyPr/>
+          <a:lstStyle/>
+          <a:p>
+            <a:endParaRPr lang="fr-FR"/>
+          </a:p>
+        </p:txBody>
       </p:sp>
       <p:sp>
         <p:nvSpPr>
@@ -5056,7 +5545,7 @@
           <a:bodyPr wrap="square" lIns="0" tIns="0" rIns="0" bIns="0" rtlCol="0" anchor="ctr"/>
           <a:lstStyle/>
           <a:p>
-            <a:pPr algn="ctr" indent="0" marL="0">
+            <a:pPr marL="0" indent="0" algn="ctr">
               <a:buNone/>
             </a:pPr>
             <a:r>
@@ -5093,6 +5582,13 @@
           </a:solidFill>
           <a:ln/>
         </p:spPr>
+        <p:txBody>
+          <a:bodyPr/>
+          <a:lstStyle/>
+          <a:p>
+            <a:endParaRPr lang="fr-FR"/>
+          </a:p>
+        </p:txBody>
       </p:sp>
       <p:sp>
         <p:nvSpPr>
@@ -5115,6 +5611,13 @@
           </a:solidFill>
           <a:ln/>
         </p:spPr>
+        <p:txBody>
+          <a:bodyPr/>
+          <a:lstStyle/>
+          <a:p>
+            <a:endParaRPr lang="fr-FR"/>
+          </a:p>
+        </p:txBody>
       </p:sp>
       <p:sp>
         <p:nvSpPr>
@@ -5137,7 +5640,7 @@
           <a:bodyPr wrap="square" lIns="0" tIns="0" rIns="0" bIns="0" rtlCol="0" anchor="ctr"/>
           <a:lstStyle/>
           <a:p>
-            <a:pPr algn="ctr" indent="0" marL="0">
+            <a:pPr marL="0" indent="0" algn="ctr">
               <a:buNone/>
             </a:pPr>
             <a:r>
@@ -5174,6 +5677,13 @@
           </a:solidFill>
           <a:ln/>
         </p:spPr>
+        <p:txBody>
+          <a:bodyPr/>
+          <a:lstStyle/>
+          <a:p>
+            <a:endParaRPr lang="fr-FR"/>
+          </a:p>
+        </p:txBody>
       </p:sp>
       <p:sp>
         <p:nvSpPr>
@@ -5196,7 +5706,7 @@
           <a:bodyPr wrap="square" lIns="381" tIns="381" rIns="381" bIns="381" rtlCol="0" anchor="ctr"/>
           <a:lstStyle/>
           <a:p>
-            <a:pPr algn="ctr" indent="0" marL="0">
+            <a:pPr marL="0" indent="0" algn="ctr">
               <a:buNone/>
             </a:pPr>
             <a:r>
@@ -5213,7 +5723,7 @@
             <a:endParaRPr lang="en-US" sz="1050" dirty="0"/>
           </a:p>
           <a:p>
-            <a:pPr algn="ctr" indent="0" marL="0">
+            <a:pPr marL="0" indent="0" algn="ctr">
               <a:buNone/>
             </a:pPr>
             <a:r>
@@ -5230,7 +5740,7 @@
             <a:endParaRPr lang="en-US" sz="1050" dirty="0"/>
           </a:p>
           <a:p>
-            <a:pPr algn="ctr" indent="0" marL="0">
+            <a:pPr marL="0" indent="0" algn="ctr">
               <a:buNone/>
             </a:pPr>
             <a:r>
@@ -5267,6 +5777,13 @@
           </a:solidFill>
           <a:ln/>
         </p:spPr>
+        <p:txBody>
+          <a:bodyPr/>
+          <a:lstStyle/>
+          <a:p>
+            <a:endParaRPr lang="fr-FR"/>
+          </a:p>
+        </p:txBody>
       </p:sp>
       <p:sp>
         <p:nvSpPr>
@@ -5289,7 +5806,7 @@
           <a:bodyPr wrap="square" lIns="381" tIns="381" rIns="381" bIns="381" rtlCol="0" anchor="ctr"/>
           <a:lstStyle/>
           <a:p>
-            <a:pPr algn="ctr" indent="0" marL="0">
+            <a:pPr marL="0" indent="0" algn="ctr">
               <a:buNone/>
             </a:pPr>
             <a:r>
@@ -5306,7 +5823,7 @@
             <a:endParaRPr lang="en-US" sz="1050" dirty="0"/>
           </a:p>
           <a:p>
-            <a:pPr algn="ctr" indent="0" marL="0">
+            <a:pPr marL="0" indent="0" algn="ctr">
               <a:buNone/>
             </a:pPr>
             <a:r>
@@ -5323,7 +5840,7 @@
             <a:endParaRPr lang="en-US" sz="1050" dirty="0"/>
           </a:p>
           <a:p>
-            <a:pPr algn="ctr" indent="0" marL="0">
+            <a:pPr marL="0" indent="0" algn="ctr">
               <a:buNone/>
             </a:pPr>
             <a:r>
@@ -5362,6 +5879,13 @@
           </a:solidFill>
           <a:ln/>
         </p:spPr>
+        <p:txBody>
+          <a:bodyPr/>
+          <a:lstStyle/>
+          <a:p>
+            <a:endParaRPr lang="fr-FR"/>
+          </a:p>
+        </p:txBody>
       </p:sp>
       <p:sp>
         <p:nvSpPr>
@@ -5384,7 +5908,7 @@
           <a:bodyPr wrap="square" lIns="635" tIns="635" rIns="635" bIns="635" rtlCol="0" anchor="ctr"/>
           <a:lstStyle/>
           <a:p>
-            <a:pPr algn="ctr" indent="0" marL="0">
+            <a:pPr marL="0" indent="0" algn="ctr">
               <a:buNone/>
             </a:pPr>
             <a:r>
@@ -5401,7 +5925,7 @@
             <a:endParaRPr lang="en-US" sz="1050" dirty="0"/>
           </a:p>
           <a:p>
-            <a:pPr algn="ctr" indent="0" marL="0">
+            <a:pPr marL="0" indent="0" algn="ctr">
               <a:buNone/>
             </a:pPr>
             <a:r>
@@ -5418,7 +5942,7 @@
             <a:endParaRPr lang="en-US" sz="1050" dirty="0"/>
           </a:p>
           <a:p>
-            <a:pPr algn="ctr" indent="0" marL="0">
+            <a:pPr marL="0" indent="0" algn="ctr">
               <a:buNone/>
             </a:pPr>
             <a:r>
@@ -5458,6 +5982,13 @@
             <a:prstDash val="solid"/>
           </a:ln>
         </p:spPr>
+        <p:txBody>
+          <a:bodyPr/>
+          <a:lstStyle/>
+          <a:p>
+            <a:endParaRPr lang="fr-FR"/>
+          </a:p>
+        </p:txBody>
       </p:sp>
       <p:sp>
         <p:nvSpPr>
@@ -5481,6 +6012,13 @@
             <a:prstDash val="solid"/>
           </a:ln>
         </p:spPr>
+        <p:txBody>
+          <a:bodyPr/>
+          <a:lstStyle/>
+          <a:p>
+            <a:endParaRPr lang="fr-FR"/>
+          </a:p>
+        </p:txBody>
       </p:sp>
       <p:sp>
         <p:nvSpPr>
@@ -5504,6 +6042,13 @@
             <a:prstDash val="solid"/>
           </a:ln>
         </p:spPr>
+        <p:txBody>
+          <a:bodyPr/>
+          <a:lstStyle/>
+          <a:p>
+            <a:endParaRPr lang="fr-FR"/>
+          </a:p>
+        </p:txBody>
       </p:sp>
       <p:sp>
         <p:nvSpPr>
@@ -5527,6 +6072,13 @@
             <a:prstDash val="solid"/>
           </a:ln>
         </p:spPr>
+        <p:txBody>
+          <a:bodyPr/>
+          <a:lstStyle/>
+          <a:p>
+            <a:endParaRPr lang="fr-FR"/>
+          </a:p>
+        </p:txBody>
       </p:sp>
       <p:sp>
         <p:nvSpPr>
@@ -5550,6 +6102,13 @@
             <a:prstDash val="solid"/>
           </a:ln>
         </p:spPr>
+        <p:txBody>
+          <a:bodyPr/>
+          <a:lstStyle/>
+          <a:p>
+            <a:endParaRPr lang="fr-FR"/>
+          </a:p>
+        </p:txBody>
       </p:sp>
       <p:sp>
         <p:nvSpPr>
@@ -5573,6 +6132,13 @@
             <a:prstDash val="solid"/>
           </a:ln>
         </p:spPr>
+        <p:txBody>
+          <a:bodyPr/>
+          <a:lstStyle/>
+          <a:p>
+            <a:endParaRPr lang="fr-FR"/>
+          </a:p>
+        </p:txBody>
       </p:sp>
       <p:sp>
         <p:nvSpPr>
@@ -5595,7 +6161,7 @@
           <a:bodyPr wrap="square" lIns="0" tIns="0" rIns="0" bIns="0" rtlCol="0" anchor="ctr"/>
           <a:lstStyle/>
           <a:p>
-            <a:pPr algn="ctr" indent="0" marL="0">
+            <a:pPr marL="0" indent="0" algn="ctr">
               <a:buNone/>
             </a:pPr>
             <a:r>
@@ -5632,6 +6198,13 @@
           </a:solidFill>
           <a:ln/>
         </p:spPr>
+        <p:txBody>
+          <a:bodyPr/>
+          <a:lstStyle/>
+          <a:p>
+            <a:endParaRPr lang="fr-FR"/>
+          </a:p>
+        </p:txBody>
       </p:sp>
       <p:sp>
         <p:nvSpPr>
@@ -5654,7 +6227,7 @@
           <a:bodyPr wrap="square" lIns="381" tIns="381" rIns="381" bIns="381" rtlCol="0" anchor="ctr"/>
           <a:lstStyle/>
           <a:p>
-            <a:pPr algn="ctr" indent="0" marL="0">
+            <a:pPr marL="0" indent="0" algn="ctr">
               <a:buNone/>
             </a:pPr>
             <a:r>
@@ -5671,7 +6244,7 @@
             <a:endParaRPr lang="en-US" sz="1000" dirty="0"/>
           </a:p>
           <a:p>
-            <a:pPr algn="ctr" indent="0" marL="0">
+            <a:pPr marL="0" indent="0" algn="ctr">
               <a:buNone/>
             </a:pPr>
             <a:r>
@@ -5688,7 +6261,7 @@
             <a:endParaRPr lang="en-US" sz="1000" dirty="0"/>
           </a:p>
           <a:p>
-            <a:pPr algn="ctr" indent="0" marL="0">
+            <a:pPr marL="0" indent="0" algn="ctr">
               <a:buNone/>
             </a:pPr>
             <a:r>
@@ -5727,6 +6300,13 @@
           </a:solidFill>
           <a:ln/>
         </p:spPr>
+        <p:txBody>
+          <a:bodyPr/>
+          <a:lstStyle/>
+          <a:p>
+            <a:endParaRPr lang="fr-FR"/>
+          </a:p>
+        </p:txBody>
       </p:sp>
       <p:sp>
         <p:nvSpPr>
@@ -5749,7 +6329,7 @@
           <a:bodyPr wrap="square" lIns="635" tIns="635" rIns="635" bIns="635" rtlCol="0" anchor="ctr"/>
           <a:lstStyle/>
           <a:p>
-            <a:pPr algn="ctr" indent="0" marL="0">
+            <a:pPr marL="0" indent="0" algn="ctr">
               <a:buNone/>
             </a:pPr>
             <a:r>
@@ -5766,7 +6346,7 @@
             <a:endParaRPr lang="en-US" sz="1050" dirty="0"/>
           </a:p>
           <a:p>
-            <a:pPr algn="ctr" indent="0" marL="0">
+            <a:pPr marL="0" indent="0" algn="ctr">
               <a:buNone/>
             </a:pPr>
             <a:r>
@@ -5803,6 +6383,13 @@
           </a:solidFill>
           <a:ln/>
         </p:spPr>
+        <p:txBody>
+          <a:bodyPr/>
+          <a:lstStyle/>
+          <a:p>
+            <a:endParaRPr lang="fr-FR"/>
+          </a:p>
+        </p:txBody>
       </p:sp>
       <p:sp>
         <p:nvSpPr>
@@ -5825,7 +6412,7 @@
           <a:bodyPr wrap="square" lIns="0" tIns="0" rIns="0" bIns="0" rtlCol="0" anchor="ctr"/>
           <a:lstStyle/>
           <a:p>
-            <a:pPr algn="ctr" indent="0" marL="0">
+            <a:pPr marL="0" indent="0" algn="ctr">
               <a:buNone/>
             </a:pPr>
             <a:r>
@@ -5865,6 +6452,13 @@
             <a:prstDash val="dash"/>
           </a:ln>
         </p:spPr>
+        <p:txBody>
+          <a:bodyPr/>
+          <a:lstStyle/>
+          <a:p>
+            <a:endParaRPr lang="fr-FR"/>
+          </a:p>
+        </p:txBody>
       </p:sp>
       <p:sp>
         <p:nvSpPr>
@@ -5888,6 +6482,13 @@
             <a:prstDash val="dash"/>
           </a:ln>
         </p:spPr>
+        <p:txBody>
+          <a:bodyPr/>
+          <a:lstStyle/>
+          <a:p>
+            <a:endParaRPr lang="fr-FR"/>
+          </a:p>
+        </p:txBody>
       </p:sp>
       <p:sp>
         <p:nvSpPr>
@@ -5911,6 +6512,13 @@
             <a:prstDash val="dash"/>
           </a:ln>
         </p:spPr>
+        <p:txBody>
+          <a:bodyPr/>
+          <a:lstStyle/>
+          <a:p>
+            <a:endParaRPr lang="fr-FR"/>
+          </a:p>
+        </p:txBody>
       </p:sp>
       <p:sp>
         <p:nvSpPr>
@@ -5933,7 +6541,7 @@
           <a:bodyPr wrap="square" lIns="0" tIns="0" rIns="0" bIns="0" rtlCol="0" anchor="ctr"/>
           <a:lstStyle/>
           <a:p>
-            <a:pPr algn="ctr" indent="0" marL="0">
+            <a:pPr marL="0" indent="0" algn="ctr">
               <a:buNone/>
             </a:pPr>
             <a:r>
@@ -5972,7 +6580,7 @@
           <a:bodyPr wrap="square" lIns="0" tIns="0" rIns="0" bIns="0" rtlCol="0" anchor="ctr"/>
           <a:lstStyle/>
           <a:p>
-            <a:pPr algn="ctr" indent="0" marL="0">
+            <a:pPr marL="0" indent="0" algn="ctr">
               <a:buNone/>
             </a:pPr>
             <a:r>
@@ -6011,7 +6619,7 @@
           <a:bodyPr wrap="square" lIns="0" tIns="0" rIns="0" bIns="0" rtlCol="0" anchor="ctr"/>
           <a:lstStyle/>
           <a:p>
-            <a:pPr algn="ctr" indent="0" marL="0">
+            <a:pPr marL="0" indent="0" algn="ctr">
               <a:buNone/>
             </a:pPr>
             <a:r>
@@ -6045,6 +6653,7 @@
         <a:solidFill>
           <a:srgbClr val="FFFFFF"/>
         </a:solidFill>
+        <a:effectLst/>
       </p:bgPr>
     </p:bg>
     <p:spTree>
@@ -6082,7 +6691,7 @@
           <a:bodyPr wrap="square" lIns="0" tIns="0" rIns="0" bIns="0" rtlCol="0" anchor="ctr"/>
           <a:lstStyle/>
           <a:p>
-            <a:pPr indent="0" marL="0">
+            <a:pPr marL="0" indent="0">
               <a:buNone/>
             </a:pPr>
             <a:r>
@@ -6109,22 +6718,34 @@
           <p:nvPr>
             <p:extLst>
               <p:ext uri="{D42A27DB-BD31-4B8C-83A1-F6EECF244321}">
-                <p14:modId xmlns:p14="http://schemas.microsoft.com/office/powerpoint/2010/main" val="1579011935"/>
+                <p14:modId xmlns:p14="http://schemas.microsoft.com/office/powerpoint/2010/main" val="3154850004"/>
               </p:ext>
             </p:extLst>
           </p:nvPr>
         </p:nvGraphicFramePr>
         <p:xfrm>
           <a:off x="548640" y="1097280"/>
-          <a:ext cx="11064240" cy="914400"/>
+          <a:ext cx="11064240" cy="5029200"/>
         </p:xfrm>
         <a:graphic>
           <a:graphicData uri="http://schemas.openxmlformats.org/drawingml/2006/table">
             <a:tbl>
               <a:tblPr/>
               <a:tblGrid>
-                <a:gridCol w="4572000"/>
-                <a:gridCol w="6492240"/>
+                <a:gridCol w="4572000">
+                  <a:extLst>
+                    <a:ext uri="{9D8B030D-6E8A-4147-A177-3AD203B41FA5}">
+                      <a16:colId xmlns:a16="http://schemas.microsoft.com/office/drawing/2014/main" val="20000"/>
+                    </a:ext>
+                  </a:extLst>
+                </a:gridCol>
+                <a:gridCol w="6492240">
+                  <a:extLst>
+                    <a:ext uri="{9D8B030D-6E8A-4147-A177-3AD203B41FA5}">
+                      <a16:colId xmlns:a16="http://schemas.microsoft.com/office/drawing/2014/main" val="20001"/>
+                    </a:ext>
+                  </a:extLst>
+                </a:gridCol>
               </a:tblGrid>
               <a:tr h="457200">
                 <a:tc>
@@ -6132,7 +6753,7 @@
                     <a:bodyPr/>
                     <a:lstStyle/>
                     <a:p>
-                      <a:pPr indent="0" marL="0">
+                      <a:pPr marL="0" indent="0">
                         <a:buNone/>
                       </a:pPr>
                       <a:r>
@@ -6153,7 +6774,7 @@
                       </a:endParaRPr>
                     </a:p>
                   </a:txBody>
-                  <a:tcPr marL="91440" marR="91440" marT="45720" marB="45720">
+                  <a:tcPr>
                     <a:lnL w="6350" cap="flat" cmpd="sng" algn="ctr">
                       <a:solidFill>
                         <a:srgbClr val="E2E8F0"/>
@@ -6200,7 +6821,7 @@
                     <a:bodyPr/>
                     <a:lstStyle/>
                     <a:p>
-                      <a:pPr indent="0" marL="0">
+                      <a:pPr marL="0" indent="0">
                         <a:buNone/>
                       </a:pPr>
                       <a:r>
@@ -6221,7 +6842,7 @@
                       </a:endParaRPr>
                     </a:p>
                   </a:txBody>
-                  <a:tcPr marL="91440" marR="91440" marT="45720" marB="45720">
+                  <a:tcPr>
                     <a:lnL w="6350" cap="flat" cmpd="sng" algn="ctr">
                       <a:solidFill>
                         <a:srgbClr val="E2E8F0"/>
@@ -6263,6 +6884,11 @@
                     </a:solidFill>
                   </a:tcPr>
                 </a:tc>
+                <a:extLst>
+                  <a:ext uri="{0D108BD9-81ED-4DB2-BD59-A6C34878D82A}">
+                    <a16:rowId xmlns:a16="http://schemas.microsoft.com/office/drawing/2014/main" val="10000"/>
+                  </a:ext>
+                </a:extLst>
               </a:tr>
               <a:tr h="457200">
                 <a:tc>
@@ -6270,7 +6896,7 @@
                     <a:bodyPr/>
                     <a:lstStyle/>
                     <a:p>
-                      <a:pPr indent="0" marL="0">
+                      <a:pPr marL="0" indent="0">
                         <a:buNone/>
                       </a:pPr>
                       <a:r>
@@ -6291,7 +6917,7 @@
                       </a:endParaRPr>
                     </a:p>
                   </a:txBody>
-                  <a:tcPr marL="91440" marR="91440" marT="45720" marB="45720">
+                  <a:tcPr>
                     <a:lnL w="6350" cap="flat" cmpd="sng" algn="ctr">
                       <a:solidFill>
                         <a:srgbClr val="E2E8F0"/>
@@ -6338,7 +6964,7 @@
                     <a:bodyPr/>
                     <a:lstStyle/>
                     <a:p>
-                      <a:pPr indent="0" marL="0">
+                      <a:pPr marL="0" indent="0">
                         <a:buNone/>
                       </a:pPr>
                       <a:r>
@@ -6350,7 +6976,7 @@
                           <a:ea typeface="Calibri" pitchFamily="34" charset="-122"/>
                           <a:cs typeface="Calibri" pitchFamily="34" charset="-120"/>
                         </a:rPr>
-                        <a:t>GitHub Codespaces</a:t>
+                        <a:t>Docker compose</a:t>
                       </a:r>
                       <a:endParaRPr lang="en-US" sz="1250" dirty="0">
                         <a:latin typeface="Calibri" charset="0"/>
@@ -6359,7 +6985,7 @@
                       </a:endParaRPr>
                     </a:p>
                   </a:txBody>
-                  <a:tcPr marL="91440" marR="91440" marT="45720" marB="45720">
+                  <a:tcPr>
                     <a:lnL w="6350" cap="flat" cmpd="sng" algn="ctr">
                       <a:solidFill>
                         <a:srgbClr val="E2E8F0"/>
@@ -6401,6 +7027,11 @@
                     </a:solidFill>
                   </a:tcPr>
                 </a:tc>
+                <a:extLst>
+                  <a:ext uri="{0D108BD9-81ED-4DB2-BD59-A6C34878D82A}">
+                    <a16:rowId xmlns:a16="http://schemas.microsoft.com/office/drawing/2014/main" val="10001"/>
+                  </a:ext>
+                </a:extLst>
               </a:tr>
               <a:tr h="457200">
                 <a:tc>
@@ -6408,7 +7039,7 @@
                     <a:bodyPr/>
                     <a:lstStyle/>
                     <a:p>
-                      <a:pPr indent="0" marL="0">
+                      <a:pPr marL="0" indent="0">
                         <a:buNone/>
                       </a:pPr>
                       <a:r>
@@ -6429,7 +7060,7 @@
                       </a:endParaRPr>
                     </a:p>
                   </a:txBody>
-                  <a:tcPr marL="91440" marR="91440" marT="45720" marB="45720">
+                  <a:tcPr>
                     <a:lnL w="6350" cap="flat" cmpd="sng" algn="ctr">
                       <a:solidFill>
                         <a:srgbClr val="E2E8F0"/>
@@ -6476,7 +7107,7 @@
                     <a:bodyPr/>
                     <a:lstStyle/>
                     <a:p>
-                      <a:pPr indent="0" marL="0">
+                      <a:pPr marL="0" indent="0">
                         <a:buNone/>
                       </a:pPr>
                       <a:r>
@@ -6497,7 +7128,7 @@
                       </a:endParaRPr>
                     </a:p>
                   </a:txBody>
-                  <a:tcPr marL="91440" marR="91440" marT="45720" marB="45720">
+                  <a:tcPr>
                     <a:lnL w="6350" cap="flat" cmpd="sng" algn="ctr">
                       <a:solidFill>
                         <a:srgbClr val="E2E8F0"/>
@@ -6539,6 +7170,11 @@
                     </a:solidFill>
                   </a:tcPr>
                 </a:tc>
+                <a:extLst>
+                  <a:ext uri="{0D108BD9-81ED-4DB2-BD59-A6C34878D82A}">
+                    <a16:rowId xmlns:a16="http://schemas.microsoft.com/office/drawing/2014/main" val="10002"/>
+                  </a:ext>
+                </a:extLst>
               </a:tr>
               <a:tr h="457200">
                 <a:tc>
@@ -6546,7 +7182,7 @@
                     <a:bodyPr/>
                     <a:lstStyle/>
                     <a:p>
-                      <a:pPr indent="0" marL="0">
+                      <a:pPr marL="0" indent="0">
                         <a:buNone/>
                       </a:pPr>
                       <a:r>
@@ -6567,7 +7203,7 @@
                       </a:endParaRPr>
                     </a:p>
                   </a:txBody>
-                  <a:tcPr marL="91440" marR="91440" marT="45720" marB="45720">
+                  <a:tcPr>
                     <a:lnL w="6350" cap="flat" cmpd="sng" algn="ctr">
                       <a:solidFill>
                         <a:srgbClr val="E2E8F0"/>
@@ -6614,7 +7250,7 @@
                     <a:bodyPr/>
                     <a:lstStyle/>
                     <a:p>
-                      <a:pPr indent="0" marL="0">
+                      <a:pPr marL="0" indent="0">
                         <a:buNone/>
                       </a:pPr>
                       <a:r>
@@ -6635,7 +7271,7 @@
                       </a:endParaRPr>
                     </a:p>
                   </a:txBody>
-                  <a:tcPr marL="91440" marR="91440" marT="45720" marB="45720">
+                  <a:tcPr>
                     <a:lnL w="6350" cap="flat" cmpd="sng" algn="ctr">
                       <a:solidFill>
                         <a:srgbClr val="E2E8F0"/>
@@ -6677,6 +7313,11 @@
                     </a:solidFill>
                   </a:tcPr>
                 </a:tc>
+                <a:extLst>
+                  <a:ext uri="{0D108BD9-81ED-4DB2-BD59-A6C34878D82A}">
+                    <a16:rowId xmlns:a16="http://schemas.microsoft.com/office/drawing/2014/main" val="10003"/>
+                  </a:ext>
+                </a:extLst>
               </a:tr>
               <a:tr h="457200">
                 <a:tc>
@@ -6684,7 +7325,7 @@
                     <a:bodyPr/>
                     <a:lstStyle/>
                     <a:p>
-                      <a:pPr indent="0" marL="0">
+                      <a:pPr marL="0" indent="0">
                         <a:buNone/>
                       </a:pPr>
                       <a:r>
@@ -6705,7 +7346,7 @@
                       </a:endParaRPr>
                     </a:p>
                   </a:txBody>
-                  <a:tcPr marL="91440" marR="91440" marT="45720" marB="45720">
+                  <a:tcPr>
                     <a:lnL w="6350" cap="flat" cmpd="sng" algn="ctr">
                       <a:solidFill>
                         <a:srgbClr val="E2E8F0"/>
@@ -6752,7 +7393,7 @@
                     <a:bodyPr/>
                     <a:lstStyle/>
                     <a:p>
-                      <a:pPr indent="0" marL="0">
+                      <a:pPr marL="0" indent="0">
                         <a:buNone/>
                       </a:pPr>
                       <a:r>
@@ -6773,7 +7414,7 @@
                       </a:endParaRPr>
                     </a:p>
                   </a:txBody>
-                  <a:tcPr marL="91440" marR="91440" marT="45720" marB="45720">
+                  <a:tcPr>
                     <a:lnL w="6350" cap="flat" cmpd="sng" algn="ctr">
                       <a:solidFill>
                         <a:srgbClr val="E2E8F0"/>
@@ -6815,6 +7456,11 @@
                     </a:solidFill>
                   </a:tcPr>
                 </a:tc>
+                <a:extLst>
+                  <a:ext uri="{0D108BD9-81ED-4DB2-BD59-A6C34878D82A}">
+                    <a16:rowId xmlns:a16="http://schemas.microsoft.com/office/drawing/2014/main" val="10004"/>
+                  </a:ext>
+                </a:extLst>
               </a:tr>
               <a:tr h="457200">
                 <a:tc>
@@ -6822,7 +7468,7 @@
                     <a:bodyPr/>
                     <a:lstStyle/>
                     <a:p>
-                      <a:pPr indent="0" marL="0">
+                      <a:pPr marL="0" indent="0">
                         <a:buNone/>
                       </a:pPr>
                       <a:r>
@@ -6843,7 +7489,7 @@
                       </a:endParaRPr>
                     </a:p>
                   </a:txBody>
-                  <a:tcPr marL="91440" marR="91440" marT="45720" marB="45720">
+                  <a:tcPr>
                     <a:lnL w="6350" cap="flat" cmpd="sng" algn="ctr">
                       <a:solidFill>
                         <a:srgbClr val="E2E8F0"/>
@@ -6890,7 +7536,7 @@
                     <a:bodyPr/>
                     <a:lstStyle/>
                     <a:p>
-                      <a:pPr indent="0" marL="0">
+                      <a:pPr marL="0" indent="0">
                         <a:buNone/>
                       </a:pPr>
                       <a:r>
@@ -6911,7 +7557,7 @@
                       </a:endParaRPr>
                     </a:p>
                   </a:txBody>
-                  <a:tcPr marL="91440" marR="91440" marT="45720" marB="45720">
+                  <a:tcPr>
                     <a:lnL w="6350" cap="flat" cmpd="sng" algn="ctr">
                       <a:solidFill>
                         <a:srgbClr val="E2E8F0"/>
@@ -6953,6 +7599,11 @@
                     </a:solidFill>
                   </a:tcPr>
                 </a:tc>
+                <a:extLst>
+                  <a:ext uri="{0D108BD9-81ED-4DB2-BD59-A6C34878D82A}">
+                    <a16:rowId xmlns:a16="http://schemas.microsoft.com/office/drawing/2014/main" val="10005"/>
+                  </a:ext>
+                </a:extLst>
               </a:tr>
               <a:tr h="457200">
                 <a:tc>
@@ -6960,7 +7611,7 @@
                     <a:bodyPr/>
                     <a:lstStyle/>
                     <a:p>
-                      <a:pPr indent="0" marL="0">
+                      <a:pPr marL="0" indent="0">
                         <a:buNone/>
                       </a:pPr>
                       <a:r>
@@ -6981,7 +7632,7 @@
                       </a:endParaRPr>
                     </a:p>
                   </a:txBody>
-                  <a:tcPr marL="91440" marR="91440" marT="45720" marB="45720">
+                  <a:tcPr>
                     <a:lnL w="6350" cap="flat" cmpd="sng" algn="ctr">
                       <a:solidFill>
                         <a:srgbClr val="E2E8F0"/>
@@ -7028,7 +7679,7 @@
                     <a:bodyPr/>
                     <a:lstStyle/>
                     <a:p>
-                      <a:pPr indent="0" marL="0">
+                      <a:pPr marL="0" indent="0">
                         <a:buNone/>
                       </a:pPr>
                       <a:r>
@@ -7049,7 +7700,7 @@
                       </a:endParaRPr>
                     </a:p>
                   </a:txBody>
-                  <a:tcPr marL="91440" marR="91440" marT="45720" marB="45720">
+                  <a:tcPr>
                     <a:lnL w="6350" cap="flat" cmpd="sng" algn="ctr">
                       <a:solidFill>
                         <a:srgbClr val="E2E8F0"/>
@@ -7091,6 +7742,11 @@
                     </a:solidFill>
                   </a:tcPr>
                 </a:tc>
+                <a:extLst>
+                  <a:ext uri="{0D108BD9-81ED-4DB2-BD59-A6C34878D82A}">
+                    <a16:rowId xmlns:a16="http://schemas.microsoft.com/office/drawing/2014/main" val="10006"/>
+                  </a:ext>
+                </a:extLst>
               </a:tr>
               <a:tr h="457200">
                 <a:tc>
@@ -7098,7 +7754,7 @@
                     <a:bodyPr/>
                     <a:lstStyle/>
                     <a:p>
-                      <a:pPr indent="0" marL="0">
+                      <a:pPr marL="0" indent="0">
                         <a:buNone/>
                       </a:pPr>
                       <a:r>
@@ -7119,7 +7775,7 @@
                       </a:endParaRPr>
                     </a:p>
                   </a:txBody>
-                  <a:tcPr marL="91440" marR="91440" marT="45720" marB="45720">
+                  <a:tcPr>
                     <a:lnL w="6350" cap="flat" cmpd="sng" algn="ctr">
                       <a:solidFill>
                         <a:srgbClr val="E2E8F0"/>
@@ -7166,7 +7822,7 @@
                     <a:bodyPr/>
                     <a:lstStyle/>
                     <a:p>
-                      <a:pPr indent="0" marL="0">
+                      <a:pPr marL="0" indent="0">
                         <a:buNone/>
                       </a:pPr>
                       <a:r>
@@ -7187,7 +7843,7 @@
                       </a:endParaRPr>
                     </a:p>
                   </a:txBody>
-                  <a:tcPr marL="91440" marR="91440" marT="45720" marB="45720">
+                  <a:tcPr>
                     <a:lnL w="6350" cap="flat" cmpd="sng" algn="ctr">
                       <a:solidFill>
                         <a:srgbClr val="E2E8F0"/>
@@ -7229,6 +7885,11 @@
                     </a:solidFill>
                   </a:tcPr>
                 </a:tc>
+                <a:extLst>
+                  <a:ext uri="{0D108BD9-81ED-4DB2-BD59-A6C34878D82A}">
+                    <a16:rowId xmlns:a16="http://schemas.microsoft.com/office/drawing/2014/main" val="10007"/>
+                  </a:ext>
+                </a:extLst>
               </a:tr>
               <a:tr h="457200">
                 <a:tc>
@@ -7236,7 +7897,7 @@
                     <a:bodyPr/>
                     <a:lstStyle/>
                     <a:p>
-                      <a:pPr indent="0" marL="0">
+                      <a:pPr marL="0" indent="0">
                         <a:buNone/>
                       </a:pPr>
                       <a:r>
@@ -7257,7 +7918,7 @@
                       </a:endParaRPr>
                     </a:p>
                   </a:txBody>
-                  <a:tcPr marL="91440" marR="91440" marT="45720" marB="45720">
+                  <a:tcPr>
                     <a:lnL w="6350" cap="flat" cmpd="sng" algn="ctr">
                       <a:solidFill>
                         <a:srgbClr val="E2E8F0"/>
@@ -7304,7 +7965,7 @@
                     <a:bodyPr/>
                     <a:lstStyle/>
                     <a:p>
-                      <a:pPr indent="0" marL="0">
+                      <a:pPr marL="0" indent="0">
                         <a:buNone/>
                       </a:pPr>
                       <a:r>
@@ -7325,7 +7986,7 @@
                       </a:endParaRPr>
                     </a:p>
                   </a:txBody>
-                  <a:tcPr marL="91440" marR="91440" marT="45720" marB="45720">
+                  <a:tcPr>
                     <a:lnL w="6350" cap="flat" cmpd="sng" algn="ctr">
                       <a:solidFill>
                         <a:srgbClr val="E2E8F0"/>
@@ -7367,6 +8028,11 @@
                     </a:solidFill>
                   </a:tcPr>
                 </a:tc>
+                <a:extLst>
+                  <a:ext uri="{0D108BD9-81ED-4DB2-BD59-A6C34878D82A}">
+                    <a16:rowId xmlns:a16="http://schemas.microsoft.com/office/drawing/2014/main" val="10008"/>
+                  </a:ext>
+                </a:extLst>
               </a:tr>
               <a:tr h="457200">
                 <a:tc>
@@ -7374,7 +8040,7 @@
                     <a:bodyPr/>
                     <a:lstStyle/>
                     <a:p>
-                      <a:pPr indent="0" marL="0">
+                      <a:pPr marL="0" indent="0">
                         <a:buNone/>
                       </a:pPr>
                       <a:r>
@@ -7395,7 +8061,7 @@
                       </a:endParaRPr>
                     </a:p>
                   </a:txBody>
-                  <a:tcPr marL="91440" marR="91440" marT="45720" marB="45720">
+                  <a:tcPr>
                     <a:lnL w="6350" cap="flat" cmpd="sng" algn="ctr">
                       <a:solidFill>
                         <a:srgbClr val="E2E8F0"/>
@@ -7442,7 +8108,7 @@
                     <a:bodyPr/>
                     <a:lstStyle/>
                     <a:p>
-                      <a:pPr indent="0" marL="0">
+                      <a:pPr marL="0" indent="0">
                         <a:buNone/>
                       </a:pPr>
                       <a:r>
@@ -7463,7 +8129,7 @@
                       </a:endParaRPr>
                     </a:p>
                   </a:txBody>
-                  <a:tcPr marL="91440" marR="91440" marT="45720" marB="45720">
+                  <a:tcPr>
                     <a:lnL w="6350" cap="flat" cmpd="sng" algn="ctr">
                       <a:solidFill>
                         <a:srgbClr val="E2E8F0"/>
@@ -7505,6 +8171,11 @@
                     </a:solidFill>
                   </a:tcPr>
                 </a:tc>
+                <a:extLst>
+                  <a:ext uri="{0D108BD9-81ED-4DB2-BD59-A6C34878D82A}">
+                    <a16:rowId xmlns:a16="http://schemas.microsoft.com/office/drawing/2014/main" val="10009"/>
+                  </a:ext>
+                </a:extLst>
               </a:tr>
               <a:tr h="457200">
                 <a:tc>
@@ -7512,7 +8183,7 @@
                     <a:bodyPr/>
                     <a:lstStyle/>
                     <a:p>
-                      <a:pPr indent="0" marL="0">
+                      <a:pPr marL="0" indent="0">
                         <a:buNone/>
                       </a:pPr>
                       <a:r>
@@ -7533,7 +8204,7 @@
                       </a:endParaRPr>
                     </a:p>
                   </a:txBody>
-                  <a:tcPr marL="91440" marR="91440" marT="45720" marB="45720">
+                  <a:tcPr>
                     <a:lnL w="6350" cap="flat" cmpd="sng" algn="ctr">
                       <a:solidFill>
                         <a:srgbClr val="E2E8F0"/>
@@ -7580,7 +8251,7 @@
                     <a:bodyPr/>
                     <a:lstStyle/>
                     <a:p>
-                      <a:pPr indent="0" marL="0">
+                      <a:pPr marL="0" indent="0">
                         <a:buNone/>
                       </a:pPr>
                       <a:r>
@@ -7601,7 +8272,7 @@
                       </a:endParaRPr>
                     </a:p>
                   </a:txBody>
-                  <a:tcPr marL="91440" marR="91440" marT="45720" marB="45720">
+                  <a:tcPr>
                     <a:lnL w="6350" cap="flat" cmpd="sng" algn="ctr">
                       <a:solidFill>
                         <a:srgbClr val="E2E8F0"/>
@@ -7643,6 +8314,11 @@
                     </a:solidFill>
                   </a:tcPr>
                 </a:tc>
+                <a:extLst>
+                  <a:ext uri="{0D108BD9-81ED-4DB2-BD59-A6C34878D82A}">
+                    <a16:rowId xmlns:a16="http://schemas.microsoft.com/office/drawing/2014/main" val="10010"/>
+                  </a:ext>
+                </a:extLst>
               </a:tr>
             </a:tbl>
           </a:graphicData>
@@ -7664,6 +8340,7 @@
         <a:solidFill>
           <a:srgbClr val="F7F9FA"/>
         </a:solidFill>
+        <a:effectLst/>
       </p:bgPr>
     </p:bg>
     <p:spTree>
@@ -7701,7 +8378,7 @@
           <a:bodyPr wrap="square" lIns="0" tIns="0" rIns="0" bIns="0" rtlCol="0" anchor="ctr"/>
           <a:lstStyle/>
           <a:p>
-            <a:pPr indent="0" marL="0">
+            <a:pPr marL="0" indent="0">
               <a:buNone/>
             </a:pPr>
             <a:r>
@@ -7745,13 +8422,20 @@
             <a:prstDash val="solid"/>
           </a:ln>
           <a:effectLst>
-            <a:outerShdw sx="100000" sy="100000" kx="0" ky="0" algn="bl" rotWithShape="0" blurRad="101600" dist="38100" dir="5400000">
+            <a:outerShdw blurRad="101600" dist="38100" dir="5400000" algn="bl" rotWithShape="0">
               <a:srgbClr val="000000">
                 <a:alpha val="12000"/>
               </a:srgbClr>
             </a:outerShdw>
           </a:effectLst>
         </p:spPr>
+        <p:txBody>
+          <a:bodyPr/>
+          <a:lstStyle/>
+          <a:p>
+            <a:endParaRPr lang="fr-FR"/>
+          </a:p>
+        </p:txBody>
       </p:sp>
       <p:sp>
         <p:nvSpPr>
@@ -7774,7 +8458,7 @@
           <a:bodyPr wrap="square" lIns="0" tIns="0" rIns="0" bIns="0" rtlCol="0" anchor="ctr"/>
           <a:lstStyle/>
           <a:p>
-            <a:pPr algn="ctr" indent="0" marL="0">
+            <a:pPr marL="0" indent="0" algn="ctr">
               <a:buNone/>
             </a:pPr>
             <a:r>
@@ -7813,7 +8497,7 @@
           <a:bodyPr wrap="square" lIns="0" tIns="0" rIns="0" bIns="0" rtlCol="0" anchor="ctr"/>
           <a:lstStyle/>
           <a:p>
-            <a:pPr algn="ctr" indent="0" marL="0">
+            <a:pPr marL="0" indent="0" algn="ctr">
               <a:buNone/>
             </a:pPr>
             <a:r>
@@ -7852,7 +8536,7 @@
           <a:bodyPr wrap="square" lIns="0" tIns="0" rIns="0" bIns="0" rtlCol="0" anchor="ctr"/>
           <a:lstStyle/>
           <a:p>
-            <a:pPr algn="ctr" indent="0" marL="0">
+            <a:pPr marL="0" indent="0" algn="ctr">
               <a:buNone/>
             </a:pPr>
             <a:r>
@@ -7896,13 +8580,20 @@
             <a:prstDash val="solid"/>
           </a:ln>
           <a:effectLst>
-            <a:outerShdw sx="100000" sy="100000" kx="0" ky="0" algn="bl" rotWithShape="0" blurRad="101600" dist="38100" dir="5400000">
+            <a:outerShdw blurRad="101600" dist="38100" dir="5400000" algn="bl" rotWithShape="0">
               <a:srgbClr val="000000">
                 <a:alpha val="12000"/>
               </a:srgbClr>
             </a:outerShdw>
           </a:effectLst>
         </p:spPr>
+        <p:txBody>
+          <a:bodyPr/>
+          <a:lstStyle/>
+          <a:p>
+            <a:endParaRPr lang="fr-FR"/>
+          </a:p>
+        </p:txBody>
       </p:sp>
       <p:sp>
         <p:nvSpPr>
@@ -7925,7 +8616,7 @@
           <a:bodyPr wrap="square" lIns="0" tIns="0" rIns="0" bIns="0" rtlCol="0" anchor="ctr"/>
           <a:lstStyle/>
           <a:p>
-            <a:pPr algn="ctr" indent="0" marL="0">
+            <a:pPr marL="0" indent="0" algn="ctr">
               <a:buNone/>
             </a:pPr>
             <a:r>
@@ -7964,7 +8655,7 @@
           <a:bodyPr wrap="square" lIns="0" tIns="0" rIns="0" bIns="0" rtlCol="0" anchor="ctr"/>
           <a:lstStyle/>
           <a:p>
-            <a:pPr algn="ctr" indent="0" marL="0">
+            <a:pPr marL="0" indent="0" algn="ctr">
               <a:buNone/>
             </a:pPr>
             <a:r>
@@ -8003,7 +8694,7 @@
           <a:bodyPr wrap="square" lIns="0" tIns="0" rIns="0" bIns="0" rtlCol="0" anchor="ctr"/>
           <a:lstStyle/>
           <a:p>
-            <a:pPr algn="ctr" indent="0" marL="0">
+            <a:pPr marL="0" indent="0" algn="ctr">
               <a:buNone/>
             </a:pPr>
             <a:r>
@@ -8047,13 +8738,20 @@
             <a:prstDash val="solid"/>
           </a:ln>
           <a:effectLst>
-            <a:outerShdw sx="100000" sy="100000" kx="0" ky="0" algn="bl" rotWithShape="0" blurRad="101600" dist="38100" dir="5400000">
+            <a:outerShdw blurRad="101600" dist="38100" dir="5400000" algn="bl" rotWithShape="0">
               <a:srgbClr val="000000">
                 <a:alpha val="12000"/>
               </a:srgbClr>
             </a:outerShdw>
           </a:effectLst>
         </p:spPr>
+        <p:txBody>
+          <a:bodyPr/>
+          <a:lstStyle/>
+          <a:p>
+            <a:endParaRPr lang="fr-FR"/>
+          </a:p>
+        </p:txBody>
       </p:sp>
       <p:sp>
         <p:nvSpPr>
@@ -8076,7 +8774,7 @@
           <a:bodyPr wrap="square" lIns="0" tIns="0" rIns="0" bIns="0" rtlCol="0" anchor="ctr"/>
           <a:lstStyle/>
           <a:p>
-            <a:pPr algn="ctr" indent="0" marL="0">
+            <a:pPr marL="0" indent="0" algn="ctr">
               <a:buNone/>
             </a:pPr>
             <a:r>
@@ -8115,7 +8813,7 @@
           <a:bodyPr wrap="square" lIns="0" tIns="0" rIns="0" bIns="0" rtlCol="0" anchor="ctr"/>
           <a:lstStyle/>
           <a:p>
-            <a:pPr algn="ctr" indent="0" marL="0">
+            <a:pPr marL="0" indent="0" algn="ctr">
               <a:buNone/>
             </a:pPr>
             <a:r>
@@ -8154,7 +8852,7 @@
           <a:bodyPr wrap="square" lIns="0" tIns="0" rIns="0" bIns="0" rtlCol="0" anchor="ctr"/>
           <a:lstStyle/>
           <a:p>
-            <a:pPr algn="ctr" indent="0" marL="0">
+            <a:pPr marL="0" indent="0" algn="ctr">
               <a:buNone/>
             </a:pPr>
             <a:r>
@@ -8198,13 +8896,20 @@
             <a:prstDash val="solid"/>
           </a:ln>
           <a:effectLst>
-            <a:outerShdw sx="100000" sy="100000" kx="0" ky="0" algn="bl" rotWithShape="0" blurRad="101600" dist="38100" dir="5400000">
+            <a:outerShdw blurRad="101600" dist="38100" dir="5400000" algn="bl" rotWithShape="0">
               <a:srgbClr val="000000">
                 <a:alpha val="12000"/>
               </a:srgbClr>
             </a:outerShdw>
           </a:effectLst>
         </p:spPr>
+        <p:txBody>
+          <a:bodyPr/>
+          <a:lstStyle/>
+          <a:p>
+            <a:endParaRPr lang="fr-FR"/>
+          </a:p>
+        </p:txBody>
       </p:sp>
       <p:sp>
         <p:nvSpPr>
@@ -8227,7 +8932,7 @@
           <a:bodyPr wrap="square" lIns="0" tIns="0" rIns="0" bIns="0" rtlCol="0" anchor="ctr"/>
           <a:lstStyle/>
           <a:p>
-            <a:pPr indent="0" marL="0">
+            <a:pPr marL="0" indent="0">
               <a:buNone/>
             </a:pPr>
             <a:r>
@@ -8266,7 +8971,7 @@
           <a:bodyPr wrap="square" lIns="0" tIns="0" rIns="0" bIns="0" rtlCol="0" anchor="ctr"/>
           <a:lstStyle/>
           <a:p>
-            <a:pPr indent="0" marL="0">
+            <a:pPr marL="0" indent="0">
               <a:buNone/>
             </a:pPr>
             <a:r>
@@ -8305,7 +9010,7 @@
           <a:bodyPr wrap="square" lIns="0" tIns="0" rIns="0" bIns="0" rtlCol="0" anchor="ctr"/>
           <a:lstStyle/>
           <a:p>
-            <a:pPr indent="0" marL="0">
+            <a:pPr marL="0" indent="0">
               <a:buNone/>
             </a:pPr>
             <a:r>
@@ -8344,7 +9049,7 @@
           <a:bodyPr wrap="square" lIns="0" tIns="0" rIns="0" bIns="0" rtlCol="0" anchor="ctr"/>
           <a:lstStyle/>
           <a:p>
-            <a:pPr algn="ctr" indent="0" marL="0">
+            <a:pPr marL="0" indent="0" algn="ctr">
               <a:buNone/>
             </a:pPr>
             <a:r>
@@ -8378,6 +9083,7 @@
         <a:solidFill>
           <a:srgbClr val="FFFFFF"/>
         </a:solidFill>
+        <a:effectLst/>
       </p:bgPr>
     </p:bg>
     <p:spTree>
@@ -8415,7 +9121,7 @@
           <a:bodyPr wrap="square" lIns="0" tIns="0" rIns="0" bIns="0" rtlCol="0" anchor="ctr"/>
           <a:lstStyle/>
           <a:p>
-            <a:pPr indent="0" marL="0">
+            <a:pPr marL="0" indent="0">
               <a:buNone/>
             </a:pPr>
             <a:r>
@@ -8454,7 +9160,7 @@
           <a:bodyPr wrap="square" lIns="0" tIns="0" rIns="0" bIns="0" rtlCol="0" anchor="ctr"/>
           <a:lstStyle/>
           <a:p>
-            <a:pPr indent="0" marL="0">
+            <a:pPr marL="0" indent="0">
               <a:buNone/>
             </a:pPr>
             <a:r>
@@ -8498,13 +9204,20 @@
             <a:prstDash val="solid"/>
           </a:ln>
           <a:effectLst>
-            <a:outerShdw sx="100000" sy="100000" kx="0" ky="0" algn="bl" rotWithShape="0" blurRad="101600" dist="38100" dir="5400000">
+            <a:outerShdw blurRad="101600" dist="38100" dir="5400000" algn="bl" rotWithShape="0">
               <a:srgbClr val="000000">
                 <a:alpha val="12000"/>
               </a:srgbClr>
             </a:outerShdw>
           </a:effectLst>
         </p:spPr>
+        <p:txBody>
+          <a:bodyPr/>
+          <a:lstStyle/>
+          <a:p>
+            <a:endParaRPr lang="fr-FR"/>
+          </a:p>
+        </p:txBody>
       </p:sp>
       <p:sp>
         <p:nvSpPr>
@@ -8527,7 +9240,7 @@
           <a:bodyPr wrap="square" lIns="0" tIns="0" rIns="0" bIns="0" rtlCol="0" anchor="t"/>
           <a:lstStyle/>
           <a:p>
-            <a:pPr indent="0" marL="0">
+            <a:pPr marL="0" indent="0">
               <a:lnSpc>
                 <a:spcPct val="115000"/>
               </a:lnSpc>
@@ -8547,7 +9260,7 @@
             <a:endParaRPr lang="en-US" sz="1200" dirty="0"/>
           </a:p>
           <a:p>
-            <a:pPr indent="0" marL="0">
+            <a:pPr marL="0" indent="0">
               <a:lnSpc>
                 <a:spcPct val="115000"/>
               </a:lnSpc>
@@ -8567,7 +9280,7 @@
             <a:endParaRPr lang="en-US" sz="1200" dirty="0"/>
           </a:p>
           <a:p>
-            <a:pPr indent="0" marL="0">
+            <a:pPr marL="0" indent="0">
               <a:lnSpc>
                 <a:spcPct val="115000"/>
               </a:lnSpc>
@@ -8587,7 +9300,7 @@
             <a:endParaRPr lang="en-US" sz="1200" dirty="0"/>
           </a:p>
           <a:p>
-            <a:pPr indent="0" marL="0">
+            <a:pPr marL="0" indent="0">
               <a:lnSpc>
                 <a:spcPct val="115000"/>
               </a:lnSpc>
@@ -8607,7 +9320,7 @@
             <a:endParaRPr lang="en-US" sz="1200" dirty="0"/>
           </a:p>
           <a:p>
-            <a:pPr indent="0" marL="0">
+            <a:pPr marL="0" indent="0">
               <a:lnSpc>
                 <a:spcPct val="115000"/>
               </a:lnSpc>
@@ -8616,7 +9329,7 @@
             <a:endParaRPr lang="en-US" sz="1200" dirty="0"/>
           </a:p>
           <a:p>
-            <a:pPr indent="0" marL="0">
+            <a:pPr marL="0" indent="0">
               <a:lnSpc>
                 <a:spcPct val="115000"/>
               </a:lnSpc>
@@ -8636,7 +9349,7 @@
             <a:endParaRPr lang="en-US" sz="1200" dirty="0"/>
           </a:p>
           <a:p>
-            <a:pPr indent="0" marL="0">
+            <a:pPr marL="0" indent="0">
               <a:lnSpc>
                 <a:spcPct val="115000"/>
               </a:lnSpc>
@@ -8656,7 +9369,7 @@
             <a:endParaRPr lang="en-US" sz="1200" dirty="0"/>
           </a:p>
           <a:p>
-            <a:pPr indent="0" marL="0">
+            <a:pPr marL="0" indent="0">
               <a:lnSpc>
                 <a:spcPct val="115000"/>
               </a:lnSpc>
@@ -8665,7 +9378,7 @@
             <a:endParaRPr lang="en-US" sz="1200" dirty="0"/>
           </a:p>
           <a:p>
-            <a:pPr indent="0" marL="0">
+            <a:pPr marL="0" indent="0">
               <a:lnSpc>
                 <a:spcPct val="115000"/>
               </a:lnSpc>
@@ -8685,7 +9398,7 @@
             <a:endParaRPr lang="en-US" sz="1200" dirty="0"/>
           </a:p>
           <a:p>
-            <a:pPr indent="0" marL="0">
+            <a:pPr marL="0" indent="0">
               <a:lnSpc>
                 <a:spcPct val="115000"/>
               </a:lnSpc>
@@ -8705,7 +9418,7 @@
             <a:endParaRPr lang="en-US" sz="1200" dirty="0"/>
           </a:p>
           <a:p>
-            <a:pPr indent="0" marL="0">
+            <a:pPr marL="0" indent="0">
               <a:lnSpc>
                 <a:spcPct val="115000"/>
               </a:lnSpc>
@@ -8714,7 +9427,7 @@
             <a:endParaRPr lang="en-US" sz="1200" dirty="0"/>
           </a:p>
           <a:p>
-            <a:pPr indent="0" marL="0">
+            <a:pPr marL="0" indent="0">
               <a:lnSpc>
                 <a:spcPct val="115000"/>
               </a:lnSpc>
@@ -8761,13 +9474,20 @@
             <a:prstDash val="solid"/>
           </a:ln>
           <a:effectLst>
-            <a:outerShdw sx="100000" sy="100000" kx="0" ky="0" algn="bl" rotWithShape="0" blurRad="101600" dist="38100" dir="5400000">
+            <a:outerShdw blurRad="101600" dist="38100" dir="5400000" algn="bl" rotWithShape="0">
               <a:srgbClr val="000000">
                 <a:alpha val="12000"/>
               </a:srgbClr>
             </a:outerShdw>
           </a:effectLst>
         </p:spPr>
+        <p:txBody>
+          <a:bodyPr/>
+          <a:lstStyle/>
+          <a:p>
+            <a:endParaRPr lang="fr-FR"/>
+          </a:p>
+        </p:txBody>
       </p:sp>
       <p:sp>
         <p:nvSpPr>
@@ -8790,7 +9510,7 @@
           <a:bodyPr wrap="square" lIns="0" tIns="0" rIns="0" bIns="0" rtlCol="0" anchor="ctr"/>
           <a:lstStyle/>
           <a:p>
-            <a:pPr indent="0" marL="0">
+            <a:pPr marL="0" indent="0">
               <a:buNone/>
             </a:pPr>
             <a:r>
@@ -8829,7 +9549,7 @@
           <a:bodyPr wrap="square" lIns="0" tIns="0" rIns="0" bIns="0" rtlCol="0" anchor="t"/>
           <a:lstStyle/>
           <a:p>
-            <a:pPr indent="0" marL="0">
+            <a:pPr marL="0" indent="0">
               <a:buNone/>
             </a:pPr>
             <a:r>
@@ -8873,13 +9593,20 @@
             <a:prstDash val="solid"/>
           </a:ln>
           <a:effectLst>
-            <a:outerShdw sx="100000" sy="100000" kx="0" ky="0" algn="bl" rotWithShape="0" blurRad="101600" dist="38100" dir="5400000">
+            <a:outerShdw blurRad="101600" dist="38100" dir="5400000" algn="bl" rotWithShape="0">
               <a:srgbClr val="000000">
                 <a:alpha val="12000"/>
               </a:srgbClr>
             </a:outerShdw>
           </a:effectLst>
         </p:spPr>
+        <p:txBody>
+          <a:bodyPr/>
+          <a:lstStyle/>
+          <a:p>
+            <a:endParaRPr lang="fr-FR"/>
+          </a:p>
+        </p:txBody>
       </p:sp>
       <p:sp>
         <p:nvSpPr>
@@ -8902,7 +9629,7 @@
           <a:bodyPr wrap="square" lIns="0" tIns="0" rIns="0" bIns="0" rtlCol="0" anchor="ctr"/>
           <a:lstStyle/>
           <a:p>
-            <a:pPr indent="0" marL="0">
+            <a:pPr marL="0" indent="0">
               <a:buNone/>
             </a:pPr>
             <a:r>
@@ -8941,7 +9668,7 @@
           <a:bodyPr wrap="square" lIns="0" tIns="0" rIns="0" bIns="0" rtlCol="0" anchor="t"/>
           <a:lstStyle/>
           <a:p>
-            <a:pPr indent="0" marL="0">
+            <a:pPr marL="0" indent="0">
               <a:buNone/>
             </a:pPr>
             <a:r>
@@ -8975,6 +9702,7 @@
         <a:solidFill>
           <a:srgbClr val="F7F9FA"/>
         </a:solidFill>
+        <a:effectLst/>
       </p:bgPr>
     </p:bg>
     <p:spTree>
@@ -9012,7 +9740,7 @@
           <a:bodyPr wrap="square" lIns="0" tIns="0" rIns="0" bIns="0" rtlCol="0" anchor="ctr"/>
           <a:lstStyle/>
           <a:p>
-            <a:pPr indent="0" marL="0">
+            <a:pPr marL="0" indent="0">
               <a:buNone/>
             </a:pPr>
             <a:r>
@@ -9051,6 +9779,13 @@
           </a:solidFill>
           <a:ln/>
         </p:spPr>
+        <p:txBody>
+          <a:bodyPr/>
+          <a:lstStyle/>
+          <a:p>
+            <a:endParaRPr lang="fr-FR"/>
+          </a:p>
+        </p:txBody>
       </p:sp>
       <p:sp>
         <p:nvSpPr>
@@ -9073,7 +9808,7 @@
           <a:bodyPr wrap="square" lIns="0" tIns="0" rIns="0" bIns="0" rtlCol="0" anchor="ctr"/>
           <a:lstStyle/>
           <a:p>
-            <a:pPr algn="ctr" indent="0" marL="0">
+            <a:pPr marL="0" indent="0" algn="ctr">
               <a:buNone/>
             </a:pPr>
             <a:r>
@@ -9112,7 +9847,7 @@
           <a:bodyPr wrap="square" lIns="0" tIns="0" rIns="0" bIns="0" rtlCol="0" anchor="ctr"/>
           <a:lstStyle/>
           <a:p>
-            <a:pPr indent="0" marL="0">
+            <a:pPr marL="0" indent="0">
               <a:buNone/>
             </a:pPr>
             <a:r>
@@ -9151,7 +9886,7 @@
           <a:bodyPr wrap="square" lIns="0" tIns="0" rIns="0" bIns="0" rtlCol="0" anchor="ctr"/>
           <a:lstStyle/>
           <a:p>
-            <a:pPr indent="0" marL="0">
+            <a:pPr marL="0" indent="0">
               <a:buNone/>
             </a:pPr>
             <a:r>
@@ -9190,6 +9925,13 @@
           </a:solidFill>
           <a:ln/>
         </p:spPr>
+        <p:txBody>
+          <a:bodyPr/>
+          <a:lstStyle/>
+          <a:p>
+            <a:endParaRPr lang="fr-FR"/>
+          </a:p>
+        </p:txBody>
       </p:sp>
       <p:sp>
         <p:nvSpPr>
@@ -9212,7 +9954,7 @@
           <a:bodyPr wrap="square" lIns="0" tIns="0" rIns="0" bIns="0" rtlCol="0" anchor="ctr"/>
           <a:lstStyle/>
           <a:p>
-            <a:pPr algn="ctr" indent="0" marL="0">
+            <a:pPr marL="0" indent="0" algn="ctr">
               <a:buNone/>
             </a:pPr>
             <a:r>
@@ -9251,7 +9993,7 @@
           <a:bodyPr wrap="square" lIns="0" tIns="0" rIns="0" bIns="0" rtlCol="0" anchor="ctr"/>
           <a:lstStyle/>
           <a:p>
-            <a:pPr indent="0" marL="0">
+            <a:pPr marL="0" indent="0">
               <a:buNone/>
             </a:pPr>
             <a:r>
@@ -9290,7 +10032,7 @@
           <a:bodyPr wrap="square" lIns="0" tIns="0" rIns="0" bIns="0" rtlCol="0" anchor="ctr"/>
           <a:lstStyle/>
           <a:p>
-            <a:pPr indent="0" marL="0">
+            <a:pPr marL="0" indent="0">
               <a:buNone/>
             </a:pPr>
             <a:r>
@@ -9329,6 +10071,13 @@
           </a:solidFill>
           <a:ln/>
         </p:spPr>
+        <p:txBody>
+          <a:bodyPr/>
+          <a:lstStyle/>
+          <a:p>
+            <a:endParaRPr lang="fr-FR"/>
+          </a:p>
+        </p:txBody>
       </p:sp>
       <p:sp>
         <p:nvSpPr>
@@ -9351,7 +10100,7 @@
           <a:bodyPr wrap="square" lIns="0" tIns="0" rIns="0" bIns="0" rtlCol="0" anchor="ctr"/>
           <a:lstStyle/>
           <a:p>
-            <a:pPr algn="ctr" indent="0" marL="0">
+            <a:pPr marL="0" indent="0" algn="ctr">
               <a:buNone/>
             </a:pPr>
             <a:r>
@@ -9390,7 +10139,7 @@
           <a:bodyPr wrap="square" lIns="0" tIns="0" rIns="0" bIns="0" rtlCol="0" anchor="ctr"/>
           <a:lstStyle/>
           <a:p>
-            <a:pPr indent="0" marL="0">
+            <a:pPr marL="0" indent="0">
               <a:buNone/>
             </a:pPr>
             <a:r>
@@ -9429,7 +10178,7 @@
           <a:bodyPr wrap="square" lIns="0" tIns="0" rIns="0" bIns="0" rtlCol="0" anchor="ctr"/>
           <a:lstStyle/>
           <a:p>
-            <a:pPr indent="0" marL="0">
+            <a:pPr marL="0" indent="0">
               <a:buNone/>
             </a:pPr>
             <a:r>
@@ -9468,6 +10217,13 @@
           </a:solidFill>
           <a:ln/>
         </p:spPr>
+        <p:txBody>
+          <a:bodyPr/>
+          <a:lstStyle/>
+          <a:p>
+            <a:endParaRPr lang="fr-FR"/>
+          </a:p>
+        </p:txBody>
       </p:sp>
       <p:sp>
         <p:nvSpPr>
@@ -9490,7 +10246,7 @@
           <a:bodyPr wrap="square" lIns="0" tIns="0" rIns="0" bIns="0" rtlCol="0" anchor="ctr"/>
           <a:lstStyle/>
           <a:p>
-            <a:pPr algn="ctr" indent="0" marL="0">
+            <a:pPr marL="0" indent="0" algn="ctr">
               <a:buNone/>
             </a:pPr>
             <a:r>
@@ -9529,7 +10285,7 @@
           <a:bodyPr wrap="square" lIns="0" tIns="0" rIns="0" bIns="0" rtlCol="0" anchor="ctr"/>
           <a:lstStyle/>
           <a:p>
-            <a:pPr indent="0" marL="0">
+            <a:pPr marL="0" indent="0">
               <a:buNone/>
             </a:pPr>
             <a:r>
@@ -9568,7 +10324,7 @@
           <a:bodyPr wrap="square" lIns="0" tIns="0" rIns="0" bIns="0" rtlCol="0" anchor="ctr"/>
           <a:lstStyle/>
           <a:p>
-            <a:pPr indent="0" marL="0">
+            <a:pPr marL="0" indent="0">
               <a:buNone/>
             </a:pPr>
             <a:r>
@@ -9607,6 +10363,13 @@
           </a:solidFill>
           <a:ln/>
         </p:spPr>
+        <p:txBody>
+          <a:bodyPr/>
+          <a:lstStyle/>
+          <a:p>
+            <a:endParaRPr lang="fr-FR"/>
+          </a:p>
+        </p:txBody>
       </p:sp>
       <p:sp>
         <p:nvSpPr>
@@ -9629,7 +10392,7 @@
           <a:bodyPr wrap="square" lIns="0" tIns="0" rIns="0" bIns="0" rtlCol="0" anchor="ctr"/>
           <a:lstStyle/>
           <a:p>
-            <a:pPr algn="ctr" indent="0" marL="0">
+            <a:pPr marL="0" indent="0" algn="ctr">
               <a:buNone/>
             </a:pPr>
             <a:r>
@@ -9668,7 +10431,7 @@
           <a:bodyPr wrap="square" lIns="0" tIns="0" rIns="0" bIns="0" rtlCol="0" anchor="ctr"/>
           <a:lstStyle/>
           <a:p>
-            <a:pPr indent="0" marL="0">
+            <a:pPr marL="0" indent="0">
               <a:buNone/>
             </a:pPr>
             <a:r>
@@ -9707,7 +10470,7 @@
           <a:bodyPr wrap="square" lIns="0" tIns="0" rIns="0" bIns="0" rtlCol="0" anchor="ctr"/>
           <a:lstStyle/>
           <a:p>
-            <a:pPr indent="0" marL="0">
+            <a:pPr marL="0" indent="0">
               <a:buNone/>
             </a:pPr>
             <a:r>
@@ -9751,13 +10514,20 @@
             <a:prstDash val="solid"/>
           </a:ln>
           <a:effectLst>
-            <a:outerShdw sx="100000" sy="100000" kx="0" ky="0" algn="bl" rotWithShape="0" blurRad="101600" dist="38100" dir="5400000">
+            <a:outerShdw blurRad="101600" dist="38100" dir="5400000" algn="bl" rotWithShape="0">
               <a:srgbClr val="000000">
                 <a:alpha val="12000"/>
               </a:srgbClr>
             </a:outerShdw>
           </a:effectLst>
         </p:spPr>
+        <p:txBody>
+          <a:bodyPr/>
+          <a:lstStyle/>
+          <a:p>
+            <a:endParaRPr lang="fr-FR"/>
+          </a:p>
+        </p:txBody>
       </p:sp>
       <p:sp>
         <p:nvSpPr>
@@ -9780,7 +10550,7 @@
           <a:bodyPr wrap="square" lIns="0" tIns="0" rIns="0" bIns="0" rtlCol="0" anchor="ctr"/>
           <a:lstStyle/>
           <a:p>
-            <a:pPr indent="0" marL="0">
+            <a:pPr marL="0" indent="0">
               <a:buNone/>
             </a:pPr>
             <a:r>
@@ -9817,6 +10587,13 @@
           </a:solidFill>
           <a:ln/>
         </p:spPr>
+        <p:txBody>
+          <a:bodyPr/>
+          <a:lstStyle/>
+          <a:p>
+            <a:endParaRPr lang="fr-FR"/>
+          </a:p>
+        </p:txBody>
       </p:sp>
       <p:sp>
         <p:nvSpPr>
@@ -9839,7 +10616,7 @@
           <a:bodyPr wrap="square" lIns="0" tIns="0" rIns="0" bIns="0" rtlCol="0" anchor="ctr"/>
           <a:lstStyle/>
           <a:p>
-            <a:pPr algn="ctr" indent="0" marL="0">
+            <a:pPr marL="0" indent="0" algn="ctr">
               <a:buNone/>
             </a:pPr>
             <a:r>
@@ -9878,7 +10655,7 @@
           <a:bodyPr wrap="square" lIns="0" tIns="0" rIns="0" bIns="0" rtlCol="0" anchor="ctr"/>
           <a:lstStyle/>
           <a:p>
-            <a:pPr indent="0" marL="0">
+            <a:pPr marL="0" indent="0">
               <a:buNone/>
             </a:pPr>
             <a:r>
@@ -9915,6 +10692,13 @@
           </a:solidFill>
           <a:ln/>
         </p:spPr>
+        <p:txBody>
+          <a:bodyPr/>
+          <a:lstStyle/>
+          <a:p>
+            <a:endParaRPr lang="fr-FR"/>
+          </a:p>
+        </p:txBody>
       </p:sp>
       <p:sp>
         <p:nvSpPr>
@@ -9937,7 +10721,7 @@
           <a:bodyPr wrap="square" lIns="0" tIns="0" rIns="0" bIns="0" rtlCol="0" anchor="ctr"/>
           <a:lstStyle/>
           <a:p>
-            <a:pPr algn="ctr" indent="0" marL="0">
+            <a:pPr marL="0" indent="0" algn="ctr">
               <a:buNone/>
             </a:pPr>
             <a:r>
@@ -9976,7 +10760,7 @@
           <a:bodyPr wrap="square" lIns="0" tIns="0" rIns="0" bIns="0" rtlCol="0" anchor="ctr"/>
           <a:lstStyle/>
           <a:p>
-            <a:pPr indent="0" marL="0">
+            <a:pPr marL="0" indent="0">
               <a:buNone/>
             </a:pPr>
             <a:r>
@@ -10013,6 +10797,13 @@
           </a:solidFill>
           <a:ln/>
         </p:spPr>
+        <p:txBody>
+          <a:bodyPr/>
+          <a:lstStyle/>
+          <a:p>
+            <a:endParaRPr lang="fr-FR"/>
+          </a:p>
+        </p:txBody>
       </p:sp>
       <p:sp>
         <p:nvSpPr>
@@ -10035,7 +10826,7 @@
           <a:bodyPr wrap="square" lIns="0" tIns="0" rIns="0" bIns="0" rtlCol="0" anchor="ctr"/>
           <a:lstStyle/>
           <a:p>
-            <a:pPr algn="ctr" indent="0" marL="0">
+            <a:pPr marL="0" indent="0" algn="ctr">
               <a:buNone/>
             </a:pPr>
             <a:r>
@@ -10074,7 +10865,7 @@
           <a:bodyPr wrap="square" lIns="0" tIns="0" rIns="0" bIns="0" rtlCol="0" anchor="ctr"/>
           <a:lstStyle/>
           <a:p>
-            <a:pPr indent="0" marL="0">
+            <a:pPr marL="0" indent="0">
               <a:buNone/>
             </a:pPr>
             <a:r>
@@ -10111,6 +10902,13 @@
           </a:solidFill>
           <a:ln/>
         </p:spPr>
+        <p:txBody>
+          <a:bodyPr/>
+          <a:lstStyle/>
+          <a:p>
+            <a:endParaRPr lang="fr-FR"/>
+          </a:p>
+        </p:txBody>
       </p:sp>
       <p:sp>
         <p:nvSpPr>
@@ -10133,7 +10931,7 @@
           <a:bodyPr wrap="square" lIns="0" tIns="0" rIns="0" bIns="0" rtlCol="0" anchor="ctr"/>
           <a:lstStyle/>
           <a:p>
-            <a:pPr algn="ctr" indent="0" marL="0">
+            <a:pPr marL="0" indent="0" algn="ctr">
               <a:buNone/>
             </a:pPr>
             <a:r>
@@ -10172,7 +10970,7 @@
           <a:bodyPr wrap="square" lIns="0" tIns="0" rIns="0" bIns="0" rtlCol="0" anchor="ctr"/>
           <a:lstStyle/>
           <a:p>
-            <a:pPr indent="0" marL="0">
+            <a:pPr marL="0" indent="0">
               <a:buNone/>
             </a:pPr>
             <a:r>
@@ -10209,6 +11007,13 @@
           </a:solidFill>
           <a:ln/>
         </p:spPr>
+        <p:txBody>
+          <a:bodyPr/>
+          <a:lstStyle/>
+          <a:p>
+            <a:endParaRPr lang="fr-FR"/>
+          </a:p>
+        </p:txBody>
       </p:sp>
       <p:sp>
         <p:nvSpPr>
@@ -10231,7 +11036,7 @@
           <a:bodyPr wrap="square" lIns="0" tIns="0" rIns="0" bIns="0" rtlCol="0" anchor="ctr"/>
           <a:lstStyle/>
           <a:p>
-            <a:pPr algn="ctr" indent="0" marL="0">
+            <a:pPr marL="0" indent="0" algn="ctr">
               <a:buNone/>
             </a:pPr>
             <a:r>
@@ -10270,7 +11075,7 @@
           <a:bodyPr wrap="square" lIns="0" tIns="0" rIns="0" bIns="0" rtlCol="0" anchor="ctr"/>
           <a:lstStyle/>
           <a:p>
-            <a:pPr indent="0" marL="0">
+            <a:pPr marL="0" indent="0">
               <a:buNone/>
             </a:pPr>
             <a:r>
@@ -10304,6 +11109,7 @@
         <a:solidFill>
           <a:srgbClr val="FFFFFF"/>
         </a:solidFill>
+        <a:effectLst/>
       </p:bgPr>
     </p:bg>
     <p:spTree>
@@ -10341,7 +11147,7 @@
           <a:bodyPr wrap="square" lIns="0" tIns="0" rIns="0" bIns="0" rtlCol="0" anchor="ctr"/>
           <a:lstStyle/>
           <a:p>
-            <a:pPr indent="0" marL="0">
+            <a:pPr marL="0" indent="0">
               <a:buNone/>
             </a:pPr>
             <a:r>
@@ -10380,7 +11186,7 @@
           <a:bodyPr wrap="square" lIns="0" tIns="0" rIns="0" bIns="0" rtlCol="0" anchor="ctr"/>
           <a:lstStyle/>
           <a:p>
-            <a:pPr indent="0" marL="0">
+            <a:pPr marL="0" indent="0">
               <a:buNone/>
             </a:pPr>
             <a:r>
@@ -10419,6 +11225,13 @@
           </a:solidFill>
           <a:ln/>
         </p:spPr>
+        <p:txBody>
+          <a:bodyPr/>
+          <a:lstStyle/>
+          <a:p>
+            <a:endParaRPr lang="fr-FR"/>
+          </a:p>
+        </p:txBody>
       </p:sp>
       <p:sp>
         <p:nvSpPr>
@@ -10441,7 +11254,7 @@
           <a:bodyPr wrap="square" lIns="508" tIns="508" rIns="508" bIns="508" rtlCol="0" anchor="ctr"/>
           <a:lstStyle/>
           <a:p>
-            <a:pPr algn="ctr" indent="0" marL="0">
+            <a:pPr marL="0" indent="0" algn="ctr">
               <a:buNone/>
             </a:pPr>
             <a:r>
@@ -10478,6 +11291,13 @@
           </a:solidFill>
           <a:ln/>
         </p:spPr>
+        <p:txBody>
+          <a:bodyPr/>
+          <a:lstStyle/>
+          <a:p>
+            <a:endParaRPr lang="fr-FR"/>
+          </a:p>
+        </p:txBody>
       </p:sp>
       <p:sp>
         <p:nvSpPr>
@@ -10500,6 +11320,13 @@
           </a:solidFill>
           <a:ln/>
         </p:spPr>
+        <p:txBody>
+          <a:bodyPr/>
+          <a:lstStyle/>
+          <a:p>
+            <a:endParaRPr lang="fr-FR"/>
+          </a:p>
+        </p:txBody>
       </p:sp>
       <p:sp>
         <p:nvSpPr>
@@ -10522,7 +11349,7 @@
           <a:bodyPr wrap="square" lIns="508" tIns="508" rIns="508" bIns="508" rtlCol="0" anchor="ctr"/>
           <a:lstStyle/>
           <a:p>
-            <a:pPr algn="ctr" indent="0" marL="0">
+            <a:pPr marL="0" indent="0" algn="ctr">
               <a:buNone/>
             </a:pPr>
             <a:r>
@@ -10539,7 +11366,7 @@
             <a:endParaRPr lang="en-US" sz="1100" dirty="0"/>
           </a:p>
           <a:p>
-            <a:pPr algn="ctr" indent="0" marL="0">
+            <a:pPr marL="0" indent="0" algn="ctr">
               <a:buNone/>
             </a:pPr>
             <a:r>
@@ -10576,6 +11403,13 @@
           </a:solidFill>
           <a:ln/>
         </p:spPr>
+        <p:txBody>
+          <a:bodyPr/>
+          <a:lstStyle/>
+          <a:p>
+            <a:endParaRPr lang="fr-FR"/>
+          </a:p>
+        </p:txBody>
       </p:sp>
       <p:sp>
         <p:nvSpPr>
@@ -10598,6 +11432,13 @@
           </a:solidFill>
           <a:ln/>
         </p:spPr>
+        <p:txBody>
+          <a:bodyPr/>
+          <a:lstStyle/>
+          <a:p>
+            <a:endParaRPr lang="fr-FR"/>
+          </a:p>
+        </p:txBody>
       </p:sp>
       <p:sp>
         <p:nvSpPr>
@@ -10620,7 +11461,7 @@
           <a:bodyPr wrap="square" lIns="508" tIns="508" rIns="508" bIns="508" rtlCol="0" anchor="ctr"/>
           <a:lstStyle/>
           <a:p>
-            <a:pPr algn="ctr" indent="0" marL="0">
+            <a:pPr marL="0" indent="0" algn="ctr">
               <a:buNone/>
             </a:pPr>
             <a:r>
@@ -10637,7 +11478,7 @@
             <a:endParaRPr lang="en-US" sz="1100" dirty="0"/>
           </a:p>
           <a:p>
-            <a:pPr algn="ctr" indent="0" marL="0">
+            <a:pPr marL="0" indent="0" algn="ctr">
               <a:buNone/>
             </a:pPr>
             <a:r>
@@ -10674,6 +11515,13 @@
           </a:solidFill>
           <a:ln/>
         </p:spPr>
+        <p:txBody>
+          <a:bodyPr/>
+          <a:lstStyle/>
+          <a:p>
+            <a:endParaRPr lang="fr-FR"/>
+          </a:p>
+        </p:txBody>
       </p:sp>
       <p:sp>
         <p:nvSpPr>
@@ -10696,6 +11544,13 @@
           </a:solidFill>
           <a:ln/>
         </p:spPr>
+        <p:txBody>
+          <a:bodyPr/>
+          <a:lstStyle/>
+          <a:p>
+            <a:endParaRPr lang="fr-FR"/>
+          </a:p>
+        </p:txBody>
       </p:sp>
       <p:sp>
         <p:nvSpPr>
@@ -10718,7 +11573,7 @@
           <a:bodyPr wrap="square" lIns="508" tIns="508" rIns="508" bIns="508" rtlCol="0" anchor="ctr"/>
           <a:lstStyle/>
           <a:p>
-            <a:pPr algn="ctr" indent="0" marL="0">
+            <a:pPr marL="0" indent="0" algn="ctr">
               <a:buNone/>
             </a:pPr>
             <a:r>
@@ -10755,6 +11610,13 @@
           </a:solidFill>
           <a:ln/>
         </p:spPr>
+        <p:txBody>
+          <a:bodyPr/>
+          <a:lstStyle/>
+          <a:p>
+            <a:endParaRPr lang="fr-FR"/>
+          </a:p>
+        </p:txBody>
       </p:sp>
       <p:sp>
         <p:nvSpPr>
@@ -10777,6 +11639,13 @@
           </a:solidFill>
           <a:ln/>
         </p:spPr>
+        <p:txBody>
+          <a:bodyPr/>
+          <a:lstStyle/>
+          <a:p>
+            <a:endParaRPr lang="fr-FR"/>
+          </a:p>
+        </p:txBody>
       </p:sp>
       <p:sp>
         <p:nvSpPr>
@@ -10799,7 +11668,7 @@
           <a:bodyPr wrap="square" lIns="508" tIns="508" rIns="508" bIns="508" rtlCol="0" anchor="ctr"/>
           <a:lstStyle/>
           <a:p>
-            <a:pPr algn="ctr" indent="0" marL="0">
+            <a:pPr marL="0" indent="0" algn="ctr">
               <a:buNone/>
             </a:pPr>
             <a:r>
@@ -10816,7 +11685,7 @@
             <a:endParaRPr lang="en-US" sz="1100" dirty="0"/>
           </a:p>
           <a:p>
-            <a:pPr algn="ctr" indent="0" marL="0">
+            <a:pPr marL="0" indent="0" algn="ctr">
               <a:buNone/>
             </a:pPr>
             <a:r>
@@ -10860,13 +11729,20 @@
             <a:prstDash val="solid"/>
           </a:ln>
           <a:effectLst>
-            <a:outerShdw sx="100000" sy="100000" kx="0" ky="0" algn="bl" rotWithShape="0" blurRad="101600" dist="38100" dir="5400000">
+            <a:outerShdw blurRad="101600" dist="38100" dir="5400000" algn="bl" rotWithShape="0">
               <a:srgbClr val="000000">
                 <a:alpha val="12000"/>
               </a:srgbClr>
             </a:outerShdw>
           </a:effectLst>
         </p:spPr>
+        <p:txBody>
+          <a:bodyPr/>
+          <a:lstStyle/>
+          <a:p>
+            <a:endParaRPr lang="fr-FR"/>
+          </a:p>
+        </p:txBody>
       </p:sp>
       <p:sp>
         <p:nvSpPr>
@@ -10889,7 +11765,7 @@
           <a:bodyPr wrap="square" lIns="0" tIns="0" rIns="0" bIns="0" rtlCol="0" anchor="ctr"/>
           <a:lstStyle/>
           <a:p>
-            <a:pPr indent="0" marL="0">
+            <a:pPr marL="0" indent="0">
               <a:buNone/>
             </a:pPr>
             <a:r>
@@ -10928,7 +11804,7 @@
           <a:bodyPr wrap="square" lIns="0" tIns="0" rIns="0" bIns="0" rtlCol="0" anchor="t"/>
           <a:lstStyle/>
           <a:p>
-            <a:pPr indent="0" marL="0">
+            <a:pPr marL="0" indent="0">
               <a:lnSpc>
                 <a:spcPct val="125000"/>
               </a:lnSpc>
@@ -10975,13 +11851,20 @@
             <a:prstDash val="solid"/>
           </a:ln>
           <a:effectLst>
-            <a:outerShdw sx="100000" sy="100000" kx="0" ky="0" algn="bl" rotWithShape="0" blurRad="101600" dist="38100" dir="5400000">
+            <a:outerShdw blurRad="101600" dist="38100" dir="5400000" algn="bl" rotWithShape="0">
               <a:srgbClr val="000000">
                 <a:alpha val="12000"/>
               </a:srgbClr>
             </a:outerShdw>
           </a:effectLst>
         </p:spPr>
+        <p:txBody>
+          <a:bodyPr/>
+          <a:lstStyle/>
+          <a:p>
+            <a:endParaRPr lang="fr-FR"/>
+          </a:p>
+        </p:txBody>
       </p:sp>
       <p:sp>
         <p:nvSpPr>
@@ -11004,7 +11887,7 @@
           <a:bodyPr wrap="square" lIns="0" tIns="0" rIns="0" bIns="0" rtlCol="0" anchor="ctr"/>
           <a:lstStyle/>
           <a:p>
-            <a:pPr indent="0" marL="0">
+            <a:pPr marL="0" indent="0">
               <a:buNone/>
             </a:pPr>
             <a:r>
@@ -11043,7 +11926,7 @@
           <a:bodyPr wrap="square" lIns="0" tIns="0" rIns="0" bIns="0" rtlCol="0" anchor="t"/>
           <a:lstStyle/>
           <a:p>
-            <a:pPr indent="0" marL="0">
+            <a:pPr marL="0" indent="0">
               <a:lnSpc>
                 <a:spcPct val="125000"/>
               </a:lnSpc>
@@ -11365,4 +12248,319 @@
     </a:ext>
   </a:extLst>
 </a:theme>
+</file>
+
+<file path=ppt/theme/theme2.xml><?xml version="1.0" encoding="utf-8"?>
+<a:theme xmlns:a="http://schemas.openxmlformats.org/drawingml/2006/main" name="Thème Office">
+  <a:themeElements>
+    <a:clrScheme name="Office">
+      <a:dk1>
+        <a:sysClr val="windowText" lastClr="000000"/>
+      </a:dk1>
+      <a:lt1>
+        <a:sysClr val="window" lastClr="FFFFFF"/>
+      </a:lt1>
+      <a:dk2>
+        <a:srgbClr val="0E2841"/>
+      </a:dk2>
+      <a:lt2>
+        <a:srgbClr val="E8E8E8"/>
+      </a:lt2>
+      <a:accent1>
+        <a:srgbClr val="156082"/>
+      </a:accent1>
+      <a:accent2>
+        <a:srgbClr val="E97132"/>
+      </a:accent2>
+      <a:accent3>
+        <a:srgbClr val="196B24"/>
+      </a:accent3>
+      <a:accent4>
+        <a:srgbClr val="0F9ED5"/>
+      </a:accent4>
+      <a:accent5>
+        <a:srgbClr val="A02B93"/>
+      </a:accent5>
+      <a:accent6>
+        <a:srgbClr val="4EA72E"/>
+      </a:accent6>
+      <a:hlink>
+        <a:srgbClr val="467886"/>
+      </a:hlink>
+      <a:folHlink>
+        <a:srgbClr val="96607D"/>
+      </a:folHlink>
+    </a:clrScheme>
+    <a:fontScheme name="Office">
+      <a:majorFont>
+        <a:latin typeface="Aptos Display" panose="02110004020202020204"/>
+        <a:ea typeface=""/>
+        <a:cs typeface=""/>
+        <a:font script="Jpan" typeface="游ゴシック Light"/>
+        <a:font script="Hang" typeface="맑은 고딕"/>
+        <a:font script="Hans" typeface="等线 Light"/>
+        <a:font script="Hant" typeface="新細明體"/>
+        <a:font script="Arab" typeface="Times New Roman"/>
+        <a:font script="Hebr" typeface="Times New Roman"/>
+        <a:font script="Thai" typeface="Angsana New"/>
+        <a:font script="Ethi" typeface="Nyala"/>
+        <a:font script="Beng" typeface="Vrinda"/>
+        <a:font script="Gujr" typeface="Shruti"/>
+        <a:font script="Khmr" typeface="MoolBoran"/>
+        <a:font script="Knda" typeface="Tunga"/>
+        <a:font script="Guru" typeface="Raavi"/>
+        <a:font script="Cans" typeface="Euphemia"/>
+        <a:font script="Cher" typeface="Plantagenet Cherokee"/>
+        <a:font script="Yiii" typeface="Microsoft Yi Baiti"/>
+        <a:font script="Tibt" typeface="Microsoft Himalaya"/>
+        <a:font script="Thaa" typeface="MV Boli"/>
+        <a:font script="Deva" typeface="Mangal"/>
+        <a:font script="Telu" typeface="Gautami"/>
+        <a:font script="Taml" typeface="Latha"/>
+        <a:font script="Syrc" typeface="Estrangelo Edessa"/>
+        <a:font script="Orya" typeface="Kalinga"/>
+        <a:font script="Mlym" typeface="Kartika"/>
+        <a:font script="Laoo" typeface="DokChampa"/>
+        <a:font script="Sinh" typeface="Iskoola Pota"/>
+        <a:font script="Mong" typeface="Mongolian Baiti"/>
+        <a:font script="Viet" typeface="Times New Roman"/>
+        <a:font script="Uigh" typeface="Microsoft Uighur"/>
+        <a:font script="Geor" typeface="Sylfaen"/>
+        <a:font script="Armn" typeface="Arial"/>
+        <a:font script="Bugi" typeface="Leelawadee UI"/>
+        <a:font script="Bopo" typeface="Microsoft JhengHei"/>
+        <a:font script="Java" typeface="Javanese Text"/>
+        <a:font script="Lisu" typeface="Segoe UI"/>
+        <a:font script="Mymr" typeface="Myanmar Text"/>
+        <a:font script="Nkoo" typeface="Ebrima"/>
+        <a:font script="Olck" typeface="Nirmala UI"/>
+        <a:font script="Osma" typeface="Ebrima"/>
+        <a:font script="Phag" typeface="Phagspa"/>
+        <a:font script="Syrn" typeface="Estrangelo Edessa"/>
+        <a:font script="Syrj" typeface="Estrangelo Edessa"/>
+        <a:font script="Syre" typeface="Estrangelo Edessa"/>
+        <a:font script="Sora" typeface="Nirmala UI"/>
+        <a:font script="Tale" typeface="Microsoft Tai Le"/>
+        <a:font script="Talu" typeface="Microsoft New Tai Lue"/>
+        <a:font script="Tfng" typeface="Ebrima"/>
+      </a:majorFont>
+      <a:minorFont>
+        <a:latin typeface="Aptos" panose="02110004020202020204"/>
+        <a:ea typeface=""/>
+        <a:cs typeface=""/>
+        <a:font script="Jpan" typeface="游ゴシック"/>
+        <a:font script="Hang" typeface="맑은 고딕"/>
+        <a:font script="Hans" typeface="等线"/>
+        <a:font script="Hant" typeface="新細明體"/>
+        <a:font script="Arab" typeface="Arial"/>
+        <a:font script="Hebr" typeface="Arial"/>
+        <a:font script="Thai" typeface="Cordia New"/>
+        <a:font script="Ethi" typeface="Nyala"/>
+        <a:font script="Beng" typeface="Vrinda"/>
+        <a:font script="Gujr" typeface="Shruti"/>
+        <a:font script="Khmr" typeface="DaunPenh"/>
+        <a:font script="Knda" typeface="Tunga"/>
+        <a:font script="Guru" typeface="Raavi"/>
+        <a:font script="Cans" typeface="Euphemia"/>
+        <a:font script="Cher" typeface="Plantagenet Cherokee"/>
+        <a:font script="Yiii" typeface="Microsoft Yi Baiti"/>
+        <a:font script="Tibt" typeface="Microsoft Himalaya"/>
+        <a:font script="Thaa" typeface="MV Boli"/>
+        <a:font script="Deva" typeface="Mangal"/>
+        <a:font script="Telu" typeface="Gautami"/>
+        <a:font script="Taml" typeface="Latha"/>
+        <a:font script="Syrc" typeface="Estrangelo Edessa"/>
+        <a:font script="Orya" typeface="Kalinga"/>
+        <a:font script="Mlym" typeface="Kartika"/>
+        <a:font script="Laoo" typeface="DokChampa"/>
+        <a:font script="Sinh" typeface="Iskoola Pota"/>
+        <a:font script="Mong" typeface="Mongolian Baiti"/>
+        <a:font script="Viet" typeface="Arial"/>
+        <a:font script="Uigh" typeface="Microsoft Uighur"/>
+        <a:font script="Geor" typeface="Sylfaen"/>
+        <a:font script="Armn" typeface="Arial"/>
+        <a:font script="Bugi" typeface="Leelawadee UI"/>
+        <a:font script="Bopo" typeface="Microsoft JhengHei"/>
+        <a:font script="Java" typeface="Javanese Text"/>
+        <a:font script="Lisu" typeface="Segoe UI"/>
+        <a:font script="Mymr" typeface="Myanmar Text"/>
+        <a:font script="Nkoo" typeface="Ebrima"/>
+        <a:font script="Olck" typeface="Nirmala UI"/>
+        <a:font script="Osma" typeface="Ebrima"/>
+        <a:font script="Phag" typeface="Phagspa"/>
+        <a:font script="Syrn" typeface="Estrangelo Edessa"/>
+        <a:font script="Syrj" typeface="Estrangelo Edessa"/>
+        <a:font script="Syre" typeface="Estrangelo Edessa"/>
+        <a:font script="Sora" typeface="Nirmala UI"/>
+        <a:font script="Tale" typeface="Microsoft Tai Le"/>
+        <a:font script="Talu" typeface="Microsoft New Tai Lue"/>
+        <a:font script="Tfng" typeface="Ebrima"/>
+      </a:minorFont>
+    </a:fontScheme>
+    <a:fmtScheme name="Office">
+      <a:fillStyleLst>
+        <a:solidFill>
+          <a:schemeClr val="phClr"/>
+        </a:solidFill>
+        <a:gradFill rotWithShape="1">
+          <a:gsLst>
+            <a:gs pos="0">
+              <a:schemeClr val="phClr">
+                <a:lumMod val="110000"/>
+                <a:satMod val="105000"/>
+                <a:tint val="67000"/>
+              </a:schemeClr>
+            </a:gs>
+            <a:gs pos="50000">
+              <a:schemeClr val="phClr">
+                <a:lumMod val="105000"/>
+                <a:satMod val="103000"/>
+                <a:tint val="73000"/>
+              </a:schemeClr>
+            </a:gs>
+            <a:gs pos="100000">
+              <a:schemeClr val="phClr">
+                <a:lumMod val="105000"/>
+                <a:satMod val="109000"/>
+                <a:tint val="81000"/>
+              </a:schemeClr>
+            </a:gs>
+          </a:gsLst>
+          <a:lin ang="5400000" scaled="0"/>
+        </a:gradFill>
+        <a:gradFill rotWithShape="1">
+          <a:gsLst>
+            <a:gs pos="0">
+              <a:schemeClr val="phClr">
+                <a:satMod val="103000"/>
+                <a:lumMod val="102000"/>
+                <a:tint val="94000"/>
+              </a:schemeClr>
+            </a:gs>
+            <a:gs pos="50000">
+              <a:schemeClr val="phClr">
+                <a:satMod val="110000"/>
+                <a:lumMod val="100000"/>
+                <a:shade val="100000"/>
+              </a:schemeClr>
+            </a:gs>
+            <a:gs pos="100000">
+              <a:schemeClr val="phClr">
+                <a:lumMod val="99000"/>
+                <a:satMod val="120000"/>
+                <a:shade val="78000"/>
+              </a:schemeClr>
+            </a:gs>
+          </a:gsLst>
+          <a:lin ang="5400000" scaled="0"/>
+        </a:gradFill>
+      </a:fillStyleLst>
+      <a:lnStyleLst>
+        <a:ln w="12700" cap="flat" cmpd="sng" algn="ctr">
+          <a:solidFill>
+            <a:schemeClr val="phClr"/>
+          </a:solidFill>
+          <a:prstDash val="solid"/>
+          <a:miter lim="800000"/>
+        </a:ln>
+        <a:ln w="19050" cap="flat" cmpd="sng" algn="ctr">
+          <a:solidFill>
+            <a:schemeClr val="phClr"/>
+          </a:solidFill>
+          <a:prstDash val="solid"/>
+          <a:miter lim="800000"/>
+        </a:ln>
+        <a:ln w="25400" cap="flat" cmpd="sng" algn="ctr">
+          <a:solidFill>
+            <a:schemeClr val="phClr"/>
+          </a:solidFill>
+          <a:prstDash val="solid"/>
+          <a:miter lim="800000"/>
+        </a:ln>
+      </a:lnStyleLst>
+      <a:effectStyleLst>
+        <a:effectStyle>
+          <a:effectLst/>
+        </a:effectStyle>
+        <a:effectStyle>
+          <a:effectLst/>
+        </a:effectStyle>
+        <a:effectStyle>
+          <a:effectLst>
+            <a:outerShdw blurRad="57150" dist="19050" dir="5400000" algn="ctr" rotWithShape="0">
+              <a:srgbClr val="000000">
+                <a:alpha val="63000"/>
+              </a:srgbClr>
+            </a:outerShdw>
+          </a:effectLst>
+        </a:effectStyle>
+      </a:effectStyleLst>
+      <a:bgFillStyleLst>
+        <a:solidFill>
+          <a:schemeClr val="phClr"/>
+        </a:solidFill>
+        <a:solidFill>
+          <a:schemeClr val="phClr">
+            <a:tint val="95000"/>
+            <a:satMod val="170000"/>
+          </a:schemeClr>
+        </a:solidFill>
+        <a:gradFill rotWithShape="1">
+          <a:gsLst>
+            <a:gs pos="0">
+              <a:schemeClr val="phClr">
+                <a:tint val="93000"/>
+                <a:satMod val="150000"/>
+                <a:shade val="98000"/>
+                <a:lumMod val="102000"/>
+              </a:schemeClr>
+            </a:gs>
+            <a:gs pos="50000">
+              <a:schemeClr val="phClr">
+                <a:tint val="98000"/>
+                <a:satMod val="130000"/>
+                <a:shade val="90000"/>
+                <a:lumMod val="103000"/>
+              </a:schemeClr>
+            </a:gs>
+            <a:gs pos="100000">
+              <a:schemeClr val="phClr">
+                <a:shade val="63000"/>
+                <a:satMod val="120000"/>
+              </a:schemeClr>
+            </a:gs>
+          </a:gsLst>
+          <a:lin ang="5400000" scaled="0"/>
+        </a:gradFill>
+      </a:bgFillStyleLst>
+    </a:fmtScheme>
+  </a:themeElements>
+  <a:objectDefaults>
+    <a:lnDef>
+      <a:spPr/>
+      <a:bodyPr/>
+      <a:lstStyle/>
+      <a:style>
+        <a:lnRef idx="2">
+          <a:schemeClr val="accent1"/>
+        </a:lnRef>
+        <a:fillRef idx="0">
+          <a:schemeClr val="accent1"/>
+        </a:fillRef>
+        <a:effectRef idx="1">
+          <a:schemeClr val="accent1"/>
+        </a:effectRef>
+        <a:fontRef idx="minor">
+          <a:schemeClr val="tx1"/>
+        </a:fontRef>
+      </a:style>
+    </a:lnDef>
+  </a:objectDefaults>
+  <a:extraClrSchemeLst/>
+  <a:extLst>
+    <a:ext uri="{05A4C25C-085E-4340-85A3-A5531E510DB2}">
+      <thm15:themeFamily xmlns:thm15="http://schemas.microsoft.com/office/thememl/2012/main" name="Office Theme" id="{2E142A2C-CD16-42D6-873A-C26D2A0506FA}" vid="{1BDDFF52-6CD6-40A5-AB3C-68EB2F1E4D0A}"/>
+    </a:ext>
+  </a:extLst>
+</a:theme>
 </file>